--- a/presentation/phase1_presentation.pptx
+++ b/presentation/phase1_presentation.pptx
@@ -2,21 +2,21 @@
 <file path=ppt/presentation.xml><?xml version="1.0" encoding="utf-8"?>
 <p:presentation xmlns:p="http://schemas.openxmlformats.org/presentationml/2006/main">
   <p:sldMasterIdLst>
-    <p:sldMasterId xmlns:r="http://schemas.openxmlformats.org/officeDocument/2006/relationships" id="2147483648" r:id="R35c491fd196d405d"/>
+    <p:sldMasterId xmlns:r="http://schemas.openxmlformats.org/officeDocument/2006/relationships" id="2147483648" r:id="R463f2ee32bf54beb"/>
   </p:sldMasterIdLst>
   <p:notesMasterIdLst>
-    <p:notesMasterId xmlns:r="http://schemas.openxmlformats.org/officeDocument/2006/relationships" r:id="Rbd4909a84f2f49b1"/>
+    <p:notesMasterId xmlns:r="http://schemas.openxmlformats.org/officeDocument/2006/relationships" r:id="Rdda68a98c8bf47db"/>
   </p:notesMasterIdLst>
   <p:sldIdLst>
-    <p:sldId xmlns:r="http://schemas.openxmlformats.org/officeDocument/2006/relationships" id="256" r:id="R9db4a3e33af24b64"/>
-    <p:sldId xmlns:r="http://schemas.openxmlformats.org/officeDocument/2006/relationships" id="257" r:id="Rbdc20867cd084f1b"/>
-    <p:sldId xmlns:r="http://schemas.openxmlformats.org/officeDocument/2006/relationships" id="258" r:id="R79e3ab7474324e01"/>
-    <p:sldId xmlns:r="http://schemas.openxmlformats.org/officeDocument/2006/relationships" id="259" r:id="R8c1e68fe75674c14"/>
-    <p:sldId xmlns:r="http://schemas.openxmlformats.org/officeDocument/2006/relationships" id="260" r:id="R906286fd896c4de3"/>
-    <p:sldId xmlns:r="http://schemas.openxmlformats.org/officeDocument/2006/relationships" id="261" r:id="Rd1dded3d9c0946c6"/>
-    <p:sldId xmlns:r="http://schemas.openxmlformats.org/officeDocument/2006/relationships" id="262" r:id="R66a8200eef6f4901"/>
-    <p:sldId xmlns:r="http://schemas.openxmlformats.org/officeDocument/2006/relationships" id="263" r:id="R7f45a8bcb8fe421b"/>
-    <p:sldId xmlns:r="http://schemas.openxmlformats.org/officeDocument/2006/relationships" id="264" r:id="R09aaf2236c3d4262"/>
+    <p:sldId xmlns:r="http://schemas.openxmlformats.org/officeDocument/2006/relationships" id="256" r:id="R932668a31ace4199"/>
+    <p:sldId xmlns:r="http://schemas.openxmlformats.org/officeDocument/2006/relationships" id="257" r:id="R0969ec15bac54b9a"/>
+    <p:sldId xmlns:r="http://schemas.openxmlformats.org/officeDocument/2006/relationships" id="258" r:id="Ra7a911cfae574957"/>
+    <p:sldId xmlns:r="http://schemas.openxmlformats.org/officeDocument/2006/relationships" id="259" r:id="Ra025636fc05640a9"/>
+    <p:sldId xmlns:r="http://schemas.openxmlformats.org/officeDocument/2006/relationships" id="260" r:id="R10751ed17d7c4296"/>
+    <p:sldId xmlns:r="http://schemas.openxmlformats.org/officeDocument/2006/relationships" id="261" r:id="Re402d5afdee14fce"/>
+    <p:sldId xmlns:r="http://schemas.openxmlformats.org/officeDocument/2006/relationships" id="262" r:id="R8588cfc3ff6b41c0"/>
+    <p:sldId xmlns:r="http://schemas.openxmlformats.org/officeDocument/2006/relationships" id="263" r:id="R29463eae6a5f460d"/>
+    <p:sldId xmlns:r="http://schemas.openxmlformats.org/officeDocument/2006/relationships" id="264" r:id="Reea9534187614a44"/>
   </p:sldIdLst>
   <p:sldSz cx="12192000" cy="6858000"/>
   <p:notesSz cx="6858000" cy="9144000"/>
@@ -448,7 +448,11 @@
         <p:txBody>
           <a:bodyPr xmlns:a="http://schemas.openxmlformats.org/drawingml/2006/main"/>
           <a:lstStyle xmlns:a="http://schemas.openxmlformats.org/drawingml/2006/main"/>
-          <a:p xmlns:a="http://schemas.openxmlformats.org/drawingml/2006/main"/>
+          <a:p xmlns:a="http://schemas.openxmlformats.org/drawingml/2006/main">
+            <a:r>
+              <a:t>Assigned Project 15: Heart-Disease Risk - Domain-Structured Bayesian Network vs Neural Network. Team T008, Section C, Newton School of Technology, Rishihood University. Five names/enrolments confirmed by the team: Nishtha Gupta2401010303, Aditya Srivastava2401010039, Aanya Mehrotra2401010006, Shrijan Sanidhya2401010449, Abhay Mallik2401020002. Individual contributions remain to be supplied with evidence. Official scope places neural-network implementation in Phase2; it is not a missing Phase1 ML experiment. Current prediction is historical disease presence, not future risk or diagnosis.</a:t>
+            </a:r>
+          </a:p>
         </p:txBody>
       </p:sp>
       <p:sp>
@@ -514,7 +518,11 @@
         <p:txBody>
           <a:bodyPr xmlns:a="http://schemas.openxmlformats.org/drawingml/2006/main"/>
           <a:lstStyle xmlns:a="http://schemas.openxmlformats.org/drawingml/2006/main"/>
-          <a:p xmlns:a="http://schemas.openxmlformats.org/drawingml/2006/main"/>
+          <a:p xmlns:a="http://schemas.openxmlformats.org/drawingml/2006/main">
+            <a:r>
+              <a:t>Read-only 21Oct2026 comparison reversed category labels to UCI numeric codes and compared all14 measurement/target fields, preserving duplicate multiplicity. All920 tuples match the combined processed.cleveland.data303, processed.hungarian.data294, processed.switzerland.data123, processed.va.data200 from https://archive.ics.uci.edu/static/public/45/heart+disease.zip. Local site counts304/293/123/200: ID304 is labelled Cleveland but matches first Hungarian row. It lies in D. No dataset, grouping, split or result changed; any correction requires a separate documented decision and evaluation. Git f739c2b first added byte-identical CSV; no acquisition/merge script. UCI currently lists CC BY4.0, DOI10.24432/C52P4X. Supplier/download/merge/license history and patient linkage remain unresolved. Ca/thal excluded for609/484 missing values of918; remaining11 predictors unchanged.</a:t>
+            </a:r>
+          </a:p>
         </p:txBody>
       </p:sp>
       <p:sp>
@@ -580,7 +588,11 @@
         <p:txBody>
           <a:bodyPr xmlns:a="http://schemas.openxmlformats.org/drawingml/2006/main"/>
           <a:lstStyle xmlns:a="http://schemas.openxmlformats.org/drawingml/2006/main"/>
-          <a:p xmlns:a="http://schemas.openxmlformats.org/drawingml/2006/main"/>
+          <a:p xmlns:a="http://schemas.openxmlformats.org/drawingml/2006/main">
+            <a:r>
+              <a:t>Verified CSV counts: pressure 60, cholesterol 201, fbs 90, restecg 2, thalch 55, exang 55, oldpeak 62, slope 307. Zero pressure/cholesterol becomes missing. Age, sex and cp are complete. Numeric missingness indicators are included. Existing chart uses four selected missingness counts. BN uses separate training-only median/mode imputation and quantile bins, and marginalizes missing inference evidence. Missingness is site-dependent and may be informative.</a:t>
+            </a:r>
+          </a:p>
         </p:txBody>
       </p:sp>
       <p:sp>
@@ -646,7 +658,11 @@
         <p:txBody>
           <a:bodyPr xmlns:a="http://schemas.openxmlformats.org/drawingml/2006/main"/>
           <a:lstStyle xmlns:a="http://schemas.openxmlformats.org/drawingml/2006/main"/>
-          <a:p xmlns:a="http://schemas.openxmlformats.org/drawingml/2006/main"/>
+          <a:p xmlns:a="http://schemas.openxmlformats.org/drawingml/2006/main">
+            <a:r>
+              <a:t>Source: artifacts/runs/20261020T193544Z_2a8a1491/effective_protocol.json, pooled/partitions.json and freeze.json. Historical seed42, S/C43, outer44, inner45, final search46, estimator42. Model-family ranking uses unweighted mean outer F1 at p&gt;=0.50, then AUC, then fixed BN/LR/RF/HGB/XGB order. Hyperparameter ties use F1/AUC/canonical JSON. Exact full-precision equality defines ties. C searches k/100 for k=0..100 by F1; ties nearest0.50 then lower k. T cannot choose family or cutoff. Winning outer-CV score still has across-family selection optimism. Hospital checks use no T rows or pooled learned state.</a:t>
+            </a:r>
+          </a:p>
         </p:txBody>
       </p:sp>
       <p:sp>
@@ -712,7 +728,11 @@
         <p:txBody>
           <a:bodyPr xmlns:a="http://schemas.openxmlformats.org/drawingml/2006/main"/>
           <a:lstStyle xmlns:a="http://schemas.openxmlformats.org/drawingml/2006/main"/>
-          <a:p xmlns:a="http://schemas.openxmlformats.org/drawingml/2006/main"/>
+          <a:p xmlns:a="http://schemas.openxmlformats.org/drawingml/2006/main">
+            <a:r>
+              <a:t>Source: artifacts/runs/20261020T193544Z_2a8a1491/pooled/comparison.json and nested_oof_predictions.csv. Full precision mean F1: Logistic regression=0.8230883974615283; Random forest=0.8357547551075293; Histogram gradient boosting=0.8104353064904478; XGBoost=0.8308103379873714; Bayesian network=0.8179300807255652. These are mean per-fold scores, not pooled OOF F1. The selected score is still optimistic after comparing families. The small 0.0049 lead is not a superiority test. BN highest mean outer AUC=0.8780. LR/RF/HGB/XGB/BN search configurations=8/6/8/8/1.</a:t>
+            </a:r>
+          </a:p>
         </p:txBody>
       </p:sp>
       <p:sp>
@@ -778,7 +798,11 @@
         <p:txBody>
           <a:bodyPr xmlns:a="http://schemas.openxmlformats.org/drawingml/2006/main"/>
           <a:lstStyle xmlns:a="http://schemas.openxmlformats.org/drawingml/2006/main"/>
-          <a:p xmlns:a="http://schemas.openxmlformats.org/drawingml/2006/main"/>
+          <a:p xmlns:a="http://schemas.openxmlformats.org/drawingml/2006/main">
+            <a:r>
+              <a:t>Source: artifacts/runs/20261020T193544Z_2a8a1491/pooled/metrics.json, evaluation_predictions.csv and freeze.json. All table values use tuned (C-selected cutoff) metrics. RF confusion matrix TN50 FP32 FN4 TP98, precision0.7538, Brier0.1308. LR retrospective F1/AUC are higher, but T rankings cannot replace RF. This is retrospective evaluation because the historical 184-row holdout had already been reported/inspected, not a newly untouched or external test. Saved 2000 paired row-bootstrap intervals condition on fitted models; no recalibration, patient-cluster adjustment or clinical cost optimization. Final remediation independently reconciled all25 default/tuned evaluations from saved predictions and reloaded25 models without fitting. RF balanced accuracy0.7852702056432329. LR higher retrospective F1 does not replace RF. Cutoff0.38 maximizes development F1, not medical utility. Calibration interpretation: Van Calster, McLernon, van Smeden, Wynants and Steyerberg (2019), Calibration: the Achilles heel of predictive analytics, BMC Medicine17:230, DOI10.1186/s12916-019-1466-7, https://link.springer.com/article/10.1186/s12916-019-1466-7.</a:t>
+            </a:r>
+          </a:p>
         </p:txBody>
       </p:sp>
       <p:sp>
@@ -844,7 +868,11 @@
         <p:txBody>
           <a:bodyPr xmlns:a="http://schemas.openxmlformats.org/drawingml/2006/main"/>
           <a:lstStyle xmlns:a="http://schemas.openxmlformats.org/drawingml/2006/main"/>
-          <a:p xmlns:a="http://schemas.openxmlformats.org/drawingml/2006/main"/>
+          <a:p xmlns:a="http://schemas.openxmlformats.org/drawingml/2006/main">
+            <a:r>
+              <a:t>Unfavorable results are retained. Values are percentage-point differences in F1 from saved predictions for each locally selected family versus always-positive decisions on exactly the same evaluation IDs/labels. Neither held-out results nor pooled winner chooses local families/cutoffs. Full selected-model metrics and CM at local C_H cutoff: Cleveland: N+113/N-136, Logistic regression, threshold0.5, CM[[117,19],[33,80]], precision0.8080808080808081, sensitivity0.7079646017699115, specificity0.8602941176470589, balanced accuracy0.7841293597084852, F10.7547169811320755, accuracy0.7911646586345381, AUC0.8656298802706923; always-positive F10.6243093922651933, accuracy0.4538152610441767; Hungary: N+84/N-144, Histogram gradient boosting, threshold0.28, CM[[72,72],[9,75]], precision0.5102040816326531, sensitivity0.8928571428571429, specificity0.5, balanced accuracy0.6964285714285714, F10.6493506493506493, accuracy0.6447368421052632, AUC0.8416418650793651; always-positive F10.5384615384615384, accuracy0.3684210526315789; Switzerland: N+88/N-8, Random forest, threshold0.44, CM[[4,4],[17,71]], precision0.9466666666666667, sensitivity0.8068181818181818, specificity0.5, balanced accuracy0.6534090909090908, F10.8711656441717791, accuracy0.78125, AUC0.7471590909090908; always-positive F10.9565217391304348, accuracy0.9166666666666666; VA Long Beach: N+121/N-40, Logistic regression, threshold0.3, CM[[2,38],[2,119]], precision0.7579617834394905, sensitivity0.9834710743801653, specificity0.05, balanced accuracy0.5167355371900827, F10.8561151079136691, accuracy0.7515527950310559, AUC0.7078512396694215; always-positive F10.8581560283687943, accuracy0.7515527950310559. Always-positive sensitivity1 specificity0 balanced accuracy0.5 AUC0.5. Reference probability uses S_H prevalence; decisions explicitly always positive even if that constant is below0.5. F1=2p/(1+p) under always-positive decisions, so positive-heavy sites can yield high reference F1. AUC describes ranking, not useful specificity at a chosen cutoff. Swiss8negative rows and VA40 limit precision. Unknown patient linkage, site-dependent missingness/measurement/label differences and ID304 grouping discrepancy limit transport claims. No family, graph or threshold changed. Results use the unchanged run 20261020T193544Z_2a8a1491.</a:t>
+            </a:r>
+          </a:p>
         </p:txBody>
       </p:sp>
       <p:sp>
@@ -910,7 +938,11 @@
         <p:txBody>
           <a:bodyPr xmlns:a="http://schemas.openxmlformats.org/drawingml/2006/main"/>
           <a:lstStyle xmlns:a="http://schemas.openxmlformats.org/drawingml/2006/main"/>
-          <a:p xmlns:a="http://schemas.openxmlformats.org/drawingml/2006/main"/>
+          <a:p xmlns:a="http://schemas.openxmlformats.org/drawingml/2006/main">
+            <a:r>
+              <a:t>Actual frozen graph: disease-&gt;all11features plusoldpeak-&gt;slope; approvedfalse. P(Y,X)=P(Y) product_{i!=slope} P(X_i|Y) P(slope|Y,oldpeak). All other features independent givenY; slope independent of remaining9 givenY,oldpeak. Directions are generative/statistical; disease does not cause age/sex. Detailed12-edge and54-omitted-pair evidence register: docs/bn_design.md. Friedman, Geiger and Goldszmidt (1997), Bayesian Network Classifiers, Machine Learning29:131-163, DOI10.1023/A:1007465528199, https://ai.stanford.edu/~nir/Abstracts/FrGG1.html supports classifier construction and TAN, not our edges; this manual one-edge model is not learnedTAN. UCI variable definitions support shared ST measurement context, neither conditional dependency nor direction. Heckerman1995 MSR-TR-95-06 supports BN methods only. Esmaeili etal2024, Unraveling atherosclerotic cardiovascular disease risk factors through conditional probability analysis with Bayesian networks: insights from the AZAR cohort study, Scientific Reports14:4361, DOI10.1038/s41598-024-55141-2, https://www.nature.com/articles/s41598-024-55141-2.pdf: cross-sectional Iranian healthcare providers, different ASCVD label/features, leave-one-out evaluation; no transferable edges/performance claim. Alpha1 perchildstate CPT estimate(N_ijk+alpha)/(N_ij+Kalpha); numeric1/3,2/3quantiles/median-mode imputation training-only, not EM. Exact inference sums missing independent leaves and O/L branch; no evidence returns class prior; valid unseen states smoothed, invalid categories rejected. No topology changed or approval invented; domain adequacy remains incomplete.</a:t>
+            </a:r>
+          </a:p>
         </p:txBody>
       </p:sp>
       <p:sp>
@@ -976,7 +1008,11 @@
         <p:txBody>
           <a:bodyPr xmlns:a="http://schemas.openxmlformats.org/drawingml/2006/main"/>
           <a:lstStyle xmlns:a="http://schemas.openxmlformats.org/drawingml/2006/main"/>
-          <a:p xmlns:a="http://schemas.openxmlformats.org/drawingml/2006/main"/>
+          <a:p xmlns:a="http://schemas.openxmlformats.org/drawingml/2006/main">
+            <a:r>
+              <a:t>Final remediation: all38 lightweight tests pass in external disposable pinned Python3.13.6 environment; all25 saved model prediction round trips and per-family metric/nestedmean/cutoff reconstructions pass; all5always-positive references checked sameIDs/labels. No real-data fitting, graph/dataset/source/pipeline/UI change. Original run340.9267026660018seconds,2940fits25models; original environmentPython3.13.6 numpy2.5.3 pandas3.0.6 sklearn1.9.1 Joblib1.6.0 XGBoost3.4.1. Truthful individual contributions and merge provenance/ID304 explanation remain team actions; faculty must review domain independences, measurement stage, retrospective/D-only evaluation and submission requirements. Phase2 NN is not a current gap. Local HEAD and remote main both1f953e5e4281cb355e7f205062ca666e2cd36779 on21Oct2026; modified/untracked implementation and remediations are unpublished. No commit/push/deployment. Prepared guide does not demonstrate individual viva knowledge. No clinical diagnosis, future-event prediction, medically established threshold or causal graph claim.</a:t>
+            </a:r>
+          </a:p>
         </p:txBody>
       </p:sp>
       <p:sp>
@@ -1061,7 +1097,7 @@
                 <a:cs typeface="+mj-lt"/>
               </a:defRPr>
             </a:defPPr>
-            <a:lvl1pPr marL="0" indent="0">
+            <a:lvl1pPr marL="0" indent="0" algn="ctr">
               <a:lnSpc>
                 <a:spcPct val="110000"/>
               </a:lnSpc>
@@ -1072,8 +1108,16 @@
                 <a:spcPts val="0"/>
               </a:spcAft>
               <a:buNone/>
+              <a:defRPr sz="4800" b="1">
+                <a:solidFill>
+                  <a:schemeClr val="tx1"/>
+                </a:solidFill>
+                <a:latin typeface="+mj-lt"/>
+                <a:ea typeface="+mj-lt"/>
+                <a:cs typeface="+mj-lt"/>
+              </a:defRPr>
             </a:lvl1pPr>
-            <a:lvl2pPr marL="0" indent="0">
+            <a:lvl2pPr marL="0" indent="0" algn="ctr">
               <a:lnSpc>
                 <a:spcPct val="110000"/>
               </a:lnSpc>
@@ -1084,8 +1128,16 @@
                 <a:spcPts val="0"/>
               </a:spcAft>
               <a:buNone/>
+              <a:defRPr sz="4800" b="1">
+                <a:solidFill>
+                  <a:schemeClr val="tx1"/>
+                </a:solidFill>
+                <a:latin typeface="+mj-lt"/>
+                <a:ea typeface="+mj-lt"/>
+                <a:cs typeface="+mj-lt"/>
+              </a:defRPr>
             </a:lvl2pPr>
-            <a:lvl3pPr marL="0" indent="0">
+            <a:lvl3pPr marL="0" indent="0" algn="ctr">
               <a:lnSpc>
                 <a:spcPct val="110000"/>
               </a:lnSpc>
@@ -1096,8 +1148,16 @@
                 <a:spcPts val="0"/>
               </a:spcAft>
               <a:buNone/>
+              <a:defRPr sz="4800" b="1">
+                <a:solidFill>
+                  <a:schemeClr val="tx1"/>
+                </a:solidFill>
+                <a:latin typeface="+mj-lt"/>
+                <a:ea typeface="+mj-lt"/>
+                <a:cs typeface="+mj-lt"/>
+              </a:defRPr>
             </a:lvl3pPr>
-            <a:lvl4pPr marL="0" indent="0">
+            <a:lvl4pPr marL="0" indent="0" algn="ctr">
               <a:lnSpc>
                 <a:spcPct val="110000"/>
               </a:lnSpc>
@@ -1108,8 +1168,16 @@
                 <a:spcPts val="0"/>
               </a:spcAft>
               <a:buNone/>
+              <a:defRPr sz="4800" b="1">
+                <a:solidFill>
+                  <a:schemeClr val="tx1"/>
+                </a:solidFill>
+                <a:latin typeface="+mj-lt"/>
+                <a:ea typeface="+mj-lt"/>
+                <a:cs typeface="+mj-lt"/>
+              </a:defRPr>
             </a:lvl4pPr>
-            <a:lvl5pPr marL="0" indent="0">
+            <a:lvl5pPr marL="0" indent="0" algn="ctr">
               <a:lnSpc>
                 <a:spcPct val="110000"/>
               </a:lnSpc>
@@ -1120,8 +1188,16 @@
                 <a:spcPts val="0"/>
               </a:spcAft>
               <a:buNone/>
+              <a:defRPr sz="4800" b="1">
+                <a:solidFill>
+                  <a:schemeClr val="tx1"/>
+                </a:solidFill>
+                <a:latin typeface="+mj-lt"/>
+                <a:ea typeface="+mj-lt"/>
+                <a:cs typeface="+mj-lt"/>
+              </a:defRPr>
             </a:lvl5pPr>
-            <a:lvl6pPr marL="0" indent="0">
+            <a:lvl6pPr marL="0" indent="0" algn="ctr">
               <a:lnSpc>
                 <a:spcPct val="110000"/>
               </a:lnSpc>
@@ -1132,8 +1208,16 @@
                 <a:spcPts val="0"/>
               </a:spcAft>
               <a:buNone/>
+              <a:defRPr sz="4800" b="1">
+                <a:solidFill>
+                  <a:schemeClr val="tx1"/>
+                </a:solidFill>
+                <a:latin typeface="+mj-lt"/>
+                <a:ea typeface="+mj-lt"/>
+                <a:cs typeface="+mj-lt"/>
+              </a:defRPr>
             </a:lvl6pPr>
-            <a:lvl7pPr marL="0" indent="0">
+            <a:lvl7pPr marL="0" indent="0" algn="ctr">
               <a:lnSpc>
                 <a:spcPct val="110000"/>
               </a:lnSpc>
@@ -1144,8 +1228,16 @@
                 <a:spcPts val="0"/>
               </a:spcAft>
               <a:buNone/>
+              <a:defRPr sz="4800" b="1">
+                <a:solidFill>
+                  <a:schemeClr val="tx1"/>
+                </a:solidFill>
+                <a:latin typeface="+mj-lt"/>
+                <a:ea typeface="+mj-lt"/>
+                <a:cs typeface="+mj-lt"/>
+              </a:defRPr>
             </a:lvl7pPr>
-            <a:lvl8pPr marL="0" indent="0">
+            <a:lvl8pPr marL="0" indent="0" algn="ctr">
               <a:lnSpc>
                 <a:spcPct val="110000"/>
               </a:lnSpc>
@@ -1156,8 +1248,16 @@
                 <a:spcPts val="0"/>
               </a:spcAft>
               <a:buNone/>
+              <a:defRPr sz="4800" b="1">
+                <a:solidFill>
+                  <a:schemeClr val="tx1"/>
+                </a:solidFill>
+                <a:latin typeface="+mj-lt"/>
+                <a:ea typeface="+mj-lt"/>
+                <a:cs typeface="+mj-lt"/>
+              </a:defRPr>
             </a:lvl8pPr>
-            <a:lvl9pPr marL="0" indent="0">
+            <a:lvl9pPr marL="0" indent="0" algn="ctr">
               <a:lnSpc>
                 <a:spcPct val="110000"/>
               </a:lnSpc>
@@ -1168,6 +1268,14 @@
                 <a:spcPts val="0"/>
               </a:spcAft>
               <a:buNone/>
+              <a:defRPr sz="4800" b="1">
+                <a:solidFill>
+                  <a:schemeClr val="tx1"/>
+                </a:solidFill>
+                <a:latin typeface="+mj-lt"/>
+                <a:ea typeface="+mj-lt"/>
+                <a:cs typeface="+mj-lt"/>
+              </a:defRPr>
             </a:lvl9pPr>
           </a:lstStyle>
           <a:p xmlns:a="http://schemas.openxmlformats.org/drawingml/2006/main"/>
@@ -1218,7 +1326,7 @@
                 <a:cs typeface="+mn-lt"/>
               </a:defRPr>
             </a:defPPr>
-            <a:lvl1pPr marL="0" indent="0">
+            <a:lvl1pPr marL="0" indent="0" algn="ctr">
               <a:lnSpc>
                 <a:spcPct val="110000"/>
               </a:lnSpc>
@@ -1229,8 +1337,16 @@
                 <a:spcPts val="0"/>
               </a:spcAft>
               <a:buNone/>
+              <a:defRPr sz="2100" b="0">
+                <a:solidFill>
+                  <a:schemeClr val="tx1"/>
+                </a:solidFill>
+                <a:latin typeface="+mn-lt"/>
+                <a:ea typeface="+mn-lt"/>
+                <a:cs typeface="+mn-lt"/>
+              </a:defRPr>
             </a:lvl1pPr>
-            <a:lvl2pPr marL="0" indent="0">
+            <a:lvl2pPr marL="0" indent="0" algn="ctr">
               <a:lnSpc>
                 <a:spcPct val="110000"/>
               </a:lnSpc>
@@ -1241,8 +1357,16 @@
                 <a:spcPts val="0"/>
               </a:spcAft>
               <a:buNone/>
+              <a:defRPr sz="2100" b="0">
+                <a:solidFill>
+                  <a:schemeClr val="tx1"/>
+                </a:solidFill>
+                <a:latin typeface="+mn-lt"/>
+                <a:ea typeface="+mn-lt"/>
+                <a:cs typeface="+mn-lt"/>
+              </a:defRPr>
             </a:lvl2pPr>
-            <a:lvl3pPr marL="0" indent="0">
+            <a:lvl3pPr marL="0" indent="0" algn="ctr">
               <a:lnSpc>
                 <a:spcPct val="110000"/>
               </a:lnSpc>
@@ -1253,8 +1377,16 @@
                 <a:spcPts val="0"/>
               </a:spcAft>
               <a:buNone/>
+              <a:defRPr sz="2100" b="0">
+                <a:solidFill>
+                  <a:schemeClr val="tx1"/>
+                </a:solidFill>
+                <a:latin typeface="+mn-lt"/>
+                <a:ea typeface="+mn-lt"/>
+                <a:cs typeface="+mn-lt"/>
+              </a:defRPr>
             </a:lvl3pPr>
-            <a:lvl4pPr marL="0" indent="0">
+            <a:lvl4pPr marL="0" indent="0" algn="ctr">
               <a:lnSpc>
                 <a:spcPct val="110000"/>
               </a:lnSpc>
@@ -1265,8 +1397,16 @@
                 <a:spcPts val="0"/>
               </a:spcAft>
               <a:buNone/>
+              <a:defRPr sz="2100" b="0">
+                <a:solidFill>
+                  <a:schemeClr val="tx1"/>
+                </a:solidFill>
+                <a:latin typeface="+mn-lt"/>
+                <a:ea typeface="+mn-lt"/>
+                <a:cs typeface="+mn-lt"/>
+              </a:defRPr>
             </a:lvl4pPr>
-            <a:lvl5pPr marL="0" indent="0">
+            <a:lvl5pPr marL="0" indent="0" algn="ctr">
               <a:lnSpc>
                 <a:spcPct val="110000"/>
               </a:lnSpc>
@@ -1277,8 +1417,16 @@
                 <a:spcPts val="0"/>
               </a:spcAft>
               <a:buNone/>
+              <a:defRPr sz="2100" b="0">
+                <a:solidFill>
+                  <a:schemeClr val="tx1"/>
+                </a:solidFill>
+                <a:latin typeface="+mn-lt"/>
+                <a:ea typeface="+mn-lt"/>
+                <a:cs typeface="+mn-lt"/>
+              </a:defRPr>
             </a:lvl5pPr>
-            <a:lvl6pPr marL="0" indent="0">
+            <a:lvl6pPr marL="0" indent="0" algn="ctr">
               <a:lnSpc>
                 <a:spcPct val="110000"/>
               </a:lnSpc>
@@ -1289,8 +1437,16 @@
                 <a:spcPts val="0"/>
               </a:spcAft>
               <a:buNone/>
+              <a:defRPr sz="2100" b="0">
+                <a:solidFill>
+                  <a:schemeClr val="tx1"/>
+                </a:solidFill>
+                <a:latin typeface="+mn-lt"/>
+                <a:ea typeface="+mn-lt"/>
+                <a:cs typeface="+mn-lt"/>
+              </a:defRPr>
             </a:lvl6pPr>
-            <a:lvl7pPr marL="0" indent="0">
+            <a:lvl7pPr marL="0" indent="0" algn="ctr">
               <a:lnSpc>
                 <a:spcPct val="110000"/>
               </a:lnSpc>
@@ -1301,8 +1457,16 @@
                 <a:spcPts val="0"/>
               </a:spcAft>
               <a:buNone/>
+              <a:defRPr sz="2100" b="0">
+                <a:solidFill>
+                  <a:schemeClr val="tx1"/>
+                </a:solidFill>
+                <a:latin typeface="+mn-lt"/>
+                <a:ea typeface="+mn-lt"/>
+                <a:cs typeface="+mn-lt"/>
+              </a:defRPr>
             </a:lvl7pPr>
-            <a:lvl8pPr marL="0" indent="0">
+            <a:lvl8pPr marL="0" indent="0" algn="ctr">
               <a:lnSpc>
                 <a:spcPct val="110000"/>
               </a:lnSpc>
@@ -1313,8 +1477,16 @@
                 <a:spcPts val="0"/>
               </a:spcAft>
               <a:buNone/>
+              <a:defRPr sz="2100" b="0">
+                <a:solidFill>
+                  <a:schemeClr val="tx1"/>
+                </a:solidFill>
+                <a:latin typeface="+mn-lt"/>
+                <a:ea typeface="+mn-lt"/>
+                <a:cs typeface="+mn-lt"/>
+              </a:defRPr>
             </a:lvl8pPr>
-            <a:lvl9pPr marL="0" indent="0">
+            <a:lvl9pPr marL="0" indent="0" algn="ctr">
               <a:lnSpc>
                 <a:spcPct val="110000"/>
               </a:lnSpc>
@@ -1325,6 +1497,14 @@
                 <a:spcPts val="0"/>
               </a:spcAft>
               <a:buNone/>
+              <a:defRPr sz="2100" b="0">
+                <a:solidFill>
+                  <a:schemeClr val="tx1"/>
+                </a:solidFill>
+                <a:latin typeface="+mn-lt"/>
+                <a:ea typeface="+mn-lt"/>
+                <a:cs typeface="+mn-lt"/>
+              </a:defRPr>
             </a:lvl9pPr>
           </a:lstStyle>
           <a:p xmlns:a="http://schemas.openxmlformats.org/drawingml/2006/main"/>
@@ -1392,7 +1572,7 @@
                 <a:cs typeface="+mj-lt"/>
               </a:defRPr>
             </a:defPPr>
-            <a:lvl1pPr marL="0" indent="0">
+            <a:lvl1pPr marL="0" indent="0" algn="ctr">
               <a:lnSpc>
                 <a:spcPct val="110000"/>
               </a:lnSpc>
@@ -1403,8 +1583,16 @@
                 <a:spcPts val="0"/>
               </a:spcAft>
               <a:buNone/>
+              <a:defRPr sz="4200" b="1">
+                <a:solidFill>
+                  <a:schemeClr val="tx1"/>
+                </a:solidFill>
+                <a:latin typeface="+mj-lt"/>
+                <a:ea typeface="+mj-lt"/>
+                <a:cs typeface="+mj-lt"/>
+              </a:defRPr>
             </a:lvl1pPr>
-            <a:lvl2pPr marL="0" indent="0">
+            <a:lvl2pPr marL="0" indent="0" algn="ctr">
               <a:lnSpc>
                 <a:spcPct val="110000"/>
               </a:lnSpc>
@@ -1415,8 +1603,16 @@
                 <a:spcPts val="0"/>
               </a:spcAft>
               <a:buNone/>
+              <a:defRPr sz="4200" b="1">
+                <a:solidFill>
+                  <a:schemeClr val="tx1"/>
+                </a:solidFill>
+                <a:latin typeface="+mj-lt"/>
+                <a:ea typeface="+mj-lt"/>
+                <a:cs typeface="+mj-lt"/>
+              </a:defRPr>
             </a:lvl2pPr>
-            <a:lvl3pPr marL="0" indent="0">
+            <a:lvl3pPr marL="0" indent="0" algn="ctr">
               <a:lnSpc>
                 <a:spcPct val="110000"/>
               </a:lnSpc>
@@ -1427,8 +1623,16 @@
                 <a:spcPts val="0"/>
               </a:spcAft>
               <a:buNone/>
+              <a:defRPr sz="4200" b="1">
+                <a:solidFill>
+                  <a:schemeClr val="tx1"/>
+                </a:solidFill>
+                <a:latin typeface="+mj-lt"/>
+                <a:ea typeface="+mj-lt"/>
+                <a:cs typeface="+mj-lt"/>
+              </a:defRPr>
             </a:lvl3pPr>
-            <a:lvl4pPr marL="0" indent="0">
+            <a:lvl4pPr marL="0" indent="0" algn="ctr">
               <a:lnSpc>
                 <a:spcPct val="110000"/>
               </a:lnSpc>
@@ -1439,8 +1643,16 @@
                 <a:spcPts val="0"/>
               </a:spcAft>
               <a:buNone/>
+              <a:defRPr sz="4200" b="1">
+                <a:solidFill>
+                  <a:schemeClr val="tx1"/>
+                </a:solidFill>
+                <a:latin typeface="+mj-lt"/>
+                <a:ea typeface="+mj-lt"/>
+                <a:cs typeface="+mj-lt"/>
+              </a:defRPr>
             </a:lvl4pPr>
-            <a:lvl5pPr marL="0" indent="0">
+            <a:lvl5pPr marL="0" indent="0" algn="ctr">
               <a:lnSpc>
                 <a:spcPct val="110000"/>
               </a:lnSpc>
@@ -1451,8 +1663,16 @@
                 <a:spcPts val="0"/>
               </a:spcAft>
               <a:buNone/>
+              <a:defRPr sz="4200" b="1">
+                <a:solidFill>
+                  <a:schemeClr val="tx1"/>
+                </a:solidFill>
+                <a:latin typeface="+mj-lt"/>
+                <a:ea typeface="+mj-lt"/>
+                <a:cs typeface="+mj-lt"/>
+              </a:defRPr>
             </a:lvl5pPr>
-            <a:lvl6pPr marL="0" indent="0">
+            <a:lvl6pPr marL="0" indent="0" algn="ctr">
               <a:lnSpc>
                 <a:spcPct val="110000"/>
               </a:lnSpc>
@@ -1463,8 +1683,16 @@
                 <a:spcPts val="0"/>
               </a:spcAft>
               <a:buNone/>
+              <a:defRPr sz="4200" b="1">
+                <a:solidFill>
+                  <a:schemeClr val="tx1"/>
+                </a:solidFill>
+                <a:latin typeface="+mj-lt"/>
+                <a:ea typeface="+mj-lt"/>
+                <a:cs typeface="+mj-lt"/>
+              </a:defRPr>
             </a:lvl6pPr>
-            <a:lvl7pPr marL="0" indent="0">
+            <a:lvl7pPr marL="0" indent="0" algn="ctr">
               <a:lnSpc>
                 <a:spcPct val="110000"/>
               </a:lnSpc>
@@ -1475,8 +1703,16 @@
                 <a:spcPts val="0"/>
               </a:spcAft>
               <a:buNone/>
+              <a:defRPr sz="4200" b="1">
+                <a:solidFill>
+                  <a:schemeClr val="tx1"/>
+                </a:solidFill>
+                <a:latin typeface="+mj-lt"/>
+                <a:ea typeface="+mj-lt"/>
+                <a:cs typeface="+mj-lt"/>
+              </a:defRPr>
             </a:lvl7pPr>
-            <a:lvl8pPr marL="0" indent="0">
+            <a:lvl8pPr marL="0" indent="0" algn="ctr">
               <a:lnSpc>
                 <a:spcPct val="110000"/>
               </a:lnSpc>
@@ -1487,8 +1723,16 @@
                 <a:spcPts val="0"/>
               </a:spcAft>
               <a:buNone/>
+              <a:defRPr sz="4200" b="1">
+                <a:solidFill>
+                  <a:schemeClr val="tx1"/>
+                </a:solidFill>
+                <a:latin typeface="+mj-lt"/>
+                <a:ea typeface="+mj-lt"/>
+                <a:cs typeface="+mj-lt"/>
+              </a:defRPr>
             </a:lvl8pPr>
-            <a:lvl9pPr marL="0" indent="0">
+            <a:lvl9pPr marL="0" indent="0" algn="ctr">
               <a:lnSpc>
                 <a:spcPct val="110000"/>
               </a:lnSpc>
@@ -1499,6 +1743,14 @@
                 <a:spcPts val="0"/>
               </a:spcAft>
               <a:buNone/>
+              <a:defRPr sz="4200" b="1">
+                <a:solidFill>
+                  <a:schemeClr val="tx1"/>
+                </a:solidFill>
+                <a:latin typeface="+mj-lt"/>
+                <a:ea typeface="+mj-lt"/>
+                <a:cs typeface="+mj-lt"/>
+              </a:defRPr>
             </a:lvl9pPr>
           </a:lstStyle>
           <a:p xmlns:a="http://schemas.openxmlformats.org/drawingml/2006/main"/>
@@ -1566,7 +1818,7 @@
                 <a:cs typeface="+mj-lt"/>
               </a:defRPr>
             </a:defPPr>
-            <a:lvl1pPr marL="0" indent="0">
+            <a:lvl1pPr marL="0" indent="0" algn="l">
               <a:lnSpc>
                 <a:spcPct val="110000"/>
               </a:lnSpc>
@@ -1577,8 +1829,16 @@
                 <a:spcPts val="0"/>
               </a:spcAft>
               <a:buNone/>
+              <a:defRPr sz="3300" b="1">
+                <a:solidFill>
+                  <a:schemeClr val="tx1"/>
+                </a:solidFill>
+                <a:latin typeface="+mj-lt"/>
+                <a:ea typeface="+mj-lt"/>
+                <a:cs typeface="+mj-lt"/>
+              </a:defRPr>
             </a:lvl1pPr>
-            <a:lvl2pPr marL="0" indent="0">
+            <a:lvl2pPr marL="0" indent="0" algn="l">
               <a:lnSpc>
                 <a:spcPct val="110000"/>
               </a:lnSpc>
@@ -1589,8 +1849,16 @@
                 <a:spcPts val="0"/>
               </a:spcAft>
               <a:buNone/>
+              <a:defRPr sz="3300" b="1">
+                <a:solidFill>
+                  <a:schemeClr val="tx1"/>
+                </a:solidFill>
+                <a:latin typeface="+mj-lt"/>
+                <a:ea typeface="+mj-lt"/>
+                <a:cs typeface="+mj-lt"/>
+              </a:defRPr>
             </a:lvl2pPr>
-            <a:lvl3pPr marL="0" indent="0">
+            <a:lvl3pPr marL="0" indent="0" algn="l">
               <a:lnSpc>
                 <a:spcPct val="110000"/>
               </a:lnSpc>
@@ -1601,8 +1869,16 @@
                 <a:spcPts val="0"/>
               </a:spcAft>
               <a:buNone/>
+              <a:defRPr sz="3300" b="1">
+                <a:solidFill>
+                  <a:schemeClr val="tx1"/>
+                </a:solidFill>
+                <a:latin typeface="+mj-lt"/>
+                <a:ea typeface="+mj-lt"/>
+                <a:cs typeface="+mj-lt"/>
+              </a:defRPr>
             </a:lvl3pPr>
-            <a:lvl4pPr marL="0" indent="0">
+            <a:lvl4pPr marL="0" indent="0" algn="l">
               <a:lnSpc>
                 <a:spcPct val="110000"/>
               </a:lnSpc>
@@ -1613,8 +1889,16 @@
                 <a:spcPts val="0"/>
               </a:spcAft>
               <a:buNone/>
+              <a:defRPr sz="3300" b="1">
+                <a:solidFill>
+                  <a:schemeClr val="tx1"/>
+                </a:solidFill>
+                <a:latin typeface="+mj-lt"/>
+                <a:ea typeface="+mj-lt"/>
+                <a:cs typeface="+mj-lt"/>
+              </a:defRPr>
             </a:lvl4pPr>
-            <a:lvl5pPr marL="0" indent="0">
+            <a:lvl5pPr marL="0" indent="0" algn="l">
               <a:lnSpc>
                 <a:spcPct val="110000"/>
               </a:lnSpc>
@@ -1625,8 +1909,16 @@
                 <a:spcPts val="0"/>
               </a:spcAft>
               <a:buNone/>
+              <a:defRPr sz="3300" b="1">
+                <a:solidFill>
+                  <a:schemeClr val="tx1"/>
+                </a:solidFill>
+                <a:latin typeface="+mj-lt"/>
+                <a:ea typeface="+mj-lt"/>
+                <a:cs typeface="+mj-lt"/>
+              </a:defRPr>
             </a:lvl5pPr>
-            <a:lvl6pPr marL="0" indent="0">
+            <a:lvl6pPr marL="0" indent="0" algn="l">
               <a:lnSpc>
                 <a:spcPct val="110000"/>
               </a:lnSpc>
@@ -1637,8 +1929,16 @@
                 <a:spcPts val="0"/>
               </a:spcAft>
               <a:buNone/>
+              <a:defRPr sz="3300" b="1">
+                <a:solidFill>
+                  <a:schemeClr val="tx1"/>
+                </a:solidFill>
+                <a:latin typeface="+mj-lt"/>
+                <a:ea typeface="+mj-lt"/>
+                <a:cs typeface="+mj-lt"/>
+              </a:defRPr>
             </a:lvl6pPr>
-            <a:lvl7pPr marL="0" indent="0">
+            <a:lvl7pPr marL="0" indent="0" algn="l">
               <a:lnSpc>
                 <a:spcPct val="110000"/>
               </a:lnSpc>
@@ -1649,8 +1949,16 @@
                 <a:spcPts val="0"/>
               </a:spcAft>
               <a:buNone/>
+              <a:defRPr sz="3300" b="1">
+                <a:solidFill>
+                  <a:schemeClr val="tx1"/>
+                </a:solidFill>
+                <a:latin typeface="+mj-lt"/>
+                <a:ea typeface="+mj-lt"/>
+                <a:cs typeface="+mj-lt"/>
+              </a:defRPr>
             </a:lvl7pPr>
-            <a:lvl8pPr marL="0" indent="0">
+            <a:lvl8pPr marL="0" indent="0" algn="l">
               <a:lnSpc>
                 <a:spcPct val="110000"/>
               </a:lnSpc>
@@ -1661,8 +1969,16 @@
                 <a:spcPts val="0"/>
               </a:spcAft>
               <a:buNone/>
+              <a:defRPr sz="3300" b="1">
+                <a:solidFill>
+                  <a:schemeClr val="tx1"/>
+                </a:solidFill>
+                <a:latin typeface="+mj-lt"/>
+                <a:ea typeface="+mj-lt"/>
+                <a:cs typeface="+mj-lt"/>
+              </a:defRPr>
             </a:lvl8pPr>
-            <a:lvl9pPr marL="0" indent="0">
+            <a:lvl9pPr marL="0" indent="0" algn="l">
               <a:lnSpc>
                 <a:spcPct val="110000"/>
               </a:lnSpc>
@@ -1673,6 +1989,14 @@
                 <a:spcPts val="0"/>
               </a:spcAft>
               <a:buNone/>
+              <a:defRPr sz="3300" b="1">
+                <a:solidFill>
+                  <a:schemeClr val="tx1"/>
+                </a:solidFill>
+                <a:latin typeface="+mj-lt"/>
+                <a:ea typeface="+mj-lt"/>
+                <a:cs typeface="+mj-lt"/>
+              </a:defRPr>
             </a:lvl9pPr>
           </a:lstStyle>
           <a:p xmlns:a="http://schemas.openxmlformats.org/drawingml/2006/main"/>
@@ -1723,7 +2047,7 @@
                 <a:cs typeface="+mn-lt"/>
               </a:defRPr>
             </a:defPPr>
-            <a:lvl1pPr marL="228600" indent="-228600">
+            <a:lvl1pPr marL="228600" indent="-228600" algn="l">
               <a:lnSpc>
                 <a:spcPct val="110000"/>
               </a:lnSpc>
@@ -1734,8 +2058,16 @@
                 <a:spcPts val="1200"/>
               </a:spcAft>
               <a:buChar char="•"/>
+              <a:defRPr sz="2250" b="0">
+                <a:solidFill>
+                  <a:schemeClr val="tx1"/>
+                </a:solidFill>
+                <a:latin typeface="+mn-lt"/>
+                <a:ea typeface="+mn-lt"/>
+                <a:cs typeface="+mn-lt"/>
+              </a:defRPr>
             </a:lvl1pPr>
-            <a:lvl2pPr marL="533400" indent="-228600">
+            <a:lvl2pPr marL="533400" indent="-228600" algn="l">
               <a:lnSpc>
                 <a:spcPct val="110000"/>
               </a:lnSpc>
@@ -1746,8 +2078,16 @@
                 <a:spcPts val="1200"/>
               </a:spcAft>
               <a:buChar char="•"/>
+              <a:defRPr sz="2250" b="0">
+                <a:solidFill>
+                  <a:schemeClr val="tx1"/>
+                </a:solidFill>
+                <a:latin typeface="+mn-lt"/>
+                <a:ea typeface="+mn-lt"/>
+                <a:cs typeface="+mn-lt"/>
+              </a:defRPr>
             </a:lvl2pPr>
-            <a:lvl3pPr marL="838200" indent="-228600">
+            <a:lvl3pPr marL="838200" indent="-228600" algn="l">
               <a:lnSpc>
                 <a:spcPct val="110000"/>
               </a:lnSpc>
@@ -1758,8 +2098,16 @@
                 <a:spcPts val="1200"/>
               </a:spcAft>
               <a:buChar char="•"/>
+              <a:defRPr sz="2250" b="0">
+                <a:solidFill>
+                  <a:schemeClr val="tx1"/>
+                </a:solidFill>
+                <a:latin typeface="+mn-lt"/>
+                <a:ea typeface="+mn-lt"/>
+                <a:cs typeface="+mn-lt"/>
+              </a:defRPr>
             </a:lvl3pPr>
-            <a:lvl4pPr marL="1143000" indent="-228600">
+            <a:lvl4pPr marL="1143000" indent="-228600" algn="l">
               <a:lnSpc>
                 <a:spcPct val="110000"/>
               </a:lnSpc>
@@ -1770,8 +2118,16 @@
                 <a:spcPts val="1200"/>
               </a:spcAft>
               <a:buChar char="•"/>
+              <a:defRPr sz="2250" b="0">
+                <a:solidFill>
+                  <a:schemeClr val="tx1"/>
+                </a:solidFill>
+                <a:latin typeface="+mn-lt"/>
+                <a:ea typeface="+mn-lt"/>
+                <a:cs typeface="+mn-lt"/>
+              </a:defRPr>
             </a:lvl4pPr>
-            <a:lvl5pPr marL="1447800" indent="-228600">
+            <a:lvl5pPr marL="1447800" indent="-228600" algn="l">
               <a:lnSpc>
                 <a:spcPct val="110000"/>
               </a:lnSpc>
@@ -1782,8 +2138,16 @@
                 <a:spcPts val="1200"/>
               </a:spcAft>
               <a:buChar char="•"/>
+              <a:defRPr sz="2250" b="0">
+                <a:solidFill>
+                  <a:schemeClr val="tx1"/>
+                </a:solidFill>
+                <a:latin typeface="+mn-lt"/>
+                <a:ea typeface="+mn-lt"/>
+                <a:cs typeface="+mn-lt"/>
+              </a:defRPr>
             </a:lvl5pPr>
-            <a:lvl6pPr marL="1752600" indent="-228600">
+            <a:lvl6pPr marL="1752600" indent="-228600" algn="l">
               <a:lnSpc>
                 <a:spcPct val="110000"/>
               </a:lnSpc>
@@ -1794,8 +2158,16 @@
                 <a:spcPts val="1200"/>
               </a:spcAft>
               <a:buChar char="•"/>
+              <a:defRPr sz="2250" b="0">
+                <a:solidFill>
+                  <a:schemeClr val="tx1"/>
+                </a:solidFill>
+                <a:latin typeface="+mn-lt"/>
+                <a:ea typeface="+mn-lt"/>
+                <a:cs typeface="+mn-lt"/>
+              </a:defRPr>
             </a:lvl6pPr>
-            <a:lvl7pPr marL="2057400" indent="-228600">
+            <a:lvl7pPr marL="2057400" indent="-228600" algn="l">
               <a:lnSpc>
                 <a:spcPct val="110000"/>
               </a:lnSpc>
@@ -1806,8 +2178,16 @@
                 <a:spcPts val="1200"/>
               </a:spcAft>
               <a:buChar char="•"/>
+              <a:defRPr sz="2250" b="0">
+                <a:solidFill>
+                  <a:schemeClr val="tx1"/>
+                </a:solidFill>
+                <a:latin typeface="+mn-lt"/>
+                <a:ea typeface="+mn-lt"/>
+                <a:cs typeface="+mn-lt"/>
+              </a:defRPr>
             </a:lvl7pPr>
-            <a:lvl8pPr marL="2362200" indent="-228600">
+            <a:lvl8pPr marL="2362200" indent="-228600" algn="l">
               <a:lnSpc>
                 <a:spcPct val="110000"/>
               </a:lnSpc>
@@ -1818,8 +2198,16 @@
                 <a:spcPts val="1200"/>
               </a:spcAft>
               <a:buChar char="•"/>
+              <a:defRPr sz="2250" b="0">
+                <a:solidFill>
+                  <a:schemeClr val="tx1"/>
+                </a:solidFill>
+                <a:latin typeface="+mn-lt"/>
+                <a:ea typeface="+mn-lt"/>
+                <a:cs typeface="+mn-lt"/>
+              </a:defRPr>
             </a:lvl8pPr>
-            <a:lvl9pPr marL="2667000" indent="-228600">
+            <a:lvl9pPr marL="2667000" indent="-228600" algn="l">
               <a:lnSpc>
                 <a:spcPct val="110000"/>
               </a:lnSpc>
@@ -1830,6 +2218,14 @@
                 <a:spcPts val="1200"/>
               </a:spcAft>
               <a:buChar char="•"/>
+              <a:defRPr sz="2250" b="0">
+                <a:solidFill>
+                  <a:schemeClr val="tx1"/>
+                </a:solidFill>
+                <a:latin typeface="+mn-lt"/>
+                <a:ea typeface="+mn-lt"/>
+                <a:cs typeface="+mn-lt"/>
+              </a:defRPr>
             </a:lvl9pPr>
           </a:lstStyle>
           <a:p xmlns:a="http://schemas.openxmlformats.org/drawingml/2006/main"/>
@@ -1897,7 +2293,7 @@
                 <a:cs typeface="+mj-lt"/>
               </a:defRPr>
             </a:defPPr>
-            <a:lvl1pPr marL="0" indent="0">
+            <a:lvl1pPr marL="0" indent="0" algn="l">
               <a:lnSpc>
                 <a:spcPct val="110000"/>
               </a:lnSpc>
@@ -1908,8 +2304,16 @@
                 <a:spcPts val="0"/>
               </a:spcAft>
               <a:buNone/>
+              <a:defRPr sz="3300" b="1">
+                <a:solidFill>
+                  <a:schemeClr val="tx1"/>
+                </a:solidFill>
+                <a:latin typeface="+mj-lt"/>
+                <a:ea typeface="+mj-lt"/>
+                <a:cs typeface="+mj-lt"/>
+              </a:defRPr>
             </a:lvl1pPr>
-            <a:lvl2pPr marL="0" indent="0">
+            <a:lvl2pPr marL="0" indent="0" algn="l">
               <a:lnSpc>
                 <a:spcPct val="110000"/>
               </a:lnSpc>
@@ -1920,8 +2324,16 @@
                 <a:spcPts val="0"/>
               </a:spcAft>
               <a:buNone/>
+              <a:defRPr sz="3300" b="1">
+                <a:solidFill>
+                  <a:schemeClr val="tx1"/>
+                </a:solidFill>
+                <a:latin typeface="+mj-lt"/>
+                <a:ea typeface="+mj-lt"/>
+                <a:cs typeface="+mj-lt"/>
+              </a:defRPr>
             </a:lvl2pPr>
-            <a:lvl3pPr marL="0" indent="0">
+            <a:lvl3pPr marL="0" indent="0" algn="l">
               <a:lnSpc>
                 <a:spcPct val="110000"/>
               </a:lnSpc>
@@ -1932,8 +2344,16 @@
                 <a:spcPts val="0"/>
               </a:spcAft>
               <a:buNone/>
+              <a:defRPr sz="3300" b="1">
+                <a:solidFill>
+                  <a:schemeClr val="tx1"/>
+                </a:solidFill>
+                <a:latin typeface="+mj-lt"/>
+                <a:ea typeface="+mj-lt"/>
+                <a:cs typeface="+mj-lt"/>
+              </a:defRPr>
             </a:lvl3pPr>
-            <a:lvl4pPr marL="0" indent="0">
+            <a:lvl4pPr marL="0" indent="0" algn="l">
               <a:lnSpc>
                 <a:spcPct val="110000"/>
               </a:lnSpc>
@@ -1944,8 +2364,16 @@
                 <a:spcPts val="0"/>
               </a:spcAft>
               <a:buNone/>
+              <a:defRPr sz="3300" b="1">
+                <a:solidFill>
+                  <a:schemeClr val="tx1"/>
+                </a:solidFill>
+                <a:latin typeface="+mj-lt"/>
+                <a:ea typeface="+mj-lt"/>
+                <a:cs typeface="+mj-lt"/>
+              </a:defRPr>
             </a:lvl4pPr>
-            <a:lvl5pPr marL="0" indent="0">
+            <a:lvl5pPr marL="0" indent="0" algn="l">
               <a:lnSpc>
                 <a:spcPct val="110000"/>
               </a:lnSpc>
@@ -1956,8 +2384,16 @@
                 <a:spcPts val="0"/>
               </a:spcAft>
               <a:buNone/>
+              <a:defRPr sz="3300" b="1">
+                <a:solidFill>
+                  <a:schemeClr val="tx1"/>
+                </a:solidFill>
+                <a:latin typeface="+mj-lt"/>
+                <a:ea typeface="+mj-lt"/>
+                <a:cs typeface="+mj-lt"/>
+              </a:defRPr>
             </a:lvl5pPr>
-            <a:lvl6pPr marL="0" indent="0">
+            <a:lvl6pPr marL="0" indent="0" algn="l">
               <a:lnSpc>
                 <a:spcPct val="110000"/>
               </a:lnSpc>
@@ -1968,8 +2404,16 @@
                 <a:spcPts val="0"/>
               </a:spcAft>
               <a:buNone/>
+              <a:defRPr sz="3300" b="1">
+                <a:solidFill>
+                  <a:schemeClr val="tx1"/>
+                </a:solidFill>
+                <a:latin typeface="+mj-lt"/>
+                <a:ea typeface="+mj-lt"/>
+                <a:cs typeface="+mj-lt"/>
+              </a:defRPr>
             </a:lvl6pPr>
-            <a:lvl7pPr marL="0" indent="0">
+            <a:lvl7pPr marL="0" indent="0" algn="l">
               <a:lnSpc>
                 <a:spcPct val="110000"/>
               </a:lnSpc>
@@ -1980,8 +2424,16 @@
                 <a:spcPts val="0"/>
               </a:spcAft>
               <a:buNone/>
+              <a:defRPr sz="3300" b="1">
+                <a:solidFill>
+                  <a:schemeClr val="tx1"/>
+                </a:solidFill>
+                <a:latin typeface="+mj-lt"/>
+                <a:ea typeface="+mj-lt"/>
+                <a:cs typeface="+mj-lt"/>
+              </a:defRPr>
             </a:lvl7pPr>
-            <a:lvl8pPr marL="0" indent="0">
+            <a:lvl8pPr marL="0" indent="0" algn="l">
               <a:lnSpc>
                 <a:spcPct val="110000"/>
               </a:lnSpc>
@@ -1992,8 +2444,16 @@
                 <a:spcPts val="0"/>
               </a:spcAft>
               <a:buNone/>
+              <a:defRPr sz="3300" b="1">
+                <a:solidFill>
+                  <a:schemeClr val="tx1"/>
+                </a:solidFill>
+                <a:latin typeface="+mj-lt"/>
+                <a:ea typeface="+mj-lt"/>
+                <a:cs typeface="+mj-lt"/>
+              </a:defRPr>
             </a:lvl8pPr>
-            <a:lvl9pPr marL="0" indent="0">
+            <a:lvl9pPr marL="0" indent="0" algn="l">
               <a:lnSpc>
                 <a:spcPct val="110000"/>
               </a:lnSpc>
@@ -2004,6 +2464,14 @@
                 <a:spcPts val="0"/>
               </a:spcAft>
               <a:buNone/>
+              <a:defRPr sz="3300" b="1">
+                <a:solidFill>
+                  <a:schemeClr val="tx1"/>
+                </a:solidFill>
+                <a:latin typeface="+mj-lt"/>
+                <a:ea typeface="+mj-lt"/>
+                <a:cs typeface="+mj-lt"/>
+              </a:defRPr>
             </a:lvl9pPr>
           </a:lstStyle>
           <a:p xmlns:a="http://schemas.openxmlformats.org/drawingml/2006/main"/>
@@ -2054,7 +2522,7 @@
                 <a:cs typeface="+mn-lt"/>
               </a:defRPr>
             </a:defPPr>
-            <a:lvl1pPr marL="228600" indent="-228600">
+            <a:lvl1pPr marL="228600" indent="-228600" algn="l">
               <a:lnSpc>
                 <a:spcPct val="110000"/>
               </a:lnSpc>
@@ -2065,8 +2533,16 @@
                 <a:spcPts val="1200"/>
               </a:spcAft>
               <a:buChar char="•"/>
+              <a:defRPr sz="2100" b="0">
+                <a:solidFill>
+                  <a:schemeClr val="tx1"/>
+                </a:solidFill>
+                <a:latin typeface="+mn-lt"/>
+                <a:ea typeface="+mn-lt"/>
+                <a:cs typeface="+mn-lt"/>
+              </a:defRPr>
             </a:lvl1pPr>
-            <a:lvl2pPr marL="533400" indent="-228600">
+            <a:lvl2pPr marL="533400" indent="-228600" algn="l">
               <a:lnSpc>
                 <a:spcPct val="110000"/>
               </a:lnSpc>
@@ -2077,8 +2553,16 @@
                 <a:spcPts val="1200"/>
               </a:spcAft>
               <a:buChar char="•"/>
+              <a:defRPr sz="2100" b="0">
+                <a:solidFill>
+                  <a:schemeClr val="tx1"/>
+                </a:solidFill>
+                <a:latin typeface="+mn-lt"/>
+                <a:ea typeface="+mn-lt"/>
+                <a:cs typeface="+mn-lt"/>
+              </a:defRPr>
             </a:lvl2pPr>
-            <a:lvl3pPr marL="838200" indent="-228600">
+            <a:lvl3pPr marL="838200" indent="-228600" algn="l">
               <a:lnSpc>
                 <a:spcPct val="110000"/>
               </a:lnSpc>
@@ -2089,8 +2573,16 @@
                 <a:spcPts val="1200"/>
               </a:spcAft>
               <a:buChar char="•"/>
+              <a:defRPr sz="2100" b="0">
+                <a:solidFill>
+                  <a:schemeClr val="tx1"/>
+                </a:solidFill>
+                <a:latin typeface="+mn-lt"/>
+                <a:ea typeface="+mn-lt"/>
+                <a:cs typeface="+mn-lt"/>
+              </a:defRPr>
             </a:lvl3pPr>
-            <a:lvl4pPr marL="1143000" indent="-228600">
+            <a:lvl4pPr marL="1143000" indent="-228600" algn="l">
               <a:lnSpc>
                 <a:spcPct val="110000"/>
               </a:lnSpc>
@@ -2101,8 +2593,16 @@
                 <a:spcPts val="1200"/>
               </a:spcAft>
               <a:buChar char="•"/>
+              <a:defRPr sz="2100" b="0">
+                <a:solidFill>
+                  <a:schemeClr val="tx1"/>
+                </a:solidFill>
+                <a:latin typeface="+mn-lt"/>
+                <a:ea typeface="+mn-lt"/>
+                <a:cs typeface="+mn-lt"/>
+              </a:defRPr>
             </a:lvl4pPr>
-            <a:lvl5pPr marL="1447800" indent="-228600">
+            <a:lvl5pPr marL="1447800" indent="-228600" algn="l">
               <a:lnSpc>
                 <a:spcPct val="110000"/>
               </a:lnSpc>
@@ -2113,8 +2613,16 @@
                 <a:spcPts val="1200"/>
               </a:spcAft>
               <a:buChar char="•"/>
+              <a:defRPr sz="2100" b="0">
+                <a:solidFill>
+                  <a:schemeClr val="tx1"/>
+                </a:solidFill>
+                <a:latin typeface="+mn-lt"/>
+                <a:ea typeface="+mn-lt"/>
+                <a:cs typeface="+mn-lt"/>
+              </a:defRPr>
             </a:lvl5pPr>
-            <a:lvl6pPr marL="1752600" indent="-228600">
+            <a:lvl6pPr marL="1752600" indent="-228600" algn="l">
               <a:lnSpc>
                 <a:spcPct val="110000"/>
               </a:lnSpc>
@@ -2125,8 +2633,16 @@
                 <a:spcPts val="1200"/>
               </a:spcAft>
               <a:buChar char="•"/>
+              <a:defRPr sz="2100" b="0">
+                <a:solidFill>
+                  <a:schemeClr val="tx1"/>
+                </a:solidFill>
+                <a:latin typeface="+mn-lt"/>
+                <a:ea typeface="+mn-lt"/>
+                <a:cs typeface="+mn-lt"/>
+              </a:defRPr>
             </a:lvl6pPr>
-            <a:lvl7pPr marL="2057400" indent="-228600">
+            <a:lvl7pPr marL="2057400" indent="-228600" algn="l">
               <a:lnSpc>
                 <a:spcPct val="110000"/>
               </a:lnSpc>
@@ -2137,8 +2653,16 @@
                 <a:spcPts val="1200"/>
               </a:spcAft>
               <a:buChar char="•"/>
+              <a:defRPr sz="2100" b="0">
+                <a:solidFill>
+                  <a:schemeClr val="tx1"/>
+                </a:solidFill>
+                <a:latin typeface="+mn-lt"/>
+                <a:ea typeface="+mn-lt"/>
+                <a:cs typeface="+mn-lt"/>
+              </a:defRPr>
             </a:lvl7pPr>
-            <a:lvl8pPr marL="2362200" indent="-228600">
+            <a:lvl8pPr marL="2362200" indent="-228600" algn="l">
               <a:lnSpc>
                 <a:spcPct val="110000"/>
               </a:lnSpc>
@@ -2149,8 +2673,16 @@
                 <a:spcPts val="1200"/>
               </a:spcAft>
               <a:buChar char="•"/>
+              <a:defRPr sz="2100" b="0">
+                <a:solidFill>
+                  <a:schemeClr val="tx1"/>
+                </a:solidFill>
+                <a:latin typeface="+mn-lt"/>
+                <a:ea typeface="+mn-lt"/>
+                <a:cs typeface="+mn-lt"/>
+              </a:defRPr>
             </a:lvl8pPr>
-            <a:lvl9pPr marL="2667000" indent="-228600">
+            <a:lvl9pPr marL="2667000" indent="-228600" algn="l">
               <a:lnSpc>
                 <a:spcPct val="110000"/>
               </a:lnSpc>
@@ -2161,6 +2693,14 @@
                 <a:spcPts val="1200"/>
               </a:spcAft>
               <a:buChar char="•"/>
+              <a:defRPr sz="2100" b="0">
+                <a:solidFill>
+                  <a:schemeClr val="tx1"/>
+                </a:solidFill>
+                <a:latin typeface="+mn-lt"/>
+                <a:ea typeface="+mn-lt"/>
+                <a:cs typeface="+mn-lt"/>
+              </a:defRPr>
             </a:lvl9pPr>
           </a:lstStyle>
           <a:p xmlns:a="http://schemas.openxmlformats.org/drawingml/2006/main"/>
@@ -2211,7 +2751,7 @@
                 <a:cs typeface="+mn-lt"/>
               </a:defRPr>
             </a:defPPr>
-            <a:lvl1pPr marL="228600" indent="-228600">
+            <a:lvl1pPr marL="228600" indent="-228600" algn="l">
               <a:lnSpc>
                 <a:spcPct val="110000"/>
               </a:lnSpc>
@@ -2222,8 +2762,16 @@
                 <a:spcPts val="1200"/>
               </a:spcAft>
               <a:buChar char="•"/>
+              <a:defRPr sz="2100" b="0">
+                <a:solidFill>
+                  <a:schemeClr val="tx1"/>
+                </a:solidFill>
+                <a:latin typeface="+mn-lt"/>
+                <a:ea typeface="+mn-lt"/>
+                <a:cs typeface="+mn-lt"/>
+              </a:defRPr>
             </a:lvl1pPr>
-            <a:lvl2pPr marL="533400" indent="-228600">
+            <a:lvl2pPr marL="533400" indent="-228600" algn="l">
               <a:lnSpc>
                 <a:spcPct val="110000"/>
               </a:lnSpc>
@@ -2234,8 +2782,16 @@
                 <a:spcPts val="1200"/>
               </a:spcAft>
               <a:buChar char="•"/>
+              <a:defRPr sz="2100" b="0">
+                <a:solidFill>
+                  <a:schemeClr val="tx1"/>
+                </a:solidFill>
+                <a:latin typeface="+mn-lt"/>
+                <a:ea typeface="+mn-lt"/>
+                <a:cs typeface="+mn-lt"/>
+              </a:defRPr>
             </a:lvl2pPr>
-            <a:lvl3pPr marL="838200" indent="-228600">
+            <a:lvl3pPr marL="838200" indent="-228600" algn="l">
               <a:lnSpc>
                 <a:spcPct val="110000"/>
               </a:lnSpc>
@@ -2246,8 +2802,16 @@
                 <a:spcPts val="1200"/>
               </a:spcAft>
               <a:buChar char="•"/>
+              <a:defRPr sz="2100" b="0">
+                <a:solidFill>
+                  <a:schemeClr val="tx1"/>
+                </a:solidFill>
+                <a:latin typeface="+mn-lt"/>
+                <a:ea typeface="+mn-lt"/>
+                <a:cs typeface="+mn-lt"/>
+              </a:defRPr>
             </a:lvl3pPr>
-            <a:lvl4pPr marL="1143000" indent="-228600">
+            <a:lvl4pPr marL="1143000" indent="-228600" algn="l">
               <a:lnSpc>
                 <a:spcPct val="110000"/>
               </a:lnSpc>
@@ -2258,8 +2822,16 @@
                 <a:spcPts val="1200"/>
               </a:spcAft>
               <a:buChar char="•"/>
+              <a:defRPr sz="2100" b="0">
+                <a:solidFill>
+                  <a:schemeClr val="tx1"/>
+                </a:solidFill>
+                <a:latin typeface="+mn-lt"/>
+                <a:ea typeface="+mn-lt"/>
+                <a:cs typeface="+mn-lt"/>
+              </a:defRPr>
             </a:lvl4pPr>
-            <a:lvl5pPr marL="1447800" indent="-228600">
+            <a:lvl5pPr marL="1447800" indent="-228600" algn="l">
               <a:lnSpc>
                 <a:spcPct val="110000"/>
               </a:lnSpc>
@@ -2270,8 +2842,16 @@
                 <a:spcPts val="1200"/>
               </a:spcAft>
               <a:buChar char="•"/>
+              <a:defRPr sz="2100" b="0">
+                <a:solidFill>
+                  <a:schemeClr val="tx1"/>
+                </a:solidFill>
+                <a:latin typeface="+mn-lt"/>
+                <a:ea typeface="+mn-lt"/>
+                <a:cs typeface="+mn-lt"/>
+              </a:defRPr>
             </a:lvl5pPr>
-            <a:lvl6pPr marL="1752600" indent="-228600">
+            <a:lvl6pPr marL="1752600" indent="-228600" algn="l">
               <a:lnSpc>
                 <a:spcPct val="110000"/>
               </a:lnSpc>
@@ -2282,8 +2862,16 @@
                 <a:spcPts val="1200"/>
               </a:spcAft>
               <a:buChar char="•"/>
+              <a:defRPr sz="2100" b="0">
+                <a:solidFill>
+                  <a:schemeClr val="tx1"/>
+                </a:solidFill>
+                <a:latin typeface="+mn-lt"/>
+                <a:ea typeface="+mn-lt"/>
+                <a:cs typeface="+mn-lt"/>
+              </a:defRPr>
             </a:lvl6pPr>
-            <a:lvl7pPr marL="2057400" indent="-228600">
+            <a:lvl7pPr marL="2057400" indent="-228600" algn="l">
               <a:lnSpc>
                 <a:spcPct val="110000"/>
               </a:lnSpc>
@@ -2294,8 +2882,16 @@
                 <a:spcPts val="1200"/>
               </a:spcAft>
               <a:buChar char="•"/>
+              <a:defRPr sz="2100" b="0">
+                <a:solidFill>
+                  <a:schemeClr val="tx1"/>
+                </a:solidFill>
+                <a:latin typeface="+mn-lt"/>
+                <a:ea typeface="+mn-lt"/>
+                <a:cs typeface="+mn-lt"/>
+              </a:defRPr>
             </a:lvl7pPr>
-            <a:lvl8pPr marL="2362200" indent="-228600">
+            <a:lvl8pPr marL="2362200" indent="-228600" algn="l">
               <a:lnSpc>
                 <a:spcPct val="110000"/>
               </a:lnSpc>
@@ -2306,8 +2902,16 @@
                 <a:spcPts val="1200"/>
               </a:spcAft>
               <a:buChar char="•"/>
+              <a:defRPr sz="2100" b="0">
+                <a:solidFill>
+                  <a:schemeClr val="tx1"/>
+                </a:solidFill>
+                <a:latin typeface="+mn-lt"/>
+                <a:ea typeface="+mn-lt"/>
+                <a:cs typeface="+mn-lt"/>
+              </a:defRPr>
             </a:lvl8pPr>
-            <a:lvl9pPr marL="2667000" indent="-228600">
+            <a:lvl9pPr marL="2667000" indent="-228600" algn="l">
               <a:lnSpc>
                 <a:spcPct val="110000"/>
               </a:lnSpc>
@@ -2318,6 +2922,14 @@
                 <a:spcPts val="1200"/>
               </a:spcAft>
               <a:buChar char="•"/>
+              <a:defRPr sz="2100" b="0">
+                <a:solidFill>
+                  <a:schemeClr val="tx1"/>
+                </a:solidFill>
+                <a:latin typeface="+mn-lt"/>
+                <a:ea typeface="+mn-lt"/>
+                <a:cs typeface="+mn-lt"/>
+              </a:defRPr>
             </a:lvl9pPr>
           </a:lstStyle>
           <a:p xmlns:a="http://schemas.openxmlformats.org/drawingml/2006/main"/>
@@ -2385,7 +2997,7 @@
                 <a:cs typeface="+mj-lt"/>
               </a:defRPr>
             </a:defPPr>
-            <a:lvl1pPr marL="0" indent="0">
+            <a:lvl1pPr marL="0" indent="0" algn="l">
               <a:lnSpc>
                 <a:spcPct val="110000"/>
               </a:lnSpc>
@@ -2396,8 +3008,16 @@
                 <a:spcPts val="0"/>
               </a:spcAft>
               <a:buNone/>
+              <a:defRPr sz="3300" b="1">
+                <a:solidFill>
+                  <a:schemeClr val="tx1"/>
+                </a:solidFill>
+                <a:latin typeface="+mj-lt"/>
+                <a:ea typeface="+mj-lt"/>
+                <a:cs typeface="+mj-lt"/>
+              </a:defRPr>
             </a:lvl1pPr>
-            <a:lvl2pPr marL="0" indent="0">
+            <a:lvl2pPr marL="0" indent="0" algn="l">
               <a:lnSpc>
                 <a:spcPct val="110000"/>
               </a:lnSpc>
@@ -2408,8 +3028,16 @@
                 <a:spcPts val="0"/>
               </a:spcAft>
               <a:buNone/>
+              <a:defRPr sz="3300" b="1">
+                <a:solidFill>
+                  <a:schemeClr val="tx1"/>
+                </a:solidFill>
+                <a:latin typeface="+mj-lt"/>
+                <a:ea typeface="+mj-lt"/>
+                <a:cs typeface="+mj-lt"/>
+              </a:defRPr>
             </a:lvl2pPr>
-            <a:lvl3pPr marL="0" indent="0">
+            <a:lvl3pPr marL="0" indent="0" algn="l">
               <a:lnSpc>
                 <a:spcPct val="110000"/>
               </a:lnSpc>
@@ -2420,8 +3048,16 @@
                 <a:spcPts val="0"/>
               </a:spcAft>
               <a:buNone/>
+              <a:defRPr sz="3300" b="1">
+                <a:solidFill>
+                  <a:schemeClr val="tx1"/>
+                </a:solidFill>
+                <a:latin typeface="+mj-lt"/>
+                <a:ea typeface="+mj-lt"/>
+                <a:cs typeface="+mj-lt"/>
+              </a:defRPr>
             </a:lvl3pPr>
-            <a:lvl4pPr marL="0" indent="0">
+            <a:lvl4pPr marL="0" indent="0" algn="l">
               <a:lnSpc>
                 <a:spcPct val="110000"/>
               </a:lnSpc>
@@ -2432,8 +3068,16 @@
                 <a:spcPts val="0"/>
               </a:spcAft>
               <a:buNone/>
+              <a:defRPr sz="3300" b="1">
+                <a:solidFill>
+                  <a:schemeClr val="tx1"/>
+                </a:solidFill>
+                <a:latin typeface="+mj-lt"/>
+                <a:ea typeface="+mj-lt"/>
+                <a:cs typeface="+mj-lt"/>
+              </a:defRPr>
             </a:lvl4pPr>
-            <a:lvl5pPr marL="0" indent="0">
+            <a:lvl5pPr marL="0" indent="0" algn="l">
               <a:lnSpc>
                 <a:spcPct val="110000"/>
               </a:lnSpc>
@@ -2444,8 +3088,16 @@
                 <a:spcPts val="0"/>
               </a:spcAft>
               <a:buNone/>
+              <a:defRPr sz="3300" b="1">
+                <a:solidFill>
+                  <a:schemeClr val="tx1"/>
+                </a:solidFill>
+                <a:latin typeface="+mj-lt"/>
+                <a:ea typeface="+mj-lt"/>
+                <a:cs typeface="+mj-lt"/>
+              </a:defRPr>
             </a:lvl5pPr>
-            <a:lvl6pPr marL="0" indent="0">
+            <a:lvl6pPr marL="0" indent="0" algn="l">
               <a:lnSpc>
                 <a:spcPct val="110000"/>
               </a:lnSpc>
@@ -2456,8 +3108,16 @@
                 <a:spcPts val="0"/>
               </a:spcAft>
               <a:buNone/>
+              <a:defRPr sz="3300" b="1">
+                <a:solidFill>
+                  <a:schemeClr val="tx1"/>
+                </a:solidFill>
+                <a:latin typeface="+mj-lt"/>
+                <a:ea typeface="+mj-lt"/>
+                <a:cs typeface="+mj-lt"/>
+              </a:defRPr>
             </a:lvl6pPr>
-            <a:lvl7pPr marL="0" indent="0">
+            <a:lvl7pPr marL="0" indent="0" algn="l">
               <a:lnSpc>
                 <a:spcPct val="110000"/>
               </a:lnSpc>
@@ -2468,8 +3128,16 @@
                 <a:spcPts val="0"/>
               </a:spcAft>
               <a:buNone/>
+              <a:defRPr sz="3300" b="1">
+                <a:solidFill>
+                  <a:schemeClr val="tx1"/>
+                </a:solidFill>
+                <a:latin typeface="+mj-lt"/>
+                <a:ea typeface="+mj-lt"/>
+                <a:cs typeface="+mj-lt"/>
+              </a:defRPr>
             </a:lvl7pPr>
-            <a:lvl8pPr marL="0" indent="0">
+            <a:lvl8pPr marL="0" indent="0" algn="l">
               <a:lnSpc>
                 <a:spcPct val="110000"/>
               </a:lnSpc>
@@ -2480,8 +3148,16 @@
                 <a:spcPts val="0"/>
               </a:spcAft>
               <a:buNone/>
+              <a:defRPr sz="3300" b="1">
+                <a:solidFill>
+                  <a:schemeClr val="tx1"/>
+                </a:solidFill>
+                <a:latin typeface="+mj-lt"/>
+                <a:ea typeface="+mj-lt"/>
+                <a:cs typeface="+mj-lt"/>
+              </a:defRPr>
             </a:lvl8pPr>
-            <a:lvl9pPr marL="0" indent="0">
+            <a:lvl9pPr marL="0" indent="0" algn="l">
               <a:lnSpc>
                 <a:spcPct val="110000"/>
               </a:lnSpc>
@@ -2492,6 +3168,14 @@
                 <a:spcPts val="0"/>
               </a:spcAft>
               <a:buNone/>
+              <a:defRPr sz="3300" b="1">
+                <a:solidFill>
+                  <a:schemeClr val="tx1"/>
+                </a:solidFill>
+                <a:latin typeface="+mj-lt"/>
+                <a:ea typeface="+mj-lt"/>
+                <a:cs typeface="+mj-lt"/>
+              </a:defRPr>
             </a:lvl9pPr>
           </a:lstStyle>
           <a:p xmlns:a="http://schemas.openxmlformats.org/drawingml/2006/main"/>
@@ -2542,7 +3226,7 @@
                 <a:cs typeface="+mn-lt"/>
               </a:defRPr>
             </a:defPPr>
-            <a:lvl1pPr marL="228600" indent="-228600">
+            <a:lvl1pPr marL="228600" indent="-228600" algn="l">
               <a:lnSpc>
                 <a:spcPct val="110000"/>
               </a:lnSpc>
@@ -2553,8 +3237,16 @@
                 <a:spcPts val="1200"/>
               </a:spcAft>
               <a:buChar char="•"/>
+              <a:defRPr sz="2250" b="0">
+                <a:solidFill>
+                  <a:schemeClr val="tx1"/>
+                </a:solidFill>
+                <a:latin typeface="+mn-lt"/>
+                <a:ea typeface="+mn-lt"/>
+                <a:cs typeface="+mn-lt"/>
+              </a:defRPr>
             </a:lvl1pPr>
-            <a:lvl2pPr marL="533400" indent="-228600">
+            <a:lvl2pPr marL="533400" indent="-228600" algn="l">
               <a:lnSpc>
                 <a:spcPct val="110000"/>
               </a:lnSpc>
@@ -2565,8 +3257,16 @@
                 <a:spcPts val="1200"/>
               </a:spcAft>
               <a:buChar char="•"/>
+              <a:defRPr sz="2250" b="0">
+                <a:solidFill>
+                  <a:schemeClr val="tx1"/>
+                </a:solidFill>
+                <a:latin typeface="+mn-lt"/>
+                <a:ea typeface="+mn-lt"/>
+                <a:cs typeface="+mn-lt"/>
+              </a:defRPr>
             </a:lvl2pPr>
-            <a:lvl3pPr marL="838200" indent="-228600">
+            <a:lvl3pPr marL="838200" indent="-228600" algn="l">
               <a:lnSpc>
                 <a:spcPct val="110000"/>
               </a:lnSpc>
@@ -2577,8 +3277,16 @@
                 <a:spcPts val="1200"/>
               </a:spcAft>
               <a:buChar char="•"/>
+              <a:defRPr sz="2250" b="0">
+                <a:solidFill>
+                  <a:schemeClr val="tx1"/>
+                </a:solidFill>
+                <a:latin typeface="+mn-lt"/>
+                <a:ea typeface="+mn-lt"/>
+                <a:cs typeface="+mn-lt"/>
+              </a:defRPr>
             </a:lvl3pPr>
-            <a:lvl4pPr marL="1143000" indent="-228600">
+            <a:lvl4pPr marL="1143000" indent="-228600" algn="l">
               <a:lnSpc>
                 <a:spcPct val="110000"/>
               </a:lnSpc>
@@ -2589,8 +3297,16 @@
                 <a:spcPts val="1200"/>
               </a:spcAft>
               <a:buChar char="•"/>
+              <a:defRPr sz="2250" b="0">
+                <a:solidFill>
+                  <a:schemeClr val="tx1"/>
+                </a:solidFill>
+                <a:latin typeface="+mn-lt"/>
+                <a:ea typeface="+mn-lt"/>
+                <a:cs typeface="+mn-lt"/>
+              </a:defRPr>
             </a:lvl4pPr>
-            <a:lvl5pPr marL="1447800" indent="-228600">
+            <a:lvl5pPr marL="1447800" indent="-228600" algn="l">
               <a:lnSpc>
                 <a:spcPct val="110000"/>
               </a:lnSpc>
@@ -2601,8 +3317,16 @@
                 <a:spcPts val="1200"/>
               </a:spcAft>
               <a:buChar char="•"/>
+              <a:defRPr sz="2250" b="0">
+                <a:solidFill>
+                  <a:schemeClr val="tx1"/>
+                </a:solidFill>
+                <a:latin typeface="+mn-lt"/>
+                <a:ea typeface="+mn-lt"/>
+                <a:cs typeface="+mn-lt"/>
+              </a:defRPr>
             </a:lvl5pPr>
-            <a:lvl6pPr marL="1752600" indent="-228600">
+            <a:lvl6pPr marL="1752600" indent="-228600" algn="l">
               <a:lnSpc>
                 <a:spcPct val="110000"/>
               </a:lnSpc>
@@ -2613,8 +3337,16 @@
                 <a:spcPts val="1200"/>
               </a:spcAft>
               <a:buChar char="•"/>
+              <a:defRPr sz="2250" b="0">
+                <a:solidFill>
+                  <a:schemeClr val="tx1"/>
+                </a:solidFill>
+                <a:latin typeface="+mn-lt"/>
+                <a:ea typeface="+mn-lt"/>
+                <a:cs typeface="+mn-lt"/>
+              </a:defRPr>
             </a:lvl6pPr>
-            <a:lvl7pPr marL="2057400" indent="-228600">
+            <a:lvl7pPr marL="2057400" indent="-228600" algn="l">
               <a:lnSpc>
                 <a:spcPct val="110000"/>
               </a:lnSpc>
@@ -2625,8 +3357,16 @@
                 <a:spcPts val="1200"/>
               </a:spcAft>
               <a:buChar char="•"/>
+              <a:defRPr sz="2250" b="0">
+                <a:solidFill>
+                  <a:schemeClr val="tx1"/>
+                </a:solidFill>
+                <a:latin typeface="+mn-lt"/>
+                <a:ea typeface="+mn-lt"/>
+                <a:cs typeface="+mn-lt"/>
+              </a:defRPr>
             </a:lvl7pPr>
-            <a:lvl8pPr marL="2362200" indent="-228600">
+            <a:lvl8pPr marL="2362200" indent="-228600" algn="l">
               <a:lnSpc>
                 <a:spcPct val="110000"/>
               </a:lnSpc>
@@ -2637,8 +3377,16 @@
                 <a:spcPts val="1200"/>
               </a:spcAft>
               <a:buChar char="•"/>
+              <a:defRPr sz="2250" b="0">
+                <a:solidFill>
+                  <a:schemeClr val="tx1"/>
+                </a:solidFill>
+                <a:latin typeface="+mn-lt"/>
+                <a:ea typeface="+mn-lt"/>
+                <a:cs typeface="+mn-lt"/>
+              </a:defRPr>
             </a:lvl8pPr>
-            <a:lvl9pPr marL="2667000" indent="-228600">
+            <a:lvl9pPr marL="2667000" indent="-228600" algn="l">
               <a:lnSpc>
                 <a:spcPct val="110000"/>
               </a:lnSpc>
@@ -2649,6 +3397,14 @@
                 <a:spcPts val="1200"/>
               </a:spcAft>
               <a:buChar char="•"/>
+              <a:defRPr sz="2250" b="0">
+                <a:solidFill>
+                  <a:schemeClr val="tx1"/>
+                </a:solidFill>
+                <a:latin typeface="+mn-lt"/>
+                <a:ea typeface="+mn-lt"/>
+                <a:cs typeface="+mn-lt"/>
+              </a:defRPr>
             </a:lvl9pPr>
           </a:lstStyle>
           <a:p xmlns:a="http://schemas.openxmlformats.org/drawingml/2006/main"/>
@@ -2697,12 +3453,12 @@
   </p:cSld>
   <p:clrMap bg1="lt1" tx1="dk1" bg2="lt2" tx2="dk2" accent1="accent1" accent2="accent2" accent3="accent3" accent4="accent4" accent5="accent5" accent6="accent6" hlink="hlink" folHlink="folHlink"/>
   <p:sldLayoutIdLst>
-    <p:sldLayoutId xmlns:r="http://schemas.openxmlformats.org/officeDocument/2006/relationships" id="2147483649" r:id="R331212cd30ae4aa6"/>
-    <p:sldLayoutId xmlns:r="http://schemas.openxmlformats.org/officeDocument/2006/relationships" id="2147483650" r:id="R324dd29f6a554667"/>
-    <p:sldLayoutId xmlns:r="http://schemas.openxmlformats.org/officeDocument/2006/relationships" id="2147483651" r:id="Rae6b4d07fd694c72"/>
-    <p:sldLayoutId xmlns:r="http://schemas.openxmlformats.org/officeDocument/2006/relationships" id="2147483652" r:id="R87c4245a4d8a4390"/>
-    <p:sldLayoutId xmlns:r="http://schemas.openxmlformats.org/officeDocument/2006/relationships" id="2147483653" r:id="Rfcd9dc0036284095"/>
-    <p:sldLayoutId xmlns:r="http://schemas.openxmlformats.org/officeDocument/2006/relationships" id="2147483654" r:id="Re2b4f9689e5a416b"/>
+    <p:sldLayoutId xmlns:r="http://schemas.openxmlformats.org/officeDocument/2006/relationships" id="2147483649" r:id="R1c7df0a7f1774bb4"/>
+    <p:sldLayoutId xmlns:r="http://schemas.openxmlformats.org/officeDocument/2006/relationships" id="2147483650" r:id="R4fb96ae0c78b4701"/>
+    <p:sldLayoutId xmlns:r="http://schemas.openxmlformats.org/officeDocument/2006/relationships" id="2147483651" r:id="R6b83a96d6eff4e4c"/>
+    <p:sldLayoutId xmlns:r="http://schemas.openxmlformats.org/officeDocument/2006/relationships" id="2147483652" r:id="R94327789de644aa1"/>
+    <p:sldLayoutId xmlns:r="http://schemas.openxmlformats.org/officeDocument/2006/relationships" id="2147483653" r:id="Re77319bbd6b548ee"/>
+    <p:sldLayoutId xmlns:r="http://schemas.openxmlformats.org/officeDocument/2006/relationships" id="2147483654" r:id="Ra44433850e484feb"/>
   </p:sldLayoutIdLst>
   <p:txStyles>
     <p:titleStyle>
@@ -3230,7 +3986,7 @@
 </file>
 
 <file path=ppt/slides/charts/chart1.xml><?xml version="1.0" encoding="utf-8"?>
-<c:chartSpace xmlns:c="http://schemas.openxmlformats.org/drawingml/2006/chart" xmlns:r="http://schemas.openxmlformats.org/officeDocument/2006/relationships">
+<c:chartSpace xmlns:c="http://schemas.openxmlformats.org/drawingml/2006/chart" xmlns:ns1="http://schemas.openxmlformats.org/drawingml/2006/main" xmlns:r="http://schemas.openxmlformats.org/officeDocument/2006/relationships">
   <c:lang val="en-US"/>
   <c:chart>
     <c:plotArea>
@@ -3244,9 +4000,9 @@
             <c:v>Missing records</c:v>
           </c:tx>
           <c:spPr>
-            <a:solidFill xmlns:a="http://schemas.openxmlformats.org/drawingml/2006/main">
-              <a:srgbClr val="087F78"/>
-            </a:solidFill>
+            <ns1:solidFill>
+              <ns1:srgbClr val="087F78"/>
+            </ns1:solidFill>
           </c:spPr>
           <c:invertIfNegative val="0"/>
           <c:cat>
@@ -3315,25 +4071,25 @@
         <c:majorTickMark val="none"/>
         <c:minorTickMark val="none"/>
         <c:spPr>
-          <a:ln xmlns:a="http://schemas.openxmlformats.org/drawingml/2006/main" w="9525">
-            <a:solidFill>
-              <a:srgbClr val="D4D4D4"/>
-            </a:solidFill>
-            <a:prstDash val="solid"/>
-          </a:ln>
+          <ns1:ln w="9525">
+            <ns1:solidFill>
+              <ns1:srgbClr val="D4D4D4"/>
+            </ns1:solidFill>
+            <ns1:prstDash val="solid"/>
+          </ns1:ln>
         </c:spPr>
         <c:txPr>
-          <a:bodyPr xmlns:a="http://schemas.openxmlformats.org/drawingml/2006/main" anchorCtr="1"/>
-          <a:lstStyle xmlns:a="http://schemas.openxmlformats.org/drawingml/2006/main"/>
-          <a:p xmlns:a="http://schemas.openxmlformats.org/drawingml/2006/main">
-            <a:pPr>
-              <a:defRPr>
-                <a:solidFill>
-                  <a:srgbClr val="666666"/>
-                </a:solidFill>
-              </a:defRPr>
-            </a:pPr>
-          </a:p>
+          <ns1:bodyPr anchorCtr="1"/>
+          <ns1:lstStyle/>
+          <ns1:p>
+            <ns1:pPr>
+              <ns1:defRPr>
+                <ns1:solidFill>
+                  <ns1:srgbClr val="666666"/>
+                </ns1:solidFill>
+              </ns1:defRPr>
+            </ns1:pPr>
+          </ns1:p>
         </c:txPr>
         <c:crossAx val="48672768"/>
       </c:catAx>
@@ -3348,25 +4104,25 @@
         <c:majorTickMark val="none"/>
         <c:minorTickMark val="none"/>
         <c:spPr>
-          <a:ln xmlns:a="http://schemas.openxmlformats.org/drawingml/2006/main" w="9525">
-            <a:solidFill>
-              <a:srgbClr val="D4D4D4"/>
-            </a:solidFill>
-            <a:prstDash val="solid"/>
-          </a:ln>
+          <ns1:ln w="9525">
+            <ns1:solidFill>
+              <ns1:srgbClr val="D4D4D4"/>
+            </ns1:solidFill>
+            <ns1:prstDash val="solid"/>
+          </ns1:ln>
         </c:spPr>
         <c:txPr>
-          <a:bodyPr xmlns:a="http://schemas.openxmlformats.org/drawingml/2006/main" anchorCtr="1"/>
-          <a:lstStyle xmlns:a="http://schemas.openxmlformats.org/drawingml/2006/main"/>
-          <a:p xmlns:a="http://schemas.openxmlformats.org/drawingml/2006/main">
-            <a:pPr>
-              <a:defRPr>
-                <a:solidFill>
-                  <a:srgbClr val="666666"/>
-                </a:solidFill>
-              </a:defRPr>
-            </a:pPr>
-          </a:p>
+          <ns1:bodyPr anchorCtr="1"/>
+          <ns1:lstStyle/>
+          <ns1:p>
+            <ns1:pPr>
+              <ns1:defRPr>
+                <ns1:solidFill>
+                  <ns1:srgbClr val="666666"/>
+                </ns1:solidFill>
+              </ns1:defRPr>
+            </ns1:pPr>
+          </ns1:p>
         </c:txPr>
         <c:crossAx val="48650112"/>
         <c:crossBetween val="between"/>
@@ -3381,7 +4137,7 @@
 </file>
 
 <file path=ppt/slides/charts/chart2.xml><?xml version="1.0" encoding="utf-8"?>
-<c:chartSpace xmlns:c="http://schemas.openxmlformats.org/drawingml/2006/chart" xmlns:r="http://schemas.openxmlformats.org/officeDocument/2006/relationships">
+<c:chartSpace xmlns:c="http://schemas.openxmlformats.org/drawingml/2006/chart" xmlns:ns1="http://schemas.openxmlformats.org/drawingml/2006/main" xmlns:r="http://schemas.openxmlformats.org/officeDocument/2006/relationships">
   <c:lang val="en-US"/>
   <c:chart>
     <c:plotArea>
@@ -3395,54 +4151,77 @@
             <c:v>Mean CV F1 (%)</c:v>
           </c:tx>
           <c:spPr>
-            <a:solidFill xmlns:a="http://schemas.openxmlformats.org/drawingml/2006/main">
-              <a:srgbClr val="087F78"/>
-            </a:solidFill>
+            <ns1:solidFill>
+              <ns1:srgbClr val="087F78"/>
+            </ns1:solidFill>
           </c:spPr>
           <c:invertIfNegative val="0"/>
           <c:cat>
             <c:strRef>
-              <c:f>'Chart Data'!$A$2:$A$5</c:f>
+              <c:f>'Chart Data'!$A$2:$A$6</c:f>
               <c:strCache>
-                <c:ptCount val="4"/>
+                <c:ptCount val="5"/>
                 <c:pt idx="0">
-                  <c:v>Histogram gradient boosting</c:v>
+                  <c:v>LR</c:v>
                 </c:pt>
                 <c:pt idx="1">
-                  <c:v>Random forest</c:v>
+                  <c:v>Random Forest</c:v>
                 </c:pt>
                 <c:pt idx="2">
-                  <c:v>Logistic regression</c:v>
+                  <c:v>HGB</c:v>
                 </c:pt>
                 <c:pt idx="3">
                   <c:v>XGBoost</c:v>
+                </c:pt>
+                <c:pt idx="4">
+                  <c:v>BN (provisional)</c:v>
                 </c:pt>
               </c:strCache>
             </c:strRef>
           </c:cat>
           <c:val>
             <c:numRef>
-              <c:f>'Chart Data'!$B$2:$B$5</c:f>
+              <c:f>'Chart Data'!$B$2:$B$6</c:f>
               <c:numCache>
                 <c:formatCode>General</c:formatCode>
-                <c:ptCount val="4"/>
+                <c:ptCount val="5"/>
                 <c:pt idx="0">
-                  <c:v>83.76</c:v>
+                  <c:v>82.30883974615283</c:v>
                 </c:pt>
                 <c:pt idx="1">
-                  <c:v>83.72</c:v>
+                  <c:v>83.57547551075292</c:v>
                 </c:pt>
                 <c:pt idx="2">
-                  <c:v>82.47</c:v>
+                  <c:v>81.04353064904478</c:v>
                 </c:pt>
                 <c:pt idx="3">
-                  <c:v>82.43</c:v>
+                  <c:v>83.08103379873714</c:v>
+                </c:pt>
+                <c:pt idx="4">
+                  <c:v>81.79300807255652</c:v>
                 </c:pt>
               </c:numCache>
             </c:numRef>
           </c:val>
         </c:ser>
         <c:dLbls>
+          <c:numFmt formatCode="0.00" sourceLinked="0"/>
+          <c:txPr>
+            <ns1:bodyPr anchorCtr="1"/>
+            <ns1:lstStyle/>
+            <ns1:p>
+              <ns1:pPr>
+                <ns1:defRPr sz="1500">
+                  <ns1:solidFill>
+                    <ns1:srgbClr val="102B3F"/>
+                  </ns1:solidFill>
+                  <ns1:latin typeface="Aptos"/>
+                  <ns1:ea typeface="Aptos"/>
+                  <ns1:cs typeface="Aptos"/>
+                </ns1:defRPr>
+              </ns1:pPr>
+            </ns1:p>
+          </c:txPr>
           <c:dLblPos val="outEnd"/>
           <c:showLegendKey val="0"/>
           <c:showVal val="1"/>
@@ -3466,25 +4245,28 @@
         <c:majorTickMark val="none"/>
         <c:minorTickMark val="none"/>
         <c:spPr>
-          <a:ln xmlns:a="http://schemas.openxmlformats.org/drawingml/2006/main" w="9525">
-            <a:solidFill>
-              <a:srgbClr val="D4D4D4"/>
-            </a:solidFill>
-            <a:prstDash val="solid"/>
-          </a:ln>
+          <ns1:ln w="9525">
+            <ns1:solidFill>
+              <ns1:srgbClr val="D4D4D4"/>
+            </ns1:solidFill>
+            <ns1:prstDash val="solid"/>
+          </ns1:ln>
         </c:spPr>
         <c:txPr>
-          <a:bodyPr xmlns:a="http://schemas.openxmlformats.org/drawingml/2006/main" anchorCtr="1"/>
-          <a:lstStyle xmlns:a="http://schemas.openxmlformats.org/drawingml/2006/main"/>
-          <a:p xmlns:a="http://schemas.openxmlformats.org/drawingml/2006/main">
-            <a:pPr>
-              <a:defRPr>
-                <a:solidFill>
-                  <a:srgbClr val="666666"/>
-                </a:solidFill>
-              </a:defRPr>
-            </a:pPr>
-          </a:p>
+          <ns1:bodyPr anchorCtr="1"/>
+          <ns1:lstStyle/>
+          <ns1:p>
+            <ns1:pPr>
+              <ns1:defRPr sz="1500">
+                <ns1:solidFill>
+                  <ns1:srgbClr val="666666"/>
+                </ns1:solidFill>
+                <ns1:latin typeface="Aptos"/>
+                <ns1:ea typeface="Aptos"/>
+                <ns1:cs typeface="Aptos"/>
+              </ns1:defRPr>
+            </ns1:pPr>
+          </ns1:p>
         </c:txPr>
         <c:crossAx val="48672768"/>
       </c:catAx>
@@ -3492,35 +4274,38 @@
         <c:axId val="48672768"/>
         <c:scaling>
           <c:orientation val="minMax"/>
+          <c:max val="100"/>
+          <c:min val="0"/>
         </c:scaling>
-        <c:delete val="1"/>
+        <c:delete val="0"/>
         <c:axPos val="l"/>
         <c:numFmt formatCode="General"/>
         <c:majorTickMark val="none"/>
         <c:minorTickMark val="none"/>
         <c:spPr>
-          <a:ln xmlns:a="http://schemas.openxmlformats.org/drawingml/2006/main" w="9525">
-            <a:solidFill>
-              <a:srgbClr val="D4D4D4"/>
-            </a:solidFill>
-            <a:prstDash val="solid"/>
-          </a:ln>
+          <ns1:ln w="9525">
+            <ns1:solidFill>
+              <ns1:srgbClr val="D4D4D4"/>
+            </ns1:solidFill>
+            <ns1:prstDash val="solid"/>
+          </ns1:ln>
         </c:spPr>
         <c:txPr>
-          <a:bodyPr xmlns:a="http://schemas.openxmlformats.org/drawingml/2006/main" anchorCtr="1"/>
-          <a:lstStyle xmlns:a="http://schemas.openxmlformats.org/drawingml/2006/main"/>
-          <a:p xmlns:a="http://schemas.openxmlformats.org/drawingml/2006/main">
-            <a:pPr>
-              <a:defRPr>
-                <a:solidFill>
-                  <a:srgbClr val="666666"/>
-                </a:solidFill>
-              </a:defRPr>
-            </a:pPr>
-          </a:p>
+          <ns1:bodyPr anchorCtr="1"/>
+          <ns1:lstStyle/>
+          <ns1:p>
+            <ns1:pPr>
+              <ns1:defRPr>
+                <ns1:solidFill>
+                  <ns1:srgbClr val="666666"/>
+                </ns1:solidFill>
+              </ns1:defRPr>
+            </ns1:pPr>
+          </ns1:p>
         </c:txPr>
         <c:crossAx val="48650112"/>
         <c:crossBetween val="between"/>
+        <c:majorUnit val="20"/>
       </c:valAx>
     </c:plotArea>
     <c:plotVisOnly val="1"/>
@@ -3532,7 +4317,7 @@
 </file>
 
 <file path=ppt/slides/charts/chart3.xml><?xml version="1.0" encoding="utf-8"?>
-<c:chartSpace xmlns:c="http://schemas.openxmlformats.org/drawingml/2006/chart" xmlns:r="http://schemas.openxmlformats.org/officeDocument/2006/relationships">
+<c:chartSpace xmlns:c="http://schemas.openxmlformats.org/drawingml/2006/chart" xmlns:ns1="http://schemas.openxmlformats.org/drawingml/2006/main" xmlns:r="http://schemas.openxmlformats.org/officeDocument/2006/relationships">
   <c:lang val="en-US"/>
   <c:chart>
     <c:plotArea>
@@ -3543,12 +4328,12 @@
           <c:idx val="0"/>
           <c:order val="0"/>
           <c:tx>
-            <c:v>ROC-AUC (%)</c:v>
+            <c:v>Selected model minus always-positive</c:v>
           </c:tx>
           <c:spPr>
-            <a:solidFill xmlns:a="http://schemas.openxmlformats.org/drawingml/2006/main">
-              <a:srgbClr val="087F78"/>
-            </a:solidFill>
+            <ns1:solidFill>
+              <ns1:srgbClr val="087F78"/>
+            </ns1:solidFill>
           </c:spPr>
           <c:invertIfNegative val="0"/>
           <c:cat>
@@ -3578,22 +4363,39 @@
                 <c:formatCode>General</c:formatCode>
                 <c:ptCount val="4"/>
                 <c:pt idx="0">
-                  <c:v>84.5</c:v>
+                  <c:v>13.04075888668822</c:v>
                 </c:pt>
                 <c:pt idx="1">
-                  <c:v>86.4</c:v>
+                  <c:v>11.088911088911091</c:v>
                 </c:pt>
                 <c:pt idx="2">
-                  <c:v>76.8</c:v>
+                  <c:v>-8.53560949586557</c:v>
                 </c:pt>
                 <c:pt idx="3">
-                  <c:v>70.2</c:v>
+                  <c:v>-0.20409204551252724</c:v>
                 </c:pt>
               </c:numCache>
             </c:numRef>
           </c:val>
         </c:ser>
         <c:dLbls>
+          <c:numFmt formatCode="0.00" sourceLinked="0"/>
+          <c:txPr>
+            <ns1:bodyPr anchorCtr="1"/>
+            <ns1:lstStyle/>
+            <ns1:p>
+              <ns1:pPr>
+                <ns1:defRPr sz="1575">
+                  <ns1:solidFill>
+                    <ns1:srgbClr val="102B3F"/>
+                  </ns1:solidFill>
+                  <ns1:latin typeface="Aptos"/>
+                  <ns1:ea typeface="Aptos"/>
+                  <ns1:cs typeface="Aptos"/>
+                </ns1:defRPr>
+              </ns1:pPr>
+            </ns1:p>
+          </c:txPr>
           <c:dLblPos val="outEnd"/>
           <c:showLegendKey val="0"/>
           <c:showVal val="1"/>
@@ -3616,26 +4418,30 @@
         <c:numFmt formatCode="General"/>
         <c:majorTickMark val="none"/>
         <c:minorTickMark val="none"/>
+        <c:tickLblPos val="low"/>
         <c:spPr>
-          <a:ln xmlns:a="http://schemas.openxmlformats.org/drawingml/2006/main" w="9525">
-            <a:solidFill>
-              <a:srgbClr val="D4D4D4"/>
-            </a:solidFill>
-            <a:prstDash val="solid"/>
-          </a:ln>
+          <ns1:ln w="9525">
+            <ns1:solidFill>
+              <ns1:srgbClr val="D4D4D4"/>
+            </ns1:solidFill>
+            <ns1:prstDash val="solid"/>
+          </ns1:ln>
         </c:spPr>
         <c:txPr>
-          <a:bodyPr xmlns:a="http://schemas.openxmlformats.org/drawingml/2006/main" anchorCtr="1"/>
-          <a:lstStyle xmlns:a="http://schemas.openxmlformats.org/drawingml/2006/main"/>
-          <a:p xmlns:a="http://schemas.openxmlformats.org/drawingml/2006/main">
-            <a:pPr>
-              <a:defRPr>
-                <a:solidFill>
-                  <a:srgbClr val="666666"/>
-                </a:solidFill>
-              </a:defRPr>
-            </a:pPr>
-          </a:p>
+          <ns1:bodyPr anchorCtr="1"/>
+          <ns1:lstStyle/>
+          <ns1:p>
+            <ns1:pPr>
+              <ns1:defRPr sz="1425">
+                <ns1:solidFill>
+                  <ns1:srgbClr val="666666"/>
+                </ns1:solidFill>
+                <ns1:latin typeface="Aptos"/>
+                <ns1:ea typeface="Aptos"/>
+                <ns1:cs typeface="Aptos"/>
+              </ns1:defRPr>
+            </ns1:pPr>
+          </ns1:p>
         </c:txPr>
         <c:crossAx val="48672768"/>
       </c:catAx>
@@ -3643,35 +4449,41 @@
         <c:axId val="48672768"/>
         <c:scaling>
           <c:orientation val="minMax"/>
+          <c:max val="20"/>
+          <c:min val="-15"/>
         </c:scaling>
-        <c:delete val="1"/>
+        <c:delete val="0"/>
         <c:axPos val="l"/>
-        <c:numFmt formatCode="General"/>
+        <c:numFmt formatCode="0"/>
         <c:majorTickMark val="none"/>
         <c:minorTickMark val="none"/>
         <c:spPr>
-          <a:ln xmlns:a="http://schemas.openxmlformats.org/drawingml/2006/main" w="9525">
-            <a:solidFill>
-              <a:srgbClr val="D4D4D4"/>
-            </a:solidFill>
-            <a:prstDash val="solid"/>
-          </a:ln>
+          <ns1:ln w="9525">
+            <ns1:solidFill>
+              <ns1:srgbClr val="D4D4D4"/>
+            </ns1:solidFill>
+            <ns1:prstDash val="solid"/>
+          </ns1:ln>
         </c:spPr>
         <c:txPr>
-          <a:bodyPr xmlns:a="http://schemas.openxmlformats.org/drawingml/2006/main" anchorCtr="1"/>
-          <a:lstStyle xmlns:a="http://schemas.openxmlformats.org/drawingml/2006/main"/>
-          <a:p xmlns:a="http://schemas.openxmlformats.org/drawingml/2006/main">
-            <a:pPr>
-              <a:defRPr>
-                <a:solidFill>
-                  <a:srgbClr val="666666"/>
-                </a:solidFill>
-              </a:defRPr>
-            </a:pPr>
-          </a:p>
+          <ns1:bodyPr anchorCtr="1"/>
+          <ns1:lstStyle/>
+          <ns1:p>
+            <ns1:pPr>
+              <ns1:defRPr sz="1425">
+                <ns1:solidFill>
+                  <ns1:srgbClr val="666666"/>
+                </ns1:solidFill>
+                <ns1:latin typeface="Aptos"/>
+                <ns1:ea typeface="Aptos"/>
+                <ns1:cs typeface="Aptos"/>
+              </ns1:defRPr>
+            </ns1:pPr>
+          </ns1:p>
         </c:txPr>
         <c:crossAx val="48650112"/>
         <c:crossBetween val="between"/>
+        <c:majorUnit val="5"/>
       </c:valAx>
     </c:plotArea>
     <c:plotVisOnly val="1"/>
@@ -3739,9 +4551,82 @@
                 </a:solidFill>
               </a:defRPr>
             </a:defPPr>
+            <a:lvl1pPr>
+              <a:buNone/>
+              <a:defRPr sz="3150" b="1">
+                <a:solidFill>
+                  <a:srgbClr val="102B3F"/>
+                </a:solidFill>
+              </a:defRPr>
+            </a:lvl1pPr>
+            <a:lvl2pPr>
+              <a:buNone/>
+              <a:defRPr sz="3150" b="1">
+                <a:solidFill>
+                  <a:srgbClr val="102B3F"/>
+                </a:solidFill>
+              </a:defRPr>
+            </a:lvl2pPr>
+            <a:lvl3pPr>
+              <a:buNone/>
+              <a:defRPr sz="3150" b="1">
+                <a:solidFill>
+                  <a:srgbClr val="102B3F"/>
+                </a:solidFill>
+              </a:defRPr>
+            </a:lvl3pPr>
+            <a:lvl4pPr>
+              <a:buNone/>
+              <a:defRPr sz="3150" b="1">
+                <a:solidFill>
+                  <a:srgbClr val="102B3F"/>
+                </a:solidFill>
+              </a:defRPr>
+            </a:lvl4pPr>
+            <a:lvl5pPr>
+              <a:buNone/>
+              <a:defRPr sz="3150" b="1">
+                <a:solidFill>
+                  <a:srgbClr val="102B3F"/>
+                </a:solidFill>
+              </a:defRPr>
+            </a:lvl5pPr>
+            <a:lvl6pPr>
+              <a:buNone/>
+              <a:defRPr sz="3150" b="1">
+                <a:solidFill>
+                  <a:srgbClr val="102B3F"/>
+                </a:solidFill>
+              </a:defRPr>
+            </a:lvl6pPr>
+            <a:lvl7pPr>
+              <a:buNone/>
+              <a:defRPr sz="3150" b="1">
+                <a:solidFill>
+                  <a:srgbClr val="102B3F"/>
+                </a:solidFill>
+              </a:defRPr>
+            </a:lvl7pPr>
+            <a:lvl8pPr>
+              <a:buNone/>
+              <a:defRPr sz="3150" b="1">
+                <a:solidFill>
+                  <a:srgbClr val="102B3F"/>
+                </a:solidFill>
+              </a:defRPr>
+            </a:lvl8pPr>
+            <a:lvl9pPr>
+              <a:buNone/>
+              <a:defRPr sz="3150" b="1">
+                <a:solidFill>
+                  <a:srgbClr val="102B3F"/>
+                </a:solidFill>
+              </a:defRPr>
+            </a:lvl9pPr>
           </a:lstStyle>
           <a:p xmlns:a="http://schemas.openxmlformats.org/drawingml/2006/main">
             <a:pPr>
+              <a:buNone/>
               <a:defRPr sz="3150" b="1">
                 <a:solidFill>
                   <a:srgbClr val="102B3F"/>
@@ -3754,7 +4639,7 @@
                   <a:srgbClr val="102B3F"/>
                 </a:solidFill>
               </a:rPr>
-              <a:t>HeartLens | Phase 1 ML evaluation</a:t>
+              <a:t>Project 15: Heart-Disease Risk</a:t>
             </a:r>
           </a:p>
         </p:txBody>
@@ -3797,9 +4682,82 @@
                 </a:solidFill>
               </a:defRPr>
             </a:defPPr>
+            <a:lvl1pPr>
+              <a:buNone/>
+              <a:defRPr sz="1125" b="0">
+                <a:solidFill>
+                  <a:srgbClr val="526674"/>
+                </a:solidFill>
+              </a:defRPr>
+            </a:lvl1pPr>
+            <a:lvl2pPr>
+              <a:buNone/>
+              <a:defRPr sz="1125" b="0">
+                <a:solidFill>
+                  <a:srgbClr val="526674"/>
+                </a:solidFill>
+              </a:defRPr>
+            </a:lvl2pPr>
+            <a:lvl3pPr>
+              <a:buNone/>
+              <a:defRPr sz="1125" b="0">
+                <a:solidFill>
+                  <a:srgbClr val="526674"/>
+                </a:solidFill>
+              </a:defRPr>
+            </a:lvl3pPr>
+            <a:lvl4pPr>
+              <a:buNone/>
+              <a:defRPr sz="1125" b="0">
+                <a:solidFill>
+                  <a:srgbClr val="526674"/>
+                </a:solidFill>
+              </a:defRPr>
+            </a:lvl4pPr>
+            <a:lvl5pPr>
+              <a:buNone/>
+              <a:defRPr sz="1125" b="0">
+                <a:solidFill>
+                  <a:srgbClr val="526674"/>
+                </a:solidFill>
+              </a:defRPr>
+            </a:lvl5pPr>
+            <a:lvl6pPr>
+              <a:buNone/>
+              <a:defRPr sz="1125" b="0">
+                <a:solidFill>
+                  <a:srgbClr val="526674"/>
+                </a:solidFill>
+              </a:defRPr>
+            </a:lvl6pPr>
+            <a:lvl7pPr>
+              <a:buNone/>
+              <a:defRPr sz="1125" b="0">
+                <a:solidFill>
+                  <a:srgbClr val="526674"/>
+                </a:solidFill>
+              </a:defRPr>
+            </a:lvl7pPr>
+            <a:lvl8pPr>
+              <a:buNone/>
+              <a:defRPr sz="1125" b="0">
+                <a:solidFill>
+                  <a:srgbClr val="526674"/>
+                </a:solidFill>
+              </a:defRPr>
+            </a:lvl8pPr>
+            <a:lvl9pPr>
+              <a:buNone/>
+              <a:defRPr sz="1125" b="0">
+                <a:solidFill>
+                  <a:srgbClr val="526674"/>
+                </a:solidFill>
+              </a:defRPr>
+            </a:lvl9pPr>
           </a:lstStyle>
           <a:p xmlns:a="http://schemas.openxmlformats.org/drawingml/2006/main">
             <a:pPr>
+              <a:buNone/>
               <a:defRPr sz="1125" b="0">
                 <a:solidFill>
                   <a:srgbClr val="526674"/>
@@ -3855,9 +4813,82 @@
                 </a:solidFill>
               </a:defRPr>
             </a:defPPr>
+            <a:lvl1pPr>
+              <a:buNone/>
+              <a:defRPr sz="2625" b="1">
+                <a:solidFill>
+                  <a:srgbClr val="087F78"/>
+                </a:solidFill>
+              </a:defRPr>
+            </a:lvl1pPr>
+            <a:lvl2pPr>
+              <a:buNone/>
+              <a:defRPr sz="2625" b="1">
+                <a:solidFill>
+                  <a:srgbClr val="087F78"/>
+                </a:solidFill>
+              </a:defRPr>
+            </a:lvl2pPr>
+            <a:lvl3pPr>
+              <a:buNone/>
+              <a:defRPr sz="2625" b="1">
+                <a:solidFill>
+                  <a:srgbClr val="087F78"/>
+                </a:solidFill>
+              </a:defRPr>
+            </a:lvl3pPr>
+            <a:lvl4pPr>
+              <a:buNone/>
+              <a:defRPr sz="2625" b="1">
+                <a:solidFill>
+                  <a:srgbClr val="087F78"/>
+                </a:solidFill>
+              </a:defRPr>
+            </a:lvl4pPr>
+            <a:lvl5pPr>
+              <a:buNone/>
+              <a:defRPr sz="2625" b="1">
+                <a:solidFill>
+                  <a:srgbClr val="087F78"/>
+                </a:solidFill>
+              </a:defRPr>
+            </a:lvl5pPr>
+            <a:lvl6pPr>
+              <a:buNone/>
+              <a:defRPr sz="2625" b="1">
+                <a:solidFill>
+                  <a:srgbClr val="087F78"/>
+                </a:solidFill>
+              </a:defRPr>
+            </a:lvl6pPr>
+            <a:lvl7pPr>
+              <a:buNone/>
+              <a:defRPr sz="2625" b="1">
+                <a:solidFill>
+                  <a:srgbClr val="087F78"/>
+                </a:solidFill>
+              </a:defRPr>
+            </a:lvl7pPr>
+            <a:lvl8pPr>
+              <a:buNone/>
+              <a:defRPr sz="2625" b="1">
+                <a:solidFill>
+                  <a:srgbClr val="087F78"/>
+                </a:solidFill>
+              </a:defRPr>
+            </a:lvl8pPr>
+            <a:lvl9pPr>
+              <a:buNone/>
+              <a:defRPr sz="2625" b="1">
+                <a:solidFill>
+                  <a:srgbClr val="087F78"/>
+                </a:solidFill>
+              </a:defRPr>
+            </a:lvl9pPr>
           </a:lstStyle>
           <a:p xmlns:a="http://schemas.openxmlformats.org/drawingml/2006/main">
             <a:pPr>
+              <a:buNone/>
               <a:defRPr sz="2625" b="1">
                 <a:solidFill>
                   <a:srgbClr val="087F78"/>
@@ -3870,7 +4901,25 @@
                   <a:srgbClr val="087F78"/>
                 </a:solidFill>
               </a:rPr>
-              <a:t>Binary heart disease classification across four UCI hospitals</a:t>
+              <a:t>Domain-Structured Bayesian Network</a:t>
+            </a:r>
+          </a:p>
+          <a:p xmlns:a="http://schemas.openxmlformats.org/drawingml/2006/main">
+            <a:pPr>
+              <a:buNone/>
+              <a:defRPr sz="2625" b="1">
+                <a:solidFill>
+                  <a:srgbClr val="087F78"/>
+                </a:solidFill>
+              </a:defRPr>
+            </a:pPr>
+            <a:r>
+              <a:rPr sz="2625" b="1">
+                <a:solidFill>
+                  <a:srgbClr val="087F78"/>
+                </a:solidFill>
+              </a:rPr>
+              <a:t>vs Neural Network</a:t>
             </a:r>
           </a:p>
         </p:txBody>
@@ -3891,8 +4940,8 @@
         </p:nvSpPr>
         <p:spPr>
           <a:xfrm xmlns:a="http://schemas.openxmlformats.org/drawingml/2006/main">
-            <a:off x="781050" y="4000500"/>
-            <a:ext cx="9525000" cy="476250"/>
+            <a:off x="781050" y="3476625"/>
+            <a:ext cx="10382250" cy="1619250"/>
           </a:xfrm>
           <a:prstGeom xmlns:a="http://schemas.openxmlformats.org/drawingml/2006/main" prst="rect">
             <a:avLst/>
@@ -3907,28 +4956,155 @@
           <a:bodyPr xmlns:a="http://schemas.openxmlformats.org/drawingml/2006/main" anchor="ctr"/>
           <a:lstStyle xmlns:a="http://schemas.openxmlformats.org/drawingml/2006/main">
             <a:defPPr>
-              <a:defRPr sz="1950" b="0">
+              <a:defRPr sz="1575" b="0">
                 <a:solidFill>
                   <a:srgbClr val="526674"/>
                 </a:solidFill>
               </a:defRPr>
             </a:defPPr>
+            <a:lvl1pPr>
+              <a:buNone/>
+              <a:defRPr sz="1875" b="0">
+                <a:solidFill>
+                  <a:srgbClr val="526674"/>
+                </a:solidFill>
+              </a:defRPr>
+            </a:lvl1pPr>
+            <a:lvl2pPr>
+              <a:buNone/>
+              <a:defRPr sz="1875" b="0">
+                <a:solidFill>
+                  <a:srgbClr val="526674"/>
+                </a:solidFill>
+              </a:defRPr>
+            </a:lvl2pPr>
+            <a:lvl3pPr>
+              <a:buNone/>
+              <a:defRPr sz="1875" b="0">
+                <a:solidFill>
+                  <a:srgbClr val="526674"/>
+                </a:solidFill>
+              </a:defRPr>
+            </a:lvl3pPr>
+            <a:lvl4pPr>
+              <a:buNone/>
+              <a:defRPr sz="1875" b="0">
+                <a:solidFill>
+                  <a:srgbClr val="526674"/>
+                </a:solidFill>
+              </a:defRPr>
+            </a:lvl4pPr>
+            <a:lvl5pPr>
+              <a:buNone/>
+              <a:defRPr sz="1875" b="0">
+                <a:solidFill>
+                  <a:srgbClr val="526674"/>
+                </a:solidFill>
+              </a:defRPr>
+            </a:lvl5pPr>
+            <a:lvl6pPr>
+              <a:buNone/>
+              <a:defRPr sz="1875" b="0">
+                <a:solidFill>
+                  <a:srgbClr val="526674"/>
+                </a:solidFill>
+              </a:defRPr>
+            </a:lvl6pPr>
+            <a:lvl7pPr>
+              <a:buNone/>
+              <a:defRPr sz="1875" b="0">
+                <a:solidFill>
+                  <a:srgbClr val="526674"/>
+                </a:solidFill>
+              </a:defRPr>
+            </a:lvl7pPr>
+            <a:lvl8pPr>
+              <a:buNone/>
+              <a:defRPr sz="1875" b="0">
+                <a:solidFill>
+                  <a:srgbClr val="526674"/>
+                </a:solidFill>
+              </a:defRPr>
+            </a:lvl8pPr>
+            <a:lvl9pPr>
+              <a:buNone/>
+              <a:defRPr sz="1875" b="0">
+                <a:solidFill>
+                  <a:srgbClr val="526674"/>
+                </a:solidFill>
+              </a:defRPr>
+            </a:lvl9pPr>
           </a:lstStyle>
           <a:p xmlns:a="http://schemas.openxmlformats.org/drawingml/2006/main">
             <a:pPr>
-              <a:defRPr sz="1950" b="0">
+              <a:buNone/>
+              <a:defRPr sz="1575" b="0">
                 <a:solidFill>
                   <a:srgbClr val="526674"/>
                 </a:solidFill>
               </a:defRPr>
             </a:pPr>
             <a:r>
-              <a:rPr sz="1950" b="0">
+              <a:rPr sz="1575" b="0">
                 <a:solidFill>
                   <a:srgbClr val="526674"/>
                 </a:solidFill>
               </a:rPr>
-              <a:t>CSAI Project Team</a:t>
+              <a:t>Team T008, Section C | Newton School of Technology, Rishihood University</a:t>
+            </a:r>
+          </a:p>
+          <a:p xmlns:a="http://schemas.openxmlformats.org/drawingml/2006/main">
+            <a:pPr>
+              <a:buNone/>
+              <a:defRPr sz="1575" b="0">
+                <a:solidFill>
+                  <a:srgbClr val="526674"/>
+                </a:solidFill>
+              </a:defRPr>
+            </a:pPr>
+            <a:r>
+              <a:rPr sz="1575" b="0">
+                <a:solidFill>
+                  <a:srgbClr val="526674"/>
+                </a:solidFill>
+              </a:rPr>
+              <a:t>Nishtha Gupta (2401010303) | Aditya Srivastava (2401010039)</a:t>
+            </a:r>
+          </a:p>
+          <a:p xmlns:a="http://schemas.openxmlformats.org/drawingml/2006/main">
+            <a:pPr>
+              <a:buNone/>
+              <a:defRPr sz="1575" b="0">
+                <a:solidFill>
+                  <a:srgbClr val="526674"/>
+                </a:solidFill>
+              </a:defRPr>
+            </a:pPr>
+            <a:r>
+              <a:rPr sz="1575" b="0">
+                <a:solidFill>
+                  <a:srgbClr val="526674"/>
+                </a:solidFill>
+              </a:rPr>
+              <a:t>Aanya Mehrotra (2401010006) | Shrijan Sanidhya (2401010449)</a:t>
+            </a:r>
+          </a:p>
+          <a:p xmlns:a="http://schemas.openxmlformats.org/drawingml/2006/main">
+            <a:pPr>
+              <a:buNone/>
+              <a:defRPr sz="1575" b="0">
+                <a:solidFill>
+                  <a:srgbClr val="526674"/>
+                </a:solidFill>
+              </a:defRPr>
+            </a:pPr>
+            <a:r>
+              <a:rPr sz="1575" b="0">
+                <a:solidFill>
+                  <a:srgbClr val="526674"/>
+                </a:solidFill>
+              </a:rPr>
+              <a:t>Abhay Mallik (2401020002)</a:t>
             </a:r>
           </a:p>
         </p:txBody>
@@ -3949,8 +5125,8 @@
         </p:nvSpPr>
         <p:spPr>
           <a:xfrm xmlns:a="http://schemas.openxmlformats.org/drawingml/2006/main">
-            <a:off x="781050" y="4714875"/>
-            <a:ext cx="9906000" cy="457200"/>
+            <a:off x="781050" y="5238750"/>
+            <a:ext cx="10382250" cy="809625"/>
           </a:xfrm>
           <a:prstGeom xmlns:a="http://schemas.openxmlformats.org/drawingml/2006/main" prst="rect">
             <a:avLst/>
@@ -3971,9 +5147,82 @@
                 </a:solidFill>
               </a:defRPr>
             </a:defPPr>
+            <a:lvl1pPr>
+              <a:buNone/>
+              <a:defRPr sz="1725" b="0">
+                <a:solidFill>
+                  <a:srgbClr val="526674"/>
+                </a:solidFill>
+              </a:defRPr>
+            </a:lvl1pPr>
+            <a:lvl2pPr>
+              <a:buNone/>
+              <a:defRPr sz="1725" b="0">
+                <a:solidFill>
+                  <a:srgbClr val="526674"/>
+                </a:solidFill>
+              </a:defRPr>
+            </a:lvl2pPr>
+            <a:lvl3pPr>
+              <a:buNone/>
+              <a:defRPr sz="1725" b="0">
+                <a:solidFill>
+                  <a:srgbClr val="526674"/>
+                </a:solidFill>
+              </a:defRPr>
+            </a:lvl3pPr>
+            <a:lvl4pPr>
+              <a:buNone/>
+              <a:defRPr sz="1725" b="0">
+                <a:solidFill>
+                  <a:srgbClr val="526674"/>
+                </a:solidFill>
+              </a:defRPr>
+            </a:lvl4pPr>
+            <a:lvl5pPr>
+              <a:buNone/>
+              <a:defRPr sz="1725" b="0">
+                <a:solidFill>
+                  <a:srgbClr val="526674"/>
+                </a:solidFill>
+              </a:defRPr>
+            </a:lvl5pPr>
+            <a:lvl6pPr>
+              <a:buNone/>
+              <a:defRPr sz="1725" b="0">
+                <a:solidFill>
+                  <a:srgbClr val="526674"/>
+                </a:solidFill>
+              </a:defRPr>
+            </a:lvl6pPr>
+            <a:lvl7pPr>
+              <a:buNone/>
+              <a:defRPr sz="1725" b="0">
+                <a:solidFill>
+                  <a:srgbClr val="526674"/>
+                </a:solidFill>
+              </a:defRPr>
+            </a:lvl7pPr>
+            <a:lvl8pPr>
+              <a:buNone/>
+              <a:defRPr sz="1725" b="0">
+                <a:solidFill>
+                  <a:srgbClr val="526674"/>
+                </a:solidFill>
+              </a:defRPr>
+            </a:lvl8pPr>
+            <a:lvl9pPr>
+              <a:buNone/>
+              <a:defRPr sz="1725" b="0">
+                <a:solidFill>
+                  <a:srgbClr val="526674"/>
+                </a:solidFill>
+              </a:defRPr>
+            </a:lvl9pPr>
           </a:lstStyle>
           <a:p xmlns:a="http://schemas.openxmlformats.org/drawingml/2006/main">
             <a:pPr>
+              <a:buNone/>
               <a:defRPr sz="1725" b="0">
                 <a:solidFill>
                   <a:srgbClr val="526674"/>
@@ -3986,7 +5235,25 @@
                   <a:srgbClr val="526674"/>
                 </a:solidFill>
               </a:rPr>
-              <a:t>Educational model • Source data: UCI Heart Disease</a:t>
+              <a:t>Phase 1: four conventional classifiers and a provisional BN</a:t>
+            </a:r>
+          </a:p>
+          <a:p xmlns:a="http://schemas.openxmlformats.org/drawingml/2006/main">
+            <a:pPr>
+              <a:buNone/>
+              <a:defRPr sz="1725" b="0">
+                <a:solidFill>
+                  <a:srgbClr val="526674"/>
+                </a:solidFill>
+              </a:defRPr>
+            </a:pPr>
+            <a:r>
+              <a:rPr sz="1725" b="0">
+                <a:solidFill>
+                  <a:srgbClr val="526674"/>
+                </a:solidFill>
+              </a:rPr>
+              <a:t>Neural-network implementation belongs to Phase 2</a:t>
             </a:r>
           </a:p>
         </p:txBody>
@@ -4058,9 +5325,82 @@
                 </a:solidFill>
               </a:defRPr>
             </a:defPPr>
+            <a:lvl1pPr>
+              <a:buNone/>
+              <a:defRPr sz="3150" b="1">
+                <a:solidFill>
+                  <a:srgbClr val="102B3F"/>
+                </a:solidFill>
+              </a:defRPr>
+            </a:lvl1pPr>
+            <a:lvl2pPr>
+              <a:buNone/>
+              <a:defRPr sz="3150" b="1">
+                <a:solidFill>
+                  <a:srgbClr val="102B3F"/>
+                </a:solidFill>
+              </a:defRPr>
+            </a:lvl2pPr>
+            <a:lvl3pPr>
+              <a:buNone/>
+              <a:defRPr sz="3150" b="1">
+                <a:solidFill>
+                  <a:srgbClr val="102B3F"/>
+                </a:solidFill>
+              </a:defRPr>
+            </a:lvl3pPr>
+            <a:lvl4pPr>
+              <a:buNone/>
+              <a:defRPr sz="3150" b="1">
+                <a:solidFill>
+                  <a:srgbClr val="102B3F"/>
+                </a:solidFill>
+              </a:defRPr>
+            </a:lvl4pPr>
+            <a:lvl5pPr>
+              <a:buNone/>
+              <a:defRPr sz="3150" b="1">
+                <a:solidFill>
+                  <a:srgbClr val="102B3F"/>
+                </a:solidFill>
+              </a:defRPr>
+            </a:lvl5pPr>
+            <a:lvl6pPr>
+              <a:buNone/>
+              <a:defRPr sz="3150" b="1">
+                <a:solidFill>
+                  <a:srgbClr val="102B3F"/>
+                </a:solidFill>
+              </a:defRPr>
+            </a:lvl6pPr>
+            <a:lvl7pPr>
+              <a:buNone/>
+              <a:defRPr sz="3150" b="1">
+                <a:solidFill>
+                  <a:srgbClr val="102B3F"/>
+                </a:solidFill>
+              </a:defRPr>
+            </a:lvl7pPr>
+            <a:lvl8pPr>
+              <a:buNone/>
+              <a:defRPr sz="3150" b="1">
+                <a:solidFill>
+                  <a:srgbClr val="102B3F"/>
+                </a:solidFill>
+              </a:defRPr>
+            </a:lvl8pPr>
+            <a:lvl9pPr>
+              <a:buNone/>
+              <a:defRPr sz="3150" b="1">
+                <a:solidFill>
+                  <a:srgbClr val="102B3F"/>
+                </a:solidFill>
+              </a:defRPr>
+            </a:lvl9pPr>
           </a:lstStyle>
           <a:p xmlns:a="http://schemas.openxmlformats.org/drawingml/2006/main">
             <a:pPr>
+              <a:buNone/>
               <a:defRPr sz="3150" b="1">
                 <a:solidFill>
                   <a:srgbClr val="102B3F"/>
@@ -4073,7 +5413,7 @@
                   <a:srgbClr val="102B3F"/>
                 </a:solidFill>
               </a:rPr>
-              <a:t>Problem and data</a:t>
+              <a:t>Research question and dataset</a:t>
             </a:r>
           </a:p>
         </p:txBody>
@@ -4116,9 +5456,82 @@
                 </a:solidFill>
               </a:defRPr>
             </a:defPPr>
+            <a:lvl1pPr>
+              <a:buNone/>
+              <a:defRPr sz="1125" b="0">
+                <a:solidFill>
+                  <a:srgbClr val="526674"/>
+                </a:solidFill>
+              </a:defRPr>
+            </a:lvl1pPr>
+            <a:lvl2pPr>
+              <a:buNone/>
+              <a:defRPr sz="1125" b="0">
+                <a:solidFill>
+                  <a:srgbClr val="526674"/>
+                </a:solidFill>
+              </a:defRPr>
+            </a:lvl2pPr>
+            <a:lvl3pPr>
+              <a:buNone/>
+              <a:defRPr sz="1125" b="0">
+                <a:solidFill>
+                  <a:srgbClr val="526674"/>
+                </a:solidFill>
+              </a:defRPr>
+            </a:lvl3pPr>
+            <a:lvl4pPr>
+              <a:buNone/>
+              <a:defRPr sz="1125" b="0">
+                <a:solidFill>
+                  <a:srgbClr val="526674"/>
+                </a:solidFill>
+              </a:defRPr>
+            </a:lvl4pPr>
+            <a:lvl5pPr>
+              <a:buNone/>
+              <a:defRPr sz="1125" b="0">
+                <a:solidFill>
+                  <a:srgbClr val="526674"/>
+                </a:solidFill>
+              </a:defRPr>
+            </a:lvl5pPr>
+            <a:lvl6pPr>
+              <a:buNone/>
+              <a:defRPr sz="1125" b="0">
+                <a:solidFill>
+                  <a:srgbClr val="526674"/>
+                </a:solidFill>
+              </a:defRPr>
+            </a:lvl6pPr>
+            <a:lvl7pPr>
+              <a:buNone/>
+              <a:defRPr sz="1125" b="0">
+                <a:solidFill>
+                  <a:srgbClr val="526674"/>
+                </a:solidFill>
+              </a:defRPr>
+            </a:lvl7pPr>
+            <a:lvl8pPr>
+              <a:buNone/>
+              <a:defRPr sz="1125" b="0">
+                <a:solidFill>
+                  <a:srgbClr val="526674"/>
+                </a:solidFill>
+              </a:defRPr>
+            </a:lvl8pPr>
+            <a:lvl9pPr>
+              <a:buNone/>
+              <a:defRPr sz="1125" b="0">
+                <a:solidFill>
+                  <a:srgbClr val="526674"/>
+                </a:solidFill>
+              </a:defRPr>
+            </a:lvl9pPr>
           </a:lstStyle>
           <a:p xmlns:a="http://schemas.openxmlformats.org/drawingml/2006/main">
             <a:pPr>
+              <a:buNone/>
               <a:defRPr sz="1125" b="0">
                 <a:solidFill>
                   <a:srgbClr val="526674"/>
@@ -4168,28 +5581,101 @@
           <a:bodyPr xmlns:a="http://schemas.openxmlformats.org/drawingml/2006/main" anchor="ctr"/>
           <a:lstStyle xmlns:a="http://schemas.openxmlformats.org/drawingml/2006/main">
             <a:defPPr>
-              <a:defRPr sz="1050" b="0">
+              <a:defRPr sz="1125" b="0">
                 <a:solidFill>
                   <a:srgbClr val="526674"/>
                 </a:solidFill>
               </a:defRPr>
             </a:defPPr>
+            <a:lvl1pPr>
+              <a:buNone/>
+              <a:defRPr sz="1125" b="0">
+                <a:solidFill>
+                  <a:srgbClr val="526674"/>
+                </a:solidFill>
+              </a:defRPr>
+            </a:lvl1pPr>
+            <a:lvl2pPr>
+              <a:buNone/>
+              <a:defRPr sz="1125" b="0">
+                <a:solidFill>
+                  <a:srgbClr val="526674"/>
+                </a:solidFill>
+              </a:defRPr>
+            </a:lvl2pPr>
+            <a:lvl3pPr>
+              <a:buNone/>
+              <a:defRPr sz="1125" b="0">
+                <a:solidFill>
+                  <a:srgbClr val="526674"/>
+                </a:solidFill>
+              </a:defRPr>
+            </a:lvl3pPr>
+            <a:lvl4pPr>
+              <a:buNone/>
+              <a:defRPr sz="1125" b="0">
+                <a:solidFill>
+                  <a:srgbClr val="526674"/>
+                </a:solidFill>
+              </a:defRPr>
+            </a:lvl4pPr>
+            <a:lvl5pPr>
+              <a:buNone/>
+              <a:defRPr sz="1125" b="0">
+                <a:solidFill>
+                  <a:srgbClr val="526674"/>
+                </a:solidFill>
+              </a:defRPr>
+            </a:lvl5pPr>
+            <a:lvl6pPr>
+              <a:buNone/>
+              <a:defRPr sz="1125" b="0">
+                <a:solidFill>
+                  <a:srgbClr val="526674"/>
+                </a:solidFill>
+              </a:defRPr>
+            </a:lvl6pPr>
+            <a:lvl7pPr>
+              <a:buNone/>
+              <a:defRPr sz="1125" b="0">
+                <a:solidFill>
+                  <a:srgbClr val="526674"/>
+                </a:solidFill>
+              </a:defRPr>
+            </a:lvl7pPr>
+            <a:lvl8pPr>
+              <a:buNone/>
+              <a:defRPr sz="1125" b="0">
+                <a:solidFill>
+                  <a:srgbClr val="526674"/>
+                </a:solidFill>
+              </a:defRPr>
+            </a:lvl8pPr>
+            <a:lvl9pPr>
+              <a:buNone/>
+              <a:defRPr sz="1125" b="0">
+                <a:solidFill>
+                  <a:srgbClr val="526674"/>
+                </a:solidFill>
+              </a:defRPr>
+            </a:lvl9pPr>
           </a:lstStyle>
           <a:p xmlns:a="http://schemas.openxmlformats.org/drawingml/2006/main">
             <a:pPr>
-              <a:defRPr sz="1050" b="0">
+              <a:buNone/>
+              <a:defRPr sz="1125" b="0">
                 <a:solidFill>
                   <a:srgbClr val="526674"/>
                 </a:solidFill>
               </a:defRPr>
             </a:pPr>
             <a:r>
-              <a:rPr sz="1050" b="0">
+              <a:rPr sz="1125" b="0">
                 <a:solidFill>
                   <a:srgbClr val="526674"/>
                 </a:solidFill>
               </a:rPr>
-              <a:t>Source: UCI Heart Disease, archive.ics.uci.edu/dataset/45/heart+disease</a:t>
+              <a:t>Source: official UCI processed files checked; exact acquisition/merge history remains incomplete.</a:t>
             </a:r>
           </a:p>
         </p:txBody>
@@ -4232,9 +5718,82 @@
                 </a:solidFill>
               </a:defRPr>
             </a:defPPr>
+            <a:lvl1pPr>
+              <a:buNone/>
+              <a:defRPr sz="2025" b="1">
+                <a:solidFill>
+                  <a:srgbClr val="087F78"/>
+                </a:solidFill>
+              </a:defRPr>
+            </a:lvl1pPr>
+            <a:lvl2pPr>
+              <a:buNone/>
+              <a:defRPr sz="2025" b="1">
+                <a:solidFill>
+                  <a:srgbClr val="087F78"/>
+                </a:solidFill>
+              </a:defRPr>
+            </a:lvl2pPr>
+            <a:lvl3pPr>
+              <a:buNone/>
+              <a:defRPr sz="2025" b="1">
+                <a:solidFill>
+                  <a:srgbClr val="087F78"/>
+                </a:solidFill>
+              </a:defRPr>
+            </a:lvl3pPr>
+            <a:lvl4pPr>
+              <a:buNone/>
+              <a:defRPr sz="2025" b="1">
+                <a:solidFill>
+                  <a:srgbClr val="087F78"/>
+                </a:solidFill>
+              </a:defRPr>
+            </a:lvl4pPr>
+            <a:lvl5pPr>
+              <a:buNone/>
+              <a:defRPr sz="2025" b="1">
+                <a:solidFill>
+                  <a:srgbClr val="087F78"/>
+                </a:solidFill>
+              </a:defRPr>
+            </a:lvl5pPr>
+            <a:lvl6pPr>
+              <a:buNone/>
+              <a:defRPr sz="2025" b="1">
+                <a:solidFill>
+                  <a:srgbClr val="087F78"/>
+                </a:solidFill>
+              </a:defRPr>
+            </a:lvl6pPr>
+            <a:lvl7pPr>
+              <a:buNone/>
+              <a:defRPr sz="2025" b="1">
+                <a:solidFill>
+                  <a:srgbClr val="087F78"/>
+                </a:solidFill>
+              </a:defRPr>
+            </a:lvl7pPr>
+            <a:lvl8pPr>
+              <a:buNone/>
+              <a:defRPr sz="2025" b="1">
+                <a:solidFill>
+                  <a:srgbClr val="087F78"/>
+                </a:solidFill>
+              </a:defRPr>
+            </a:lvl8pPr>
+            <a:lvl9pPr>
+              <a:buNone/>
+              <a:defRPr sz="2025" b="1">
+                <a:solidFill>
+                  <a:srgbClr val="087F78"/>
+                </a:solidFill>
+              </a:defRPr>
+            </a:lvl9pPr>
           </a:lstStyle>
           <a:p xmlns:a="http://schemas.openxmlformats.org/drawingml/2006/main">
             <a:pPr>
+              <a:buNone/>
               <a:defRPr sz="2025" b="1">
                 <a:solidFill>
                   <a:srgbClr val="087F78"/>
@@ -4247,7 +5806,7 @@
                   <a:srgbClr val="087F78"/>
                 </a:solidFill>
               </a:rPr>
-              <a:t>Target: num &gt; 0 means disease present</a:t>
+              <a:t>How does a provisional BN compare with four ML baselines?</a:t>
             </a:r>
           </a:p>
         </p:txBody>
@@ -4284,28 +5843,101 @@
           <a:bodyPr xmlns:a="http://schemas.openxmlformats.org/drawingml/2006/main" anchor="ctr"/>
           <a:lstStyle xmlns:a="http://schemas.openxmlformats.org/drawingml/2006/main">
             <a:defPPr>
+              <a:defRPr sz="1950" b="0">
+                <a:solidFill>
+                  <a:srgbClr val="102B3F"/>
+                </a:solidFill>
+              </a:defRPr>
+            </a:defPPr>
+            <a:lvl1pPr>
+              <a:buNone/>
               <a:defRPr sz="2025" b="0">
                 <a:solidFill>
                   <a:srgbClr val="102B3F"/>
                 </a:solidFill>
               </a:defRPr>
-            </a:defPPr>
+            </a:lvl1pPr>
+            <a:lvl2pPr>
+              <a:buNone/>
+              <a:defRPr sz="2025" b="0">
+                <a:solidFill>
+                  <a:srgbClr val="102B3F"/>
+                </a:solidFill>
+              </a:defRPr>
+            </a:lvl2pPr>
+            <a:lvl3pPr>
+              <a:buNone/>
+              <a:defRPr sz="2025" b="0">
+                <a:solidFill>
+                  <a:srgbClr val="102B3F"/>
+                </a:solidFill>
+              </a:defRPr>
+            </a:lvl3pPr>
+            <a:lvl4pPr>
+              <a:buNone/>
+              <a:defRPr sz="2025" b="0">
+                <a:solidFill>
+                  <a:srgbClr val="102B3F"/>
+                </a:solidFill>
+              </a:defRPr>
+            </a:lvl4pPr>
+            <a:lvl5pPr>
+              <a:buNone/>
+              <a:defRPr sz="2025" b="0">
+                <a:solidFill>
+                  <a:srgbClr val="102B3F"/>
+                </a:solidFill>
+              </a:defRPr>
+            </a:lvl5pPr>
+            <a:lvl6pPr>
+              <a:buNone/>
+              <a:defRPr sz="2025" b="0">
+                <a:solidFill>
+                  <a:srgbClr val="102B3F"/>
+                </a:solidFill>
+              </a:defRPr>
+            </a:lvl6pPr>
+            <a:lvl7pPr>
+              <a:buNone/>
+              <a:defRPr sz="2025" b="0">
+                <a:solidFill>
+                  <a:srgbClr val="102B3F"/>
+                </a:solidFill>
+              </a:defRPr>
+            </a:lvl7pPr>
+            <a:lvl8pPr>
+              <a:buNone/>
+              <a:defRPr sz="2025" b="0">
+                <a:solidFill>
+                  <a:srgbClr val="102B3F"/>
+                </a:solidFill>
+              </a:defRPr>
+            </a:lvl8pPr>
+            <a:lvl9pPr>
+              <a:buNone/>
+              <a:defRPr sz="2025" b="0">
+                <a:solidFill>
+                  <a:srgbClr val="102B3F"/>
+                </a:solidFill>
+              </a:defRPr>
+            </a:lvl9pPr>
           </a:lstStyle>
           <a:p xmlns:a="http://schemas.openxmlformats.org/drawingml/2006/main">
             <a:pPr>
-              <a:defRPr sz="2025" b="0">
+              <a:buNone/>
+              <a:defRPr sz="1950" b="0">
                 <a:solidFill>
                   <a:srgbClr val="102B3F"/>
                 </a:solidFill>
               </a:defRPr>
             </a:pPr>
             <a:r>
-              <a:rPr sz="2025" b="0">
+              <a:rPr sz="1950" b="0">
                 <a:solidFill>
                   <a:srgbClr val="102B3F"/>
                 </a:solidFill>
               </a:rPr>
-              <a:t>920 source rows → 918 after duplicate removal</a:t>
+              <a:t>920 rows; 918 after deduplication; 508 positive / 410 negative</a:t>
             </a:r>
           </a:p>
         </p:txBody>
@@ -4342,28 +5974,101 @@
           <a:bodyPr xmlns:a="http://schemas.openxmlformats.org/drawingml/2006/main" anchor="ctr"/>
           <a:lstStyle xmlns:a="http://schemas.openxmlformats.org/drawingml/2006/main">
             <a:defPPr>
+              <a:defRPr sz="1950" b="0">
+                <a:solidFill>
+                  <a:srgbClr val="102B3F"/>
+                </a:solidFill>
+              </a:defRPr>
+            </a:defPPr>
+            <a:lvl1pPr>
+              <a:buNone/>
               <a:defRPr sz="2025" b="0">
                 <a:solidFill>
                   <a:srgbClr val="102B3F"/>
                 </a:solidFill>
               </a:defRPr>
-            </a:defPPr>
+            </a:lvl1pPr>
+            <a:lvl2pPr>
+              <a:buNone/>
+              <a:defRPr sz="2025" b="0">
+                <a:solidFill>
+                  <a:srgbClr val="102B3F"/>
+                </a:solidFill>
+              </a:defRPr>
+            </a:lvl2pPr>
+            <a:lvl3pPr>
+              <a:buNone/>
+              <a:defRPr sz="2025" b="0">
+                <a:solidFill>
+                  <a:srgbClr val="102B3F"/>
+                </a:solidFill>
+              </a:defRPr>
+            </a:lvl3pPr>
+            <a:lvl4pPr>
+              <a:buNone/>
+              <a:defRPr sz="2025" b="0">
+                <a:solidFill>
+                  <a:srgbClr val="102B3F"/>
+                </a:solidFill>
+              </a:defRPr>
+            </a:lvl4pPr>
+            <a:lvl5pPr>
+              <a:buNone/>
+              <a:defRPr sz="2025" b="0">
+                <a:solidFill>
+                  <a:srgbClr val="102B3F"/>
+                </a:solidFill>
+              </a:defRPr>
+            </a:lvl5pPr>
+            <a:lvl6pPr>
+              <a:buNone/>
+              <a:defRPr sz="2025" b="0">
+                <a:solidFill>
+                  <a:srgbClr val="102B3F"/>
+                </a:solidFill>
+              </a:defRPr>
+            </a:lvl6pPr>
+            <a:lvl7pPr>
+              <a:buNone/>
+              <a:defRPr sz="2025" b="0">
+                <a:solidFill>
+                  <a:srgbClr val="102B3F"/>
+                </a:solidFill>
+              </a:defRPr>
+            </a:lvl7pPr>
+            <a:lvl8pPr>
+              <a:buNone/>
+              <a:defRPr sz="2025" b="0">
+                <a:solidFill>
+                  <a:srgbClr val="102B3F"/>
+                </a:solidFill>
+              </a:defRPr>
+            </a:lvl8pPr>
+            <a:lvl9pPr>
+              <a:buNone/>
+              <a:defRPr sz="2025" b="0">
+                <a:solidFill>
+                  <a:srgbClr val="102B3F"/>
+                </a:solidFill>
+              </a:defRPr>
+            </a:lvl9pPr>
           </a:lstStyle>
           <a:p xmlns:a="http://schemas.openxmlformats.org/drawingml/2006/main">
             <a:pPr>
-              <a:defRPr sz="2025" b="0">
+              <a:buNone/>
+              <a:defRPr sz="1950" b="0">
                 <a:solidFill>
                   <a:srgbClr val="102B3F"/>
                 </a:solidFill>
               </a:defRPr>
             </a:pPr>
             <a:r>
-              <a:rPr sz="2025" b="0">
+              <a:rPr sz="1950" b="0">
                 <a:solidFill>
                   <a:srgbClr val="102B3F"/>
                 </a:solidFill>
               </a:rPr>
-              <a:t>508 positive and 410 negative records</a:t>
+              <a:t>ID 304: local Cleveland label differs from its official Hungarian match</a:t>
             </a:r>
           </a:p>
         </p:txBody>
@@ -4400,28 +6105,101 @@
           <a:bodyPr xmlns:a="http://schemas.openxmlformats.org/drawingml/2006/main" anchor="ctr"/>
           <a:lstStyle xmlns:a="http://schemas.openxmlformats.org/drawingml/2006/main">
             <a:defPPr>
+              <a:defRPr sz="1950" b="0">
+                <a:solidFill>
+                  <a:srgbClr val="102B3F"/>
+                </a:solidFill>
+              </a:defRPr>
+            </a:defPPr>
+            <a:lvl1pPr>
+              <a:buNone/>
               <a:defRPr sz="2025" b="0">
                 <a:solidFill>
                   <a:srgbClr val="102B3F"/>
                 </a:solidFill>
               </a:defRPr>
-            </a:defPPr>
+            </a:lvl1pPr>
+            <a:lvl2pPr>
+              <a:buNone/>
+              <a:defRPr sz="2025" b="0">
+                <a:solidFill>
+                  <a:srgbClr val="102B3F"/>
+                </a:solidFill>
+              </a:defRPr>
+            </a:lvl2pPr>
+            <a:lvl3pPr>
+              <a:buNone/>
+              <a:defRPr sz="2025" b="0">
+                <a:solidFill>
+                  <a:srgbClr val="102B3F"/>
+                </a:solidFill>
+              </a:defRPr>
+            </a:lvl3pPr>
+            <a:lvl4pPr>
+              <a:buNone/>
+              <a:defRPr sz="2025" b="0">
+                <a:solidFill>
+                  <a:srgbClr val="102B3F"/>
+                </a:solidFill>
+              </a:defRPr>
+            </a:lvl4pPr>
+            <a:lvl5pPr>
+              <a:buNone/>
+              <a:defRPr sz="2025" b="0">
+                <a:solidFill>
+                  <a:srgbClr val="102B3F"/>
+                </a:solidFill>
+              </a:defRPr>
+            </a:lvl5pPr>
+            <a:lvl6pPr>
+              <a:buNone/>
+              <a:defRPr sz="2025" b="0">
+                <a:solidFill>
+                  <a:srgbClr val="102B3F"/>
+                </a:solidFill>
+              </a:defRPr>
+            </a:lvl6pPr>
+            <a:lvl7pPr>
+              <a:buNone/>
+              <a:defRPr sz="2025" b="0">
+                <a:solidFill>
+                  <a:srgbClr val="102B3F"/>
+                </a:solidFill>
+              </a:defRPr>
+            </a:lvl7pPr>
+            <a:lvl8pPr>
+              <a:buNone/>
+              <a:defRPr sz="2025" b="0">
+                <a:solidFill>
+                  <a:srgbClr val="102B3F"/>
+                </a:solidFill>
+              </a:defRPr>
+            </a:lvl8pPr>
+            <a:lvl9pPr>
+              <a:buNone/>
+              <a:defRPr sz="2025" b="0">
+                <a:solidFill>
+                  <a:srgbClr val="102B3F"/>
+                </a:solidFill>
+              </a:defRPr>
+            </a:lvl9pPr>
           </a:lstStyle>
           <a:p xmlns:a="http://schemas.openxmlformats.org/drawingml/2006/main">
             <a:pPr>
-              <a:defRPr sz="2025" b="0">
+              <a:buNone/>
+              <a:defRPr sz="1950" b="0">
                 <a:solidFill>
                   <a:srgbClr val="102B3F"/>
                 </a:solidFill>
               </a:defRPr>
             </a:pPr>
             <a:r>
-              <a:rPr sz="2025" b="0">
+              <a:rPr sz="1950" b="0">
                 <a:solidFill>
                   <a:srgbClr val="102B3F"/>
                 </a:solidFill>
               </a:rPr>
-              <a:t>11 predictors; hospital kept for generalization checks</a:t>
+              <a:t>Target num &gt; 0; 11 predictors. ID, hospital and target excluded</a:t>
             </a:r>
           </a:p>
         </p:txBody>
@@ -4493,9 +6271,82 @@
                 </a:solidFill>
               </a:defRPr>
             </a:defPPr>
+            <a:lvl1pPr>
+              <a:buNone/>
+              <a:defRPr sz="3150" b="1">
+                <a:solidFill>
+                  <a:srgbClr val="102B3F"/>
+                </a:solidFill>
+              </a:defRPr>
+            </a:lvl1pPr>
+            <a:lvl2pPr>
+              <a:buNone/>
+              <a:defRPr sz="3150" b="1">
+                <a:solidFill>
+                  <a:srgbClr val="102B3F"/>
+                </a:solidFill>
+              </a:defRPr>
+            </a:lvl2pPr>
+            <a:lvl3pPr>
+              <a:buNone/>
+              <a:defRPr sz="3150" b="1">
+                <a:solidFill>
+                  <a:srgbClr val="102B3F"/>
+                </a:solidFill>
+              </a:defRPr>
+            </a:lvl3pPr>
+            <a:lvl4pPr>
+              <a:buNone/>
+              <a:defRPr sz="3150" b="1">
+                <a:solidFill>
+                  <a:srgbClr val="102B3F"/>
+                </a:solidFill>
+              </a:defRPr>
+            </a:lvl4pPr>
+            <a:lvl5pPr>
+              <a:buNone/>
+              <a:defRPr sz="3150" b="1">
+                <a:solidFill>
+                  <a:srgbClr val="102B3F"/>
+                </a:solidFill>
+              </a:defRPr>
+            </a:lvl5pPr>
+            <a:lvl6pPr>
+              <a:buNone/>
+              <a:defRPr sz="3150" b="1">
+                <a:solidFill>
+                  <a:srgbClr val="102B3F"/>
+                </a:solidFill>
+              </a:defRPr>
+            </a:lvl6pPr>
+            <a:lvl7pPr>
+              <a:buNone/>
+              <a:defRPr sz="3150" b="1">
+                <a:solidFill>
+                  <a:srgbClr val="102B3F"/>
+                </a:solidFill>
+              </a:defRPr>
+            </a:lvl7pPr>
+            <a:lvl8pPr>
+              <a:buNone/>
+              <a:defRPr sz="3150" b="1">
+                <a:solidFill>
+                  <a:srgbClr val="102B3F"/>
+                </a:solidFill>
+              </a:defRPr>
+            </a:lvl8pPr>
+            <a:lvl9pPr>
+              <a:buNone/>
+              <a:defRPr sz="3150" b="1">
+                <a:solidFill>
+                  <a:srgbClr val="102B3F"/>
+                </a:solidFill>
+              </a:defRPr>
+            </a:lvl9pPr>
           </a:lstStyle>
           <a:p xmlns:a="http://schemas.openxmlformats.org/drawingml/2006/main">
             <a:pPr>
+              <a:buNone/>
               <a:defRPr sz="3150" b="1">
                 <a:solidFill>
                   <a:srgbClr val="102B3F"/>
@@ -4551,9 +6402,82 @@
                 </a:solidFill>
               </a:defRPr>
             </a:defPPr>
+            <a:lvl1pPr>
+              <a:buNone/>
+              <a:defRPr sz="1125" b="0">
+                <a:solidFill>
+                  <a:srgbClr val="526674"/>
+                </a:solidFill>
+              </a:defRPr>
+            </a:lvl1pPr>
+            <a:lvl2pPr>
+              <a:buNone/>
+              <a:defRPr sz="1125" b="0">
+                <a:solidFill>
+                  <a:srgbClr val="526674"/>
+                </a:solidFill>
+              </a:defRPr>
+            </a:lvl2pPr>
+            <a:lvl3pPr>
+              <a:buNone/>
+              <a:defRPr sz="1125" b="0">
+                <a:solidFill>
+                  <a:srgbClr val="526674"/>
+                </a:solidFill>
+              </a:defRPr>
+            </a:lvl3pPr>
+            <a:lvl4pPr>
+              <a:buNone/>
+              <a:defRPr sz="1125" b="0">
+                <a:solidFill>
+                  <a:srgbClr val="526674"/>
+                </a:solidFill>
+              </a:defRPr>
+            </a:lvl4pPr>
+            <a:lvl5pPr>
+              <a:buNone/>
+              <a:defRPr sz="1125" b="0">
+                <a:solidFill>
+                  <a:srgbClr val="526674"/>
+                </a:solidFill>
+              </a:defRPr>
+            </a:lvl5pPr>
+            <a:lvl6pPr>
+              <a:buNone/>
+              <a:defRPr sz="1125" b="0">
+                <a:solidFill>
+                  <a:srgbClr val="526674"/>
+                </a:solidFill>
+              </a:defRPr>
+            </a:lvl6pPr>
+            <a:lvl7pPr>
+              <a:buNone/>
+              <a:defRPr sz="1125" b="0">
+                <a:solidFill>
+                  <a:srgbClr val="526674"/>
+                </a:solidFill>
+              </a:defRPr>
+            </a:lvl7pPr>
+            <a:lvl8pPr>
+              <a:buNone/>
+              <a:defRPr sz="1125" b="0">
+                <a:solidFill>
+                  <a:srgbClr val="526674"/>
+                </a:solidFill>
+              </a:defRPr>
+            </a:lvl8pPr>
+            <a:lvl9pPr>
+              <a:buNone/>
+              <a:defRPr sz="1125" b="0">
+                <a:solidFill>
+                  <a:srgbClr val="526674"/>
+                </a:solidFill>
+              </a:defRPr>
+            </a:lvl9pPr>
           </a:lstStyle>
           <a:p xmlns:a="http://schemas.openxmlformats.org/drawingml/2006/main">
             <a:pPr>
+              <a:buNone/>
               <a:defRPr sz="1125" b="0">
                 <a:solidFill>
                   <a:srgbClr val="526674"/>
@@ -4603,28 +6527,101 @@
           <a:bodyPr xmlns:a="http://schemas.openxmlformats.org/drawingml/2006/main" anchor="ctr"/>
           <a:lstStyle xmlns:a="http://schemas.openxmlformats.org/drawingml/2006/main">
             <a:defPPr>
-              <a:defRPr sz="1050" b="0">
+              <a:defRPr sz="1125" b="0">
                 <a:solidFill>
                   <a:srgbClr val="526674"/>
                 </a:solidFill>
               </a:defRPr>
             </a:defPPr>
+            <a:lvl1pPr>
+              <a:buNone/>
+              <a:defRPr sz="1125" b="0">
+                <a:solidFill>
+                  <a:srgbClr val="526674"/>
+                </a:solidFill>
+              </a:defRPr>
+            </a:lvl1pPr>
+            <a:lvl2pPr>
+              <a:buNone/>
+              <a:defRPr sz="1125" b="0">
+                <a:solidFill>
+                  <a:srgbClr val="526674"/>
+                </a:solidFill>
+              </a:defRPr>
+            </a:lvl2pPr>
+            <a:lvl3pPr>
+              <a:buNone/>
+              <a:defRPr sz="1125" b="0">
+                <a:solidFill>
+                  <a:srgbClr val="526674"/>
+                </a:solidFill>
+              </a:defRPr>
+            </a:lvl3pPr>
+            <a:lvl4pPr>
+              <a:buNone/>
+              <a:defRPr sz="1125" b="0">
+                <a:solidFill>
+                  <a:srgbClr val="526674"/>
+                </a:solidFill>
+              </a:defRPr>
+            </a:lvl4pPr>
+            <a:lvl5pPr>
+              <a:buNone/>
+              <a:defRPr sz="1125" b="0">
+                <a:solidFill>
+                  <a:srgbClr val="526674"/>
+                </a:solidFill>
+              </a:defRPr>
+            </a:lvl5pPr>
+            <a:lvl6pPr>
+              <a:buNone/>
+              <a:defRPr sz="1125" b="0">
+                <a:solidFill>
+                  <a:srgbClr val="526674"/>
+                </a:solidFill>
+              </a:defRPr>
+            </a:lvl6pPr>
+            <a:lvl7pPr>
+              <a:buNone/>
+              <a:defRPr sz="1125" b="0">
+                <a:solidFill>
+                  <a:srgbClr val="526674"/>
+                </a:solidFill>
+              </a:defRPr>
+            </a:lvl7pPr>
+            <a:lvl8pPr>
+              <a:buNone/>
+              <a:defRPr sz="1125" b="0">
+                <a:solidFill>
+                  <a:srgbClr val="526674"/>
+                </a:solidFill>
+              </a:defRPr>
+            </a:lvl8pPr>
+            <a:lvl9pPr>
+              <a:buNone/>
+              <a:defRPr sz="1125" b="0">
+                <a:solidFill>
+                  <a:srgbClr val="526674"/>
+                </a:solidFill>
+              </a:defRPr>
+            </a:lvl9pPr>
           </a:lstStyle>
           <a:p xmlns:a="http://schemas.openxmlformats.org/drawingml/2006/main">
             <a:pPr>
-              <a:defRPr sz="1050" b="0">
+              <a:buNone/>
+              <a:defRPr sz="1125" b="0">
                 <a:solidFill>
                   <a:srgbClr val="526674"/>
                 </a:solidFill>
               </a:defRPr>
             </a:pPr>
             <a:r>
-              <a:rPr sz="1050" b="0">
+              <a:rPr sz="1125" b="0">
                 <a:solidFill>
                   <a:srgbClr val="526674"/>
                 </a:solidFill>
               </a:rPr>
-              <a:t>Source: artifacts/eda.json, generated from the supplied CSV</a:t>
+              <a:t>Counts after zero cleaning, N=918. Full missingness and provenance: report and README.</a:t>
             </a:r>
           </a:p>
         </p:txBody>
@@ -4634,7 +6631,7 @@
           <p:cNvPr id="4" name="Chart">
             <a:extLst xmlns:a="http://schemas.openxmlformats.org/drawingml/2006/main">
               <a:ext uri="{FF2B5EF4-FFF2-40B4-BE49-F238E27FC236}">
-                <a16:creationId xmlns:a16="http://schemas.microsoft.com/office/drawing/2014/main" id="{B9AF87E9-0545-4AD5-B784-3077A7F2DB76}"/>
+                <a16:creationId xmlns:a16="http://schemas.microsoft.com/office/drawing/2014/main" id="{5346BE01-38F2-4548-968F-E70A3280AC88}"/>
               </a:ext>
             </a:extLst>
           </p:cNvPr>
@@ -4647,7 +6644,7 @@
         </p:xfrm>
         <a:graphic xmlns:a="http://schemas.openxmlformats.org/drawingml/2006/main">
           <a:graphicData uri="http://schemas.openxmlformats.org/drawingml/2006/chart">
-            <c:chart xmlns:r="http://schemas.openxmlformats.org/officeDocument/2006/relationships" xmlns:c="http://schemas.openxmlformats.org/drawingml/2006/chart" r:id="Rf6c2c18fcb05479e"/>
+            <c:chart xmlns:r="http://schemas.openxmlformats.org/officeDocument/2006/relationships" xmlns:c="http://schemas.openxmlformats.org/drawingml/2006/chart" r:id="R4a050585bcd64bbb"/>
           </a:graphicData>
         </a:graphic>
       </p:graphicFrame>
@@ -4683,28 +6680,101 @@
           <a:bodyPr xmlns:a="http://schemas.openxmlformats.org/drawingml/2006/main" anchor="ctr"/>
           <a:lstStyle xmlns:a="http://schemas.openxmlformats.org/drawingml/2006/main">
             <a:defPPr>
-              <a:defRPr sz="1650" b="0">
+              <a:defRPr sz="1725" b="0">
                 <a:solidFill>
                   <a:srgbClr val="526674"/>
                 </a:solidFill>
               </a:defRPr>
             </a:defPPr>
+            <a:lvl1pPr>
+              <a:buNone/>
+              <a:defRPr sz="1725" b="0">
+                <a:solidFill>
+                  <a:srgbClr val="526674"/>
+                </a:solidFill>
+              </a:defRPr>
+            </a:lvl1pPr>
+            <a:lvl2pPr>
+              <a:buNone/>
+              <a:defRPr sz="1725" b="0">
+                <a:solidFill>
+                  <a:srgbClr val="526674"/>
+                </a:solidFill>
+              </a:defRPr>
+            </a:lvl2pPr>
+            <a:lvl3pPr>
+              <a:buNone/>
+              <a:defRPr sz="1725" b="0">
+                <a:solidFill>
+                  <a:srgbClr val="526674"/>
+                </a:solidFill>
+              </a:defRPr>
+            </a:lvl3pPr>
+            <a:lvl4pPr>
+              <a:buNone/>
+              <a:defRPr sz="1725" b="0">
+                <a:solidFill>
+                  <a:srgbClr val="526674"/>
+                </a:solidFill>
+              </a:defRPr>
+            </a:lvl4pPr>
+            <a:lvl5pPr>
+              <a:buNone/>
+              <a:defRPr sz="1725" b="0">
+                <a:solidFill>
+                  <a:srgbClr val="526674"/>
+                </a:solidFill>
+              </a:defRPr>
+            </a:lvl5pPr>
+            <a:lvl6pPr>
+              <a:buNone/>
+              <a:defRPr sz="1725" b="0">
+                <a:solidFill>
+                  <a:srgbClr val="526674"/>
+                </a:solidFill>
+              </a:defRPr>
+            </a:lvl6pPr>
+            <a:lvl7pPr>
+              <a:buNone/>
+              <a:defRPr sz="1725" b="0">
+                <a:solidFill>
+                  <a:srgbClr val="526674"/>
+                </a:solidFill>
+              </a:defRPr>
+            </a:lvl7pPr>
+            <a:lvl8pPr>
+              <a:buNone/>
+              <a:defRPr sz="1725" b="0">
+                <a:solidFill>
+                  <a:srgbClr val="526674"/>
+                </a:solidFill>
+              </a:defRPr>
+            </a:lvl8pPr>
+            <a:lvl9pPr>
+              <a:buNone/>
+              <a:defRPr sz="1725" b="0">
+                <a:solidFill>
+                  <a:srgbClr val="526674"/>
+                </a:solidFill>
+              </a:defRPr>
+            </a:lvl9pPr>
           </a:lstStyle>
           <a:p xmlns:a="http://schemas.openxmlformats.org/drawingml/2006/main">
             <a:pPr>
-              <a:defRPr sz="1650" b="0">
+              <a:buNone/>
+              <a:defRPr sz="1725" b="0">
                 <a:solidFill>
                   <a:srgbClr val="526674"/>
                 </a:solidFill>
               </a:defRPr>
             </a:pPr>
             <a:r>
-              <a:rPr sz="1650" b="0">
+              <a:rPr sz="1725" b="0">
                 <a:solidFill>
                   <a:srgbClr val="526674"/>
                 </a:solidFill>
               </a:rPr>
-              <a:t>Zeros in cholesterol and resting pressure are treated as missing.</a:t>
+              <a:t>Conventional preprocessing fits medians, modes, encoding and scaling inside each training fold.</a:t>
             </a:r>
           </a:p>
         </p:txBody>
@@ -4776,9 +6846,82 @@
                 </a:solidFill>
               </a:defRPr>
             </a:defPPr>
+            <a:lvl1pPr>
+              <a:buNone/>
+              <a:defRPr sz="3150" b="1">
+                <a:solidFill>
+                  <a:srgbClr val="102B3F"/>
+                </a:solidFill>
+              </a:defRPr>
+            </a:lvl1pPr>
+            <a:lvl2pPr>
+              <a:buNone/>
+              <a:defRPr sz="3150" b="1">
+                <a:solidFill>
+                  <a:srgbClr val="102B3F"/>
+                </a:solidFill>
+              </a:defRPr>
+            </a:lvl2pPr>
+            <a:lvl3pPr>
+              <a:buNone/>
+              <a:defRPr sz="3150" b="1">
+                <a:solidFill>
+                  <a:srgbClr val="102B3F"/>
+                </a:solidFill>
+              </a:defRPr>
+            </a:lvl3pPr>
+            <a:lvl4pPr>
+              <a:buNone/>
+              <a:defRPr sz="3150" b="1">
+                <a:solidFill>
+                  <a:srgbClr val="102B3F"/>
+                </a:solidFill>
+              </a:defRPr>
+            </a:lvl4pPr>
+            <a:lvl5pPr>
+              <a:buNone/>
+              <a:defRPr sz="3150" b="1">
+                <a:solidFill>
+                  <a:srgbClr val="102B3F"/>
+                </a:solidFill>
+              </a:defRPr>
+            </a:lvl5pPr>
+            <a:lvl6pPr>
+              <a:buNone/>
+              <a:defRPr sz="3150" b="1">
+                <a:solidFill>
+                  <a:srgbClr val="102B3F"/>
+                </a:solidFill>
+              </a:defRPr>
+            </a:lvl6pPr>
+            <a:lvl7pPr>
+              <a:buNone/>
+              <a:defRPr sz="3150" b="1">
+                <a:solidFill>
+                  <a:srgbClr val="102B3F"/>
+                </a:solidFill>
+              </a:defRPr>
+            </a:lvl7pPr>
+            <a:lvl8pPr>
+              <a:buNone/>
+              <a:defRPr sz="3150" b="1">
+                <a:solidFill>
+                  <a:srgbClr val="102B3F"/>
+                </a:solidFill>
+              </a:defRPr>
+            </a:lvl8pPr>
+            <a:lvl9pPr>
+              <a:buNone/>
+              <a:defRPr sz="3150" b="1">
+                <a:solidFill>
+                  <a:srgbClr val="102B3F"/>
+                </a:solidFill>
+              </a:defRPr>
+            </a:lvl9pPr>
           </a:lstStyle>
           <a:p xmlns:a="http://schemas.openxmlformats.org/drawingml/2006/main">
             <a:pPr>
+              <a:buNone/>
               <a:defRPr sz="3150" b="1">
                 <a:solidFill>
                   <a:srgbClr val="102B3F"/>
@@ -4791,7 +6934,7 @@
                   <a:srgbClr val="102B3F"/>
                 </a:solidFill>
               </a:rPr>
-              <a:t>Leakage-controlled experiment</a:t>
+              <a:t>Selection and retrospective evaluation</a:t>
             </a:r>
           </a:p>
         </p:txBody>
@@ -4834,9 +6977,82 @@
                 </a:solidFill>
               </a:defRPr>
             </a:defPPr>
+            <a:lvl1pPr>
+              <a:buNone/>
+              <a:defRPr sz="1125" b="0">
+                <a:solidFill>
+                  <a:srgbClr val="526674"/>
+                </a:solidFill>
+              </a:defRPr>
+            </a:lvl1pPr>
+            <a:lvl2pPr>
+              <a:buNone/>
+              <a:defRPr sz="1125" b="0">
+                <a:solidFill>
+                  <a:srgbClr val="526674"/>
+                </a:solidFill>
+              </a:defRPr>
+            </a:lvl2pPr>
+            <a:lvl3pPr>
+              <a:buNone/>
+              <a:defRPr sz="1125" b="0">
+                <a:solidFill>
+                  <a:srgbClr val="526674"/>
+                </a:solidFill>
+              </a:defRPr>
+            </a:lvl3pPr>
+            <a:lvl4pPr>
+              <a:buNone/>
+              <a:defRPr sz="1125" b="0">
+                <a:solidFill>
+                  <a:srgbClr val="526674"/>
+                </a:solidFill>
+              </a:defRPr>
+            </a:lvl4pPr>
+            <a:lvl5pPr>
+              <a:buNone/>
+              <a:defRPr sz="1125" b="0">
+                <a:solidFill>
+                  <a:srgbClr val="526674"/>
+                </a:solidFill>
+              </a:defRPr>
+            </a:lvl5pPr>
+            <a:lvl6pPr>
+              <a:buNone/>
+              <a:defRPr sz="1125" b="0">
+                <a:solidFill>
+                  <a:srgbClr val="526674"/>
+                </a:solidFill>
+              </a:defRPr>
+            </a:lvl6pPr>
+            <a:lvl7pPr>
+              <a:buNone/>
+              <a:defRPr sz="1125" b="0">
+                <a:solidFill>
+                  <a:srgbClr val="526674"/>
+                </a:solidFill>
+              </a:defRPr>
+            </a:lvl7pPr>
+            <a:lvl8pPr>
+              <a:buNone/>
+              <a:defRPr sz="1125" b="0">
+                <a:solidFill>
+                  <a:srgbClr val="526674"/>
+                </a:solidFill>
+              </a:defRPr>
+            </a:lvl8pPr>
+            <a:lvl9pPr>
+              <a:buNone/>
+              <a:defRPr sz="1125" b="0">
+                <a:solidFill>
+                  <a:srgbClr val="526674"/>
+                </a:solidFill>
+              </a:defRPr>
+            </a:lvl9pPr>
           </a:lstStyle>
           <a:p xmlns:a="http://schemas.openxmlformats.org/drawingml/2006/main">
             <a:pPr>
+              <a:buNone/>
               <a:defRPr sz="1125" b="0">
                 <a:solidFill>
                   <a:srgbClr val="526674"/>
@@ -4892,9 +7108,82 @@
                 </a:solidFill>
               </a:defRPr>
             </a:defPPr>
+            <a:lvl1pPr>
+              <a:buNone/>
+              <a:defRPr sz="1950" b="1">
+                <a:solidFill>
+                  <a:srgbClr val="087F78"/>
+                </a:solidFill>
+              </a:defRPr>
+            </a:lvl1pPr>
+            <a:lvl2pPr>
+              <a:buNone/>
+              <a:defRPr sz="1950" b="1">
+                <a:solidFill>
+                  <a:srgbClr val="087F78"/>
+                </a:solidFill>
+              </a:defRPr>
+            </a:lvl2pPr>
+            <a:lvl3pPr>
+              <a:buNone/>
+              <a:defRPr sz="1950" b="1">
+                <a:solidFill>
+                  <a:srgbClr val="087F78"/>
+                </a:solidFill>
+              </a:defRPr>
+            </a:lvl3pPr>
+            <a:lvl4pPr>
+              <a:buNone/>
+              <a:defRPr sz="1950" b="1">
+                <a:solidFill>
+                  <a:srgbClr val="087F78"/>
+                </a:solidFill>
+              </a:defRPr>
+            </a:lvl4pPr>
+            <a:lvl5pPr>
+              <a:buNone/>
+              <a:defRPr sz="1950" b="1">
+                <a:solidFill>
+                  <a:srgbClr val="087F78"/>
+                </a:solidFill>
+              </a:defRPr>
+            </a:lvl5pPr>
+            <a:lvl6pPr>
+              <a:buNone/>
+              <a:defRPr sz="1950" b="1">
+                <a:solidFill>
+                  <a:srgbClr val="087F78"/>
+                </a:solidFill>
+              </a:defRPr>
+            </a:lvl6pPr>
+            <a:lvl7pPr>
+              <a:buNone/>
+              <a:defRPr sz="1950" b="1">
+                <a:solidFill>
+                  <a:srgbClr val="087F78"/>
+                </a:solidFill>
+              </a:defRPr>
+            </a:lvl7pPr>
+            <a:lvl8pPr>
+              <a:buNone/>
+              <a:defRPr sz="1950" b="1">
+                <a:solidFill>
+                  <a:srgbClr val="087F78"/>
+                </a:solidFill>
+              </a:defRPr>
+            </a:lvl8pPr>
+            <a:lvl9pPr>
+              <a:buNone/>
+              <a:defRPr sz="1950" b="1">
+                <a:solidFill>
+                  <a:srgbClr val="087F78"/>
+                </a:solidFill>
+              </a:defRPr>
+            </a:lvl9pPr>
           </a:lstStyle>
           <a:p xmlns:a="http://schemas.openxmlformats.org/drawingml/2006/main">
             <a:pPr>
+              <a:buNone/>
               <a:defRPr sz="1950" b="1">
                 <a:solidFill>
                   <a:srgbClr val="087F78"/>
@@ -4907,7 +7196,7 @@
                   <a:srgbClr val="087F78"/>
                 </a:solidFill>
               </a:rPr>
-              <a:t>Remove duplicate records before splitting</a:t>
+              <a:t>Historical split: D=734, T=184. T was already inspected</a:t>
             </a:r>
           </a:p>
         </p:txBody>
@@ -4950,9 +7239,82 @@
                 </a:solidFill>
               </a:defRPr>
             </a:defPPr>
+            <a:lvl1pPr>
+              <a:buNone/>
+              <a:defRPr sz="1950" b="0">
+                <a:solidFill>
+                  <a:srgbClr val="102B3F"/>
+                </a:solidFill>
+              </a:defRPr>
+            </a:lvl1pPr>
+            <a:lvl2pPr>
+              <a:buNone/>
+              <a:defRPr sz="1950" b="0">
+                <a:solidFill>
+                  <a:srgbClr val="102B3F"/>
+                </a:solidFill>
+              </a:defRPr>
+            </a:lvl2pPr>
+            <a:lvl3pPr>
+              <a:buNone/>
+              <a:defRPr sz="1950" b="0">
+                <a:solidFill>
+                  <a:srgbClr val="102B3F"/>
+                </a:solidFill>
+              </a:defRPr>
+            </a:lvl3pPr>
+            <a:lvl4pPr>
+              <a:buNone/>
+              <a:defRPr sz="1950" b="0">
+                <a:solidFill>
+                  <a:srgbClr val="102B3F"/>
+                </a:solidFill>
+              </a:defRPr>
+            </a:lvl4pPr>
+            <a:lvl5pPr>
+              <a:buNone/>
+              <a:defRPr sz="1950" b="0">
+                <a:solidFill>
+                  <a:srgbClr val="102B3F"/>
+                </a:solidFill>
+              </a:defRPr>
+            </a:lvl5pPr>
+            <a:lvl6pPr>
+              <a:buNone/>
+              <a:defRPr sz="1950" b="0">
+                <a:solidFill>
+                  <a:srgbClr val="102B3F"/>
+                </a:solidFill>
+              </a:defRPr>
+            </a:lvl6pPr>
+            <a:lvl7pPr>
+              <a:buNone/>
+              <a:defRPr sz="1950" b="0">
+                <a:solidFill>
+                  <a:srgbClr val="102B3F"/>
+                </a:solidFill>
+              </a:defRPr>
+            </a:lvl7pPr>
+            <a:lvl8pPr>
+              <a:buNone/>
+              <a:defRPr sz="1950" b="0">
+                <a:solidFill>
+                  <a:srgbClr val="102B3F"/>
+                </a:solidFill>
+              </a:defRPr>
+            </a:lvl8pPr>
+            <a:lvl9pPr>
+              <a:buNone/>
+              <a:defRPr sz="1950" b="0">
+                <a:solidFill>
+                  <a:srgbClr val="102B3F"/>
+                </a:solidFill>
+              </a:defRPr>
+            </a:lvl9pPr>
           </a:lstStyle>
           <a:p xmlns:a="http://schemas.openxmlformats.org/drawingml/2006/main">
             <a:pPr>
+              <a:buNone/>
               <a:defRPr sz="1950" b="0">
                 <a:solidFill>
                   <a:srgbClr val="102B3F"/>
@@ -4965,7 +7327,7 @@
                   <a:srgbClr val="102B3F"/>
                 </a:solidFill>
               </a:rPr>
-              <a:t>734 train / 184 test, stratified by binary label</a:t>
+              <a:t>D splits into S=550 selection rows and C=184 cutoff rows</a:t>
             </a:r>
           </a:p>
         </p:txBody>
@@ -5008,9 +7370,82 @@
                 </a:solidFill>
               </a:defRPr>
             </a:defPPr>
+            <a:lvl1pPr>
+              <a:buNone/>
+              <a:defRPr sz="1950" b="0">
+                <a:solidFill>
+                  <a:srgbClr val="102B3F"/>
+                </a:solidFill>
+              </a:defRPr>
+            </a:lvl1pPr>
+            <a:lvl2pPr>
+              <a:buNone/>
+              <a:defRPr sz="1950" b="0">
+                <a:solidFill>
+                  <a:srgbClr val="102B3F"/>
+                </a:solidFill>
+              </a:defRPr>
+            </a:lvl2pPr>
+            <a:lvl3pPr>
+              <a:buNone/>
+              <a:defRPr sz="1950" b="0">
+                <a:solidFill>
+                  <a:srgbClr val="102B3F"/>
+                </a:solidFill>
+              </a:defRPr>
+            </a:lvl3pPr>
+            <a:lvl4pPr>
+              <a:buNone/>
+              <a:defRPr sz="1950" b="0">
+                <a:solidFill>
+                  <a:srgbClr val="102B3F"/>
+                </a:solidFill>
+              </a:defRPr>
+            </a:lvl4pPr>
+            <a:lvl5pPr>
+              <a:buNone/>
+              <a:defRPr sz="1950" b="0">
+                <a:solidFill>
+                  <a:srgbClr val="102B3F"/>
+                </a:solidFill>
+              </a:defRPr>
+            </a:lvl5pPr>
+            <a:lvl6pPr>
+              <a:buNone/>
+              <a:defRPr sz="1950" b="0">
+                <a:solidFill>
+                  <a:srgbClr val="102B3F"/>
+                </a:solidFill>
+              </a:defRPr>
+            </a:lvl6pPr>
+            <a:lvl7pPr>
+              <a:buNone/>
+              <a:defRPr sz="1950" b="0">
+                <a:solidFill>
+                  <a:srgbClr val="102B3F"/>
+                </a:solidFill>
+              </a:defRPr>
+            </a:lvl7pPr>
+            <a:lvl8pPr>
+              <a:buNone/>
+              <a:defRPr sz="1950" b="0">
+                <a:solidFill>
+                  <a:srgbClr val="102B3F"/>
+                </a:solidFill>
+              </a:defRPr>
+            </a:lvl8pPr>
+            <a:lvl9pPr>
+              <a:buNone/>
+              <a:defRPr sz="1950" b="0">
+                <a:solidFill>
+                  <a:srgbClr val="102B3F"/>
+                </a:solidFill>
+              </a:defRPr>
+            </a:lvl9pPr>
           </a:lstStyle>
           <a:p xmlns:a="http://schemas.openxmlformats.org/drawingml/2006/main">
             <a:pPr>
+              <a:buNone/>
               <a:defRPr sz="1950" b="0">
                 <a:solidFill>
                   <a:srgbClr val="102B3F"/>
@@ -5023,7 +7458,7 @@
                   <a:srgbClr val="102B3F"/>
                 </a:solidFill>
               </a:rPr>
-              <a:t>Fit imputation, encoding and scaling inside each CV fold</a:t>
+              <a:t>On S: five outer folds, three inner folds. Preprocessing stays local</a:t>
             </a:r>
           </a:p>
         </p:txBody>
@@ -5066,9 +7501,82 @@
                 </a:solidFill>
               </a:defRPr>
             </a:defPPr>
+            <a:lvl1pPr>
+              <a:buNone/>
+              <a:defRPr sz="1950" b="0">
+                <a:solidFill>
+                  <a:srgbClr val="102B3F"/>
+                </a:solidFill>
+              </a:defRPr>
+            </a:lvl1pPr>
+            <a:lvl2pPr>
+              <a:buNone/>
+              <a:defRPr sz="1950" b="0">
+                <a:solidFill>
+                  <a:srgbClr val="102B3F"/>
+                </a:solidFill>
+              </a:defRPr>
+            </a:lvl2pPr>
+            <a:lvl3pPr>
+              <a:buNone/>
+              <a:defRPr sz="1950" b="0">
+                <a:solidFill>
+                  <a:srgbClr val="102B3F"/>
+                </a:solidFill>
+              </a:defRPr>
+            </a:lvl3pPr>
+            <a:lvl4pPr>
+              <a:buNone/>
+              <a:defRPr sz="1950" b="0">
+                <a:solidFill>
+                  <a:srgbClr val="102B3F"/>
+                </a:solidFill>
+              </a:defRPr>
+            </a:lvl4pPr>
+            <a:lvl5pPr>
+              <a:buNone/>
+              <a:defRPr sz="1950" b="0">
+                <a:solidFill>
+                  <a:srgbClr val="102B3F"/>
+                </a:solidFill>
+              </a:defRPr>
+            </a:lvl5pPr>
+            <a:lvl6pPr>
+              <a:buNone/>
+              <a:defRPr sz="1950" b="0">
+                <a:solidFill>
+                  <a:srgbClr val="102B3F"/>
+                </a:solidFill>
+              </a:defRPr>
+            </a:lvl6pPr>
+            <a:lvl7pPr>
+              <a:buNone/>
+              <a:defRPr sz="1950" b="0">
+                <a:solidFill>
+                  <a:srgbClr val="102B3F"/>
+                </a:solidFill>
+              </a:defRPr>
+            </a:lvl7pPr>
+            <a:lvl8pPr>
+              <a:buNone/>
+              <a:defRPr sz="1950" b="0">
+                <a:solidFill>
+                  <a:srgbClr val="102B3F"/>
+                </a:solidFill>
+              </a:defRPr>
+            </a:lvl8pPr>
+            <a:lvl9pPr>
+              <a:buNone/>
+              <a:defRPr sz="1950" b="0">
+                <a:solidFill>
+                  <a:srgbClr val="102B3F"/>
+                </a:solidFill>
+              </a:defRPr>
+            </a:lvl9pPr>
           </a:lstStyle>
           <a:p xmlns:a="http://schemas.openxmlformats.org/drawingml/2006/main">
             <a:pPr>
+              <a:buNone/>
               <a:defRPr sz="1950" b="0">
                 <a:solidFill>
                   <a:srgbClr val="102B3F"/>
@@ -5081,7 +7589,7 @@
                   <a:srgbClr val="102B3F"/>
                 </a:solidFill>
               </a:rPr>
-              <a:t>Tune four model families with five-fold CV on train only</a:t>
+              <a:t>Frozen S-fitted models predict C; choose cutoffs by F1. No S+C refit</a:t>
             </a:r>
           </a:p>
         </p:txBody>
@@ -5124,9 +7632,82 @@
                 </a:solidFill>
               </a:defRPr>
             </a:defPPr>
+            <a:lvl1pPr>
+              <a:buNone/>
+              <a:defRPr sz="1950" b="0">
+                <a:solidFill>
+                  <a:srgbClr val="102B3F"/>
+                </a:solidFill>
+              </a:defRPr>
+            </a:lvl1pPr>
+            <a:lvl2pPr>
+              <a:buNone/>
+              <a:defRPr sz="1950" b="0">
+                <a:solidFill>
+                  <a:srgbClr val="102B3F"/>
+                </a:solidFill>
+              </a:defRPr>
+            </a:lvl2pPr>
+            <a:lvl3pPr>
+              <a:buNone/>
+              <a:defRPr sz="1950" b="0">
+                <a:solidFill>
+                  <a:srgbClr val="102B3F"/>
+                </a:solidFill>
+              </a:defRPr>
+            </a:lvl3pPr>
+            <a:lvl4pPr>
+              <a:buNone/>
+              <a:defRPr sz="1950" b="0">
+                <a:solidFill>
+                  <a:srgbClr val="102B3F"/>
+                </a:solidFill>
+              </a:defRPr>
+            </a:lvl4pPr>
+            <a:lvl5pPr>
+              <a:buNone/>
+              <a:defRPr sz="1950" b="0">
+                <a:solidFill>
+                  <a:srgbClr val="102B3F"/>
+                </a:solidFill>
+              </a:defRPr>
+            </a:lvl5pPr>
+            <a:lvl6pPr>
+              <a:buNone/>
+              <a:defRPr sz="1950" b="0">
+                <a:solidFill>
+                  <a:srgbClr val="102B3F"/>
+                </a:solidFill>
+              </a:defRPr>
+            </a:lvl6pPr>
+            <a:lvl7pPr>
+              <a:buNone/>
+              <a:defRPr sz="1950" b="0">
+                <a:solidFill>
+                  <a:srgbClr val="102B3F"/>
+                </a:solidFill>
+              </a:defRPr>
+            </a:lvl7pPr>
+            <a:lvl8pPr>
+              <a:buNone/>
+              <a:defRPr sz="1950" b="0">
+                <a:solidFill>
+                  <a:srgbClr val="102B3F"/>
+                </a:solidFill>
+              </a:defRPr>
+            </a:lvl8pPr>
+            <a:lvl9pPr>
+              <a:buNone/>
+              <a:defRPr sz="1950" b="0">
+                <a:solidFill>
+                  <a:srgbClr val="102B3F"/>
+                </a:solidFill>
+              </a:defRPr>
+            </a:lvl9pPr>
           </a:lstStyle>
           <a:p xmlns:a="http://schemas.openxmlformats.org/drawingml/2006/main">
             <a:pPr>
+              <a:buNone/>
               <a:defRPr sz="1950" b="0">
                 <a:solidFill>
                   <a:srgbClr val="102B3F"/>
@@ -5139,7 +7720,7 @@
                   <a:srgbClr val="102B3F"/>
                 </a:solidFill>
               </a:rPr>
-              <a:t>Choose cutoff from training predictions; test once</a:t>
+              <a:t>D-only hospital checks repeat family and cutoff selection locally</a:t>
             </a:r>
           </a:p>
         </p:txBody>
@@ -5211,9 +7792,82 @@
                 </a:solidFill>
               </a:defRPr>
             </a:defPPr>
+            <a:lvl1pPr>
+              <a:buNone/>
+              <a:defRPr sz="3150" b="1">
+                <a:solidFill>
+                  <a:srgbClr val="102B3F"/>
+                </a:solidFill>
+              </a:defRPr>
+            </a:lvl1pPr>
+            <a:lvl2pPr>
+              <a:buNone/>
+              <a:defRPr sz="3150" b="1">
+                <a:solidFill>
+                  <a:srgbClr val="102B3F"/>
+                </a:solidFill>
+              </a:defRPr>
+            </a:lvl2pPr>
+            <a:lvl3pPr>
+              <a:buNone/>
+              <a:defRPr sz="3150" b="1">
+                <a:solidFill>
+                  <a:srgbClr val="102B3F"/>
+                </a:solidFill>
+              </a:defRPr>
+            </a:lvl3pPr>
+            <a:lvl4pPr>
+              <a:buNone/>
+              <a:defRPr sz="3150" b="1">
+                <a:solidFill>
+                  <a:srgbClr val="102B3F"/>
+                </a:solidFill>
+              </a:defRPr>
+            </a:lvl4pPr>
+            <a:lvl5pPr>
+              <a:buNone/>
+              <a:defRPr sz="3150" b="1">
+                <a:solidFill>
+                  <a:srgbClr val="102B3F"/>
+                </a:solidFill>
+              </a:defRPr>
+            </a:lvl5pPr>
+            <a:lvl6pPr>
+              <a:buNone/>
+              <a:defRPr sz="3150" b="1">
+                <a:solidFill>
+                  <a:srgbClr val="102B3F"/>
+                </a:solidFill>
+              </a:defRPr>
+            </a:lvl6pPr>
+            <a:lvl7pPr>
+              <a:buNone/>
+              <a:defRPr sz="3150" b="1">
+                <a:solidFill>
+                  <a:srgbClr val="102B3F"/>
+                </a:solidFill>
+              </a:defRPr>
+            </a:lvl7pPr>
+            <a:lvl8pPr>
+              <a:buNone/>
+              <a:defRPr sz="3150" b="1">
+                <a:solidFill>
+                  <a:srgbClr val="102B3F"/>
+                </a:solidFill>
+              </a:defRPr>
+            </a:lvl8pPr>
+            <a:lvl9pPr>
+              <a:buNone/>
+              <a:defRPr sz="3150" b="1">
+                <a:solidFill>
+                  <a:srgbClr val="102B3F"/>
+                </a:solidFill>
+              </a:defRPr>
+            </a:lvl9pPr>
           </a:lstStyle>
           <a:p xmlns:a="http://schemas.openxmlformats.org/drawingml/2006/main">
             <a:pPr>
+              <a:buNone/>
               <a:defRPr sz="3150" b="1">
                 <a:solidFill>
                   <a:srgbClr val="102B3F"/>
@@ -5226,7 +7880,7 @@
                   <a:srgbClr val="102B3F"/>
                 </a:solidFill>
               </a:rPr>
-              <a:t>Cross-validation F1 (%)</a:t>
+              <a:t>Nested cross-validation F1 (%)</a:t>
             </a:r>
           </a:p>
         </p:txBody>
@@ -5269,9 +7923,82 @@
                 </a:solidFill>
               </a:defRPr>
             </a:defPPr>
+            <a:lvl1pPr>
+              <a:buNone/>
+              <a:defRPr sz="1125" b="0">
+                <a:solidFill>
+                  <a:srgbClr val="526674"/>
+                </a:solidFill>
+              </a:defRPr>
+            </a:lvl1pPr>
+            <a:lvl2pPr>
+              <a:buNone/>
+              <a:defRPr sz="1125" b="0">
+                <a:solidFill>
+                  <a:srgbClr val="526674"/>
+                </a:solidFill>
+              </a:defRPr>
+            </a:lvl2pPr>
+            <a:lvl3pPr>
+              <a:buNone/>
+              <a:defRPr sz="1125" b="0">
+                <a:solidFill>
+                  <a:srgbClr val="526674"/>
+                </a:solidFill>
+              </a:defRPr>
+            </a:lvl3pPr>
+            <a:lvl4pPr>
+              <a:buNone/>
+              <a:defRPr sz="1125" b="0">
+                <a:solidFill>
+                  <a:srgbClr val="526674"/>
+                </a:solidFill>
+              </a:defRPr>
+            </a:lvl4pPr>
+            <a:lvl5pPr>
+              <a:buNone/>
+              <a:defRPr sz="1125" b="0">
+                <a:solidFill>
+                  <a:srgbClr val="526674"/>
+                </a:solidFill>
+              </a:defRPr>
+            </a:lvl5pPr>
+            <a:lvl6pPr>
+              <a:buNone/>
+              <a:defRPr sz="1125" b="0">
+                <a:solidFill>
+                  <a:srgbClr val="526674"/>
+                </a:solidFill>
+              </a:defRPr>
+            </a:lvl6pPr>
+            <a:lvl7pPr>
+              <a:buNone/>
+              <a:defRPr sz="1125" b="0">
+                <a:solidFill>
+                  <a:srgbClr val="526674"/>
+                </a:solidFill>
+              </a:defRPr>
+            </a:lvl7pPr>
+            <a:lvl8pPr>
+              <a:buNone/>
+              <a:defRPr sz="1125" b="0">
+                <a:solidFill>
+                  <a:srgbClr val="526674"/>
+                </a:solidFill>
+              </a:defRPr>
+            </a:lvl8pPr>
+            <a:lvl9pPr>
+              <a:buNone/>
+              <a:defRPr sz="1125" b="0">
+                <a:solidFill>
+                  <a:srgbClr val="526674"/>
+                </a:solidFill>
+              </a:defRPr>
+            </a:lvl9pPr>
           </a:lstStyle>
           <a:p xmlns:a="http://schemas.openxmlformats.org/drawingml/2006/main">
             <a:pPr>
+              <a:buNone/>
               <a:defRPr sz="1125" b="0">
                 <a:solidFill>
                   <a:srgbClr val="526674"/>
@@ -5321,28 +8048,101 @@
           <a:bodyPr xmlns:a="http://schemas.openxmlformats.org/drawingml/2006/main" anchor="ctr"/>
           <a:lstStyle xmlns:a="http://schemas.openxmlformats.org/drawingml/2006/main">
             <a:defPPr>
-              <a:defRPr sz="1050" b="0">
+              <a:defRPr sz="1125" b="0">
                 <a:solidFill>
                   <a:srgbClr val="526674"/>
                 </a:solidFill>
               </a:defRPr>
             </a:defPPr>
+            <a:lvl1pPr>
+              <a:buNone/>
+              <a:defRPr sz="1125" b="0">
+                <a:solidFill>
+                  <a:srgbClr val="526674"/>
+                </a:solidFill>
+              </a:defRPr>
+            </a:lvl1pPr>
+            <a:lvl2pPr>
+              <a:buNone/>
+              <a:defRPr sz="1125" b="0">
+                <a:solidFill>
+                  <a:srgbClr val="526674"/>
+                </a:solidFill>
+              </a:defRPr>
+            </a:lvl2pPr>
+            <a:lvl3pPr>
+              <a:buNone/>
+              <a:defRPr sz="1125" b="0">
+                <a:solidFill>
+                  <a:srgbClr val="526674"/>
+                </a:solidFill>
+              </a:defRPr>
+            </a:lvl3pPr>
+            <a:lvl4pPr>
+              <a:buNone/>
+              <a:defRPr sz="1125" b="0">
+                <a:solidFill>
+                  <a:srgbClr val="526674"/>
+                </a:solidFill>
+              </a:defRPr>
+            </a:lvl4pPr>
+            <a:lvl5pPr>
+              <a:buNone/>
+              <a:defRPr sz="1125" b="0">
+                <a:solidFill>
+                  <a:srgbClr val="526674"/>
+                </a:solidFill>
+              </a:defRPr>
+            </a:lvl5pPr>
+            <a:lvl6pPr>
+              <a:buNone/>
+              <a:defRPr sz="1125" b="0">
+                <a:solidFill>
+                  <a:srgbClr val="526674"/>
+                </a:solidFill>
+              </a:defRPr>
+            </a:lvl6pPr>
+            <a:lvl7pPr>
+              <a:buNone/>
+              <a:defRPr sz="1125" b="0">
+                <a:solidFill>
+                  <a:srgbClr val="526674"/>
+                </a:solidFill>
+              </a:defRPr>
+            </a:lvl7pPr>
+            <a:lvl8pPr>
+              <a:buNone/>
+              <a:defRPr sz="1125" b="0">
+                <a:solidFill>
+                  <a:srgbClr val="526674"/>
+                </a:solidFill>
+              </a:defRPr>
+            </a:lvl8pPr>
+            <a:lvl9pPr>
+              <a:buNone/>
+              <a:defRPr sz="1125" b="0">
+                <a:solidFill>
+                  <a:srgbClr val="526674"/>
+                </a:solidFill>
+              </a:defRPr>
+            </a:lvl9pPr>
           </a:lstStyle>
           <a:p xmlns:a="http://schemas.openxmlformats.org/drawingml/2006/main">
             <a:pPr>
-              <a:defRPr sz="1050" b="0">
+              <a:buNone/>
+              <a:defRPr sz="1125" b="0">
                 <a:solidFill>
                   <a:srgbClr val="526674"/>
                 </a:solidFill>
               </a:defRPr>
             </a:pPr>
             <a:r>
-              <a:rPr sz="1050" b="0">
+              <a:rPr sz="1125" b="0">
                 <a:solidFill>
                   <a:srgbClr val="526674"/>
                 </a:solidFill>
               </a:rPr>
-              <a:t>Mean five-fold F1 on training records; selected model uses highest F1</a:t>
+              <a:t>LR = Logistic Regression. HGB = Histogram Gradient Boosting. Five outer / three inner folds on S.</a:t>
             </a:r>
           </a:p>
         </p:txBody>
@@ -5352,7 +8152,7 @@
           <p:cNvPr id="4" name="Chart">
             <a:extLst xmlns:a="http://schemas.openxmlformats.org/drawingml/2006/main">
               <a:ext uri="{FF2B5EF4-FFF2-40B4-BE49-F238E27FC236}">
-                <a16:creationId xmlns:a16="http://schemas.microsoft.com/office/drawing/2014/main" id="{FF4610A0-D182-4448-89D7-EB11734C96AB}"/>
+                <a16:creationId xmlns:a16="http://schemas.microsoft.com/office/drawing/2014/main" id="{3BFCCB7C-6196-45EC-8A6E-F0E5ADF1098E}"/>
               </a:ext>
             </a:extLst>
           </p:cNvPr>
@@ -5365,7 +8165,7 @@
         </p:xfrm>
         <a:graphic xmlns:a="http://schemas.openxmlformats.org/drawingml/2006/main">
           <a:graphicData uri="http://schemas.openxmlformats.org/drawingml/2006/chart">
-            <c:chart xmlns:r="http://schemas.openxmlformats.org/officeDocument/2006/relationships" xmlns:c="http://schemas.openxmlformats.org/drawingml/2006/chart" r:id="Rd3154576da174067"/>
+            <c:chart xmlns:r="http://schemas.openxmlformats.org/officeDocument/2006/relationships" xmlns:c="http://schemas.openxmlformats.org/drawingml/2006/chart" r:id="Raba2719147db4c39"/>
           </a:graphicData>
         </a:graphic>
       </p:graphicFrame>
@@ -5407,9 +8207,82 @@
                 </a:solidFill>
               </a:defRPr>
             </a:defPPr>
+            <a:lvl1pPr>
+              <a:buNone/>
+              <a:defRPr sz="1725" b="0">
+                <a:solidFill>
+                  <a:srgbClr val="526674"/>
+                </a:solidFill>
+              </a:defRPr>
+            </a:lvl1pPr>
+            <a:lvl2pPr>
+              <a:buNone/>
+              <a:defRPr sz="1725" b="0">
+                <a:solidFill>
+                  <a:srgbClr val="526674"/>
+                </a:solidFill>
+              </a:defRPr>
+            </a:lvl2pPr>
+            <a:lvl3pPr>
+              <a:buNone/>
+              <a:defRPr sz="1725" b="0">
+                <a:solidFill>
+                  <a:srgbClr val="526674"/>
+                </a:solidFill>
+              </a:defRPr>
+            </a:lvl3pPr>
+            <a:lvl4pPr>
+              <a:buNone/>
+              <a:defRPr sz="1725" b="0">
+                <a:solidFill>
+                  <a:srgbClr val="526674"/>
+                </a:solidFill>
+              </a:defRPr>
+            </a:lvl4pPr>
+            <a:lvl5pPr>
+              <a:buNone/>
+              <a:defRPr sz="1725" b="0">
+                <a:solidFill>
+                  <a:srgbClr val="526674"/>
+                </a:solidFill>
+              </a:defRPr>
+            </a:lvl5pPr>
+            <a:lvl6pPr>
+              <a:buNone/>
+              <a:defRPr sz="1725" b="0">
+                <a:solidFill>
+                  <a:srgbClr val="526674"/>
+                </a:solidFill>
+              </a:defRPr>
+            </a:lvl6pPr>
+            <a:lvl7pPr>
+              <a:buNone/>
+              <a:defRPr sz="1725" b="0">
+                <a:solidFill>
+                  <a:srgbClr val="526674"/>
+                </a:solidFill>
+              </a:defRPr>
+            </a:lvl7pPr>
+            <a:lvl8pPr>
+              <a:buNone/>
+              <a:defRPr sz="1725" b="0">
+                <a:solidFill>
+                  <a:srgbClr val="526674"/>
+                </a:solidFill>
+              </a:defRPr>
+            </a:lvl8pPr>
+            <a:lvl9pPr>
+              <a:buNone/>
+              <a:defRPr sz="1725" b="0">
+                <a:solidFill>
+                  <a:srgbClr val="526674"/>
+                </a:solidFill>
+              </a:defRPr>
+            </a:lvl9pPr>
           </a:lstStyle>
           <a:p xmlns:a="http://schemas.openxmlformats.org/drawingml/2006/main">
             <a:pPr>
+              <a:buNone/>
               <a:defRPr sz="1725" b="0">
                 <a:solidFill>
                   <a:srgbClr val="526674"/>
@@ -5422,7 +8295,7 @@
                   <a:srgbClr val="526674"/>
                 </a:solidFill>
               </a:rPr>
-              <a:t>Top two differ by 0.0004; fold variation is much larger.</a:t>
+              <a:t>Random Forest: 0.8358 F1. XGBoost: 0.8308. The predefined rule selects RF.</a:t>
             </a:r>
           </a:p>
         </p:txBody>
@@ -5488,28 +8361,101 @@
           <a:bodyPr xmlns:a="http://schemas.openxmlformats.org/drawingml/2006/main" anchor="ctr"/>
           <a:lstStyle xmlns:a="http://schemas.openxmlformats.org/drawingml/2006/main">
             <a:defPPr>
-              <a:defRPr sz="3150" b="1">
+              <a:defRPr sz="3000" b="1">
                 <a:solidFill>
                   <a:srgbClr val="102B3F"/>
                 </a:solidFill>
               </a:defRPr>
             </a:defPPr>
+            <a:lvl1pPr>
+              <a:buNone/>
+              <a:defRPr sz="3000" b="1">
+                <a:solidFill>
+                  <a:srgbClr val="102B3F"/>
+                </a:solidFill>
+              </a:defRPr>
+            </a:lvl1pPr>
+            <a:lvl2pPr>
+              <a:buNone/>
+              <a:defRPr sz="3000" b="1">
+                <a:solidFill>
+                  <a:srgbClr val="102B3F"/>
+                </a:solidFill>
+              </a:defRPr>
+            </a:lvl2pPr>
+            <a:lvl3pPr>
+              <a:buNone/>
+              <a:defRPr sz="3000" b="1">
+                <a:solidFill>
+                  <a:srgbClr val="102B3F"/>
+                </a:solidFill>
+              </a:defRPr>
+            </a:lvl3pPr>
+            <a:lvl4pPr>
+              <a:buNone/>
+              <a:defRPr sz="3000" b="1">
+                <a:solidFill>
+                  <a:srgbClr val="102B3F"/>
+                </a:solidFill>
+              </a:defRPr>
+            </a:lvl4pPr>
+            <a:lvl5pPr>
+              <a:buNone/>
+              <a:defRPr sz="3000" b="1">
+                <a:solidFill>
+                  <a:srgbClr val="102B3F"/>
+                </a:solidFill>
+              </a:defRPr>
+            </a:lvl5pPr>
+            <a:lvl6pPr>
+              <a:buNone/>
+              <a:defRPr sz="3000" b="1">
+                <a:solidFill>
+                  <a:srgbClr val="102B3F"/>
+                </a:solidFill>
+              </a:defRPr>
+            </a:lvl6pPr>
+            <a:lvl7pPr>
+              <a:buNone/>
+              <a:defRPr sz="3000" b="1">
+                <a:solidFill>
+                  <a:srgbClr val="102B3F"/>
+                </a:solidFill>
+              </a:defRPr>
+            </a:lvl7pPr>
+            <a:lvl8pPr>
+              <a:buNone/>
+              <a:defRPr sz="3000" b="1">
+                <a:solidFill>
+                  <a:srgbClr val="102B3F"/>
+                </a:solidFill>
+              </a:defRPr>
+            </a:lvl8pPr>
+            <a:lvl9pPr>
+              <a:buNone/>
+              <a:defRPr sz="3000" b="1">
+                <a:solidFill>
+                  <a:srgbClr val="102B3F"/>
+                </a:solidFill>
+              </a:defRPr>
+            </a:lvl9pPr>
           </a:lstStyle>
           <a:p xmlns:a="http://schemas.openxmlformats.org/drawingml/2006/main">
             <a:pPr>
-              <a:defRPr sz="3150" b="1">
+              <a:buNone/>
+              <a:defRPr sz="3000" b="1">
                 <a:solidFill>
                   <a:srgbClr val="102B3F"/>
                 </a:solidFill>
               </a:defRPr>
             </a:pPr>
             <a:r>
-              <a:rPr sz="3150" b="1">
+              <a:rPr sz="3000" b="1">
                 <a:solidFill>
                   <a:srgbClr val="102B3F"/>
                 </a:solidFill>
               </a:rPr>
-              <a:t>Held-out test results</a:t>
+              <a:t>Retrospective historical test evaluation</a:t>
             </a:r>
           </a:p>
         </p:txBody>
@@ -5552,9 +8498,82 @@
                 </a:solidFill>
               </a:defRPr>
             </a:defPPr>
+            <a:lvl1pPr>
+              <a:buNone/>
+              <a:defRPr sz="1125" b="0">
+                <a:solidFill>
+                  <a:srgbClr val="526674"/>
+                </a:solidFill>
+              </a:defRPr>
+            </a:lvl1pPr>
+            <a:lvl2pPr>
+              <a:buNone/>
+              <a:defRPr sz="1125" b="0">
+                <a:solidFill>
+                  <a:srgbClr val="526674"/>
+                </a:solidFill>
+              </a:defRPr>
+            </a:lvl2pPr>
+            <a:lvl3pPr>
+              <a:buNone/>
+              <a:defRPr sz="1125" b="0">
+                <a:solidFill>
+                  <a:srgbClr val="526674"/>
+                </a:solidFill>
+              </a:defRPr>
+            </a:lvl3pPr>
+            <a:lvl4pPr>
+              <a:buNone/>
+              <a:defRPr sz="1125" b="0">
+                <a:solidFill>
+                  <a:srgbClr val="526674"/>
+                </a:solidFill>
+              </a:defRPr>
+            </a:lvl4pPr>
+            <a:lvl5pPr>
+              <a:buNone/>
+              <a:defRPr sz="1125" b="0">
+                <a:solidFill>
+                  <a:srgbClr val="526674"/>
+                </a:solidFill>
+              </a:defRPr>
+            </a:lvl5pPr>
+            <a:lvl6pPr>
+              <a:buNone/>
+              <a:defRPr sz="1125" b="0">
+                <a:solidFill>
+                  <a:srgbClr val="526674"/>
+                </a:solidFill>
+              </a:defRPr>
+            </a:lvl6pPr>
+            <a:lvl7pPr>
+              <a:buNone/>
+              <a:defRPr sz="1125" b="0">
+                <a:solidFill>
+                  <a:srgbClr val="526674"/>
+                </a:solidFill>
+              </a:defRPr>
+            </a:lvl7pPr>
+            <a:lvl8pPr>
+              <a:buNone/>
+              <a:defRPr sz="1125" b="0">
+                <a:solidFill>
+                  <a:srgbClr val="526674"/>
+                </a:solidFill>
+              </a:defRPr>
+            </a:lvl8pPr>
+            <a:lvl9pPr>
+              <a:buNone/>
+              <a:defRPr sz="1125" b="0">
+                <a:solidFill>
+                  <a:srgbClr val="526674"/>
+                </a:solidFill>
+              </a:defRPr>
+            </a:lvl9pPr>
           </a:lstStyle>
           <a:p xmlns:a="http://schemas.openxmlformats.org/drawingml/2006/main">
             <a:pPr>
+              <a:buNone/>
               <a:defRPr sz="1125" b="0">
                 <a:solidFill>
                   <a:srgbClr val="526674"/>
@@ -5604,28 +8623,101 @@
           <a:bodyPr xmlns:a="http://schemas.openxmlformats.org/drawingml/2006/main" anchor="ctr"/>
           <a:lstStyle xmlns:a="http://schemas.openxmlformats.org/drawingml/2006/main">
             <a:defPPr>
-              <a:defRPr sz="1050" b="0">
+              <a:defRPr sz="1125" b="0">
                 <a:solidFill>
                   <a:srgbClr val="526674"/>
                 </a:solidFill>
               </a:defRPr>
             </a:defPPr>
+            <a:lvl1pPr>
+              <a:buNone/>
+              <a:defRPr sz="1125" b="0">
+                <a:solidFill>
+                  <a:srgbClr val="526674"/>
+                </a:solidFill>
+              </a:defRPr>
+            </a:lvl1pPr>
+            <a:lvl2pPr>
+              <a:buNone/>
+              <a:defRPr sz="1125" b="0">
+                <a:solidFill>
+                  <a:srgbClr val="526674"/>
+                </a:solidFill>
+              </a:defRPr>
+            </a:lvl2pPr>
+            <a:lvl3pPr>
+              <a:buNone/>
+              <a:defRPr sz="1125" b="0">
+                <a:solidFill>
+                  <a:srgbClr val="526674"/>
+                </a:solidFill>
+              </a:defRPr>
+            </a:lvl3pPr>
+            <a:lvl4pPr>
+              <a:buNone/>
+              <a:defRPr sz="1125" b="0">
+                <a:solidFill>
+                  <a:srgbClr val="526674"/>
+                </a:solidFill>
+              </a:defRPr>
+            </a:lvl4pPr>
+            <a:lvl5pPr>
+              <a:buNone/>
+              <a:defRPr sz="1125" b="0">
+                <a:solidFill>
+                  <a:srgbClr val="526674"/>
+                </a:solidFill>
+              </a:defRPr>
+            </a:lvl5pPr>
+            <a:lvl6pPr>
+              <a:buNone/>
+              <a:defRPr sz="1125" b="0">
+                <a:solidFill>
+                  <a:srgbClr val="526674"/>
+                </a:solidFill>
+              </a:defRPr>
+            </a:lvl6pPr>
+            <a:lvl7pPr>
+              <a:buNone/>
+              <a:defRPr sz="1125" b="0">
+                <a:solidFill>
+                  <a:srgbClr val="526674"/>
+                </a:solidFill>
+              </a:defRPr>
+            </a:lvl7pPr>
+            <a:lvl8pPr>
+              <a:buNone/>
+              <a:defRPr sz="1125" b="0">
+                <a:solidFill>
+                  <a:srgbClr val="526674"/>
+                </a:solidFill>
+              </a:defRPr>
+            </a:lvl8pPr>
+            <a:lvl9pPr>
+              <a:buNone/>
+              <a:defRPr sz="1125" b="0">
+                <a:solidFill>
+                  <a:srgbClr val="526674"/>
+                </a:solidFill>
+              </a:defRPr>
+            </a:lvl9pPr>
           </a:lstStyle>
           <a:p xmlns:a="http://schemas.openxmlformats.org/drawingml/2006/main">
             <a:pPr>
-              <a:defRPr sz="1050" b="0">
+              <a:buNone/>
+              <a:defRPr sz="1125" b="0">
                 <a:solidFill>
                   <a:srgbClr val="526674"/>
                 </a:solidFill>
               </a:defRPr>
             </a:pPr>
             <a:r>
-              <a:rPr sz="1050" b="0">
+              <a:rPr sz="1125" b="0">
                 <a:solidFill>
                   <a:srgbClr val="526674"/>
                 </a:solidFill>
               </a:rPr>
-              <a:t>Source: artifacts/metrics.json; cutoff selected from training records only</a:t>
+              <a:t>184 previously inspected records. Each model uses its separate C-selected cutoff.</a:t>
             </a:r>
           </a:p>
         </p:txBody>
@@ -5668,9 +8760,82 @@
                 </a:solidFill>
               </a:defRPr>
             </a:defPPr>
+            <a:lvl1pPr>
+              <a:buNone/>
+              <a:defRPr sz="2925" b="1">
+                <a:solidFill>
+                  <a:srgbClr val="087F78"/>
+                </a:solidFill>
+              </a:defRPr>
+            </a:lvl1pPr>
+            <a:lvl2pPr>
+              <a:buNone/>
+              <a:defRPr sz="2925" b="1">
+                <a:solidFill>
+                  <a:srgbClr val="087F78"/>
+                </a:solidFill>
+              </a:defRPr>
+            </a:lvl2pPr>
+            <a:lvl3pPr>
+              <a:buNone/>
+              <a:defRPr sz="2925" b="1">
+                <a:solidFill>
+                  <a:srgbClr val="087F78"/>
+                </a:solidFill>
+              </a:defRPr>
+            </a:lvl3pPr>
+            <a:lvl4pPr>
+              <a:buNone/>
+              <a:defRPr sz="2925" b="1">
+                <a:solidFill>
+                  <a:srgbClr val="087F78"/>
+                </a:solidFill>
+              </a:defRPr>
+            </a:lvl4pPr>
+            <a:lvl5pPr>
+              <a:buNone/>
+              <a:defRPr sz="2925" b="1">
+                <a:solidFill>
+                  <a:srgbClr val="087F78"/>
+                </a:solidFill>
+              </a:defRPr>
+            </a:lvl5pPr>
+            <a:lvl6pPr>
+              <a:buNone/>
+              <a:defRPr sz="2925" b="1">
+                <a:solidFill>
+                  <a:srgbClr val="087F78"/>
+                </a:solidFill>
+              </a:defRPr>
+            </a:lvl6pPr>
+            <a:lvl7pPr>
+              <a:buNone/>
+              <a:defRPr sz="2925" b="1">
+                <a:solidFill>
+                  <a:srgbClr val="087F78"/>
+                </a:solidFill>
+              </a:defRPr>
+            </a:lvl7pPr>
+            <a:lvl8pPr>
+              <a:buNone/>
+              <a:defRPr sz="2925" b="1">
+                <a:solidFill>
+                  <a:srgbClr val="087F78"/>
+                </a:solidFill>
+              </a:defRPr>
+            </a:lvl8pPr>
+            <a:lvl9pPr>
+              <a:buNone/>
+              <a:defRPr sz="2925" b="1">
+                <a:solidFill>
+                  <a:srgbClr val="087F78"/>
+                </a:solidFill>
+              </a:defRPr>
+            </a:lvl9pPr>
           </a:lstStyle>
           <a:p xmlns:a="http://schemas.openxmlformats.org/drawingml/2006/main">
             <a:pPr>
+              <a:buNone/>
               <a:defRPr sz="2925" b="1">
                 <a:solidFill>
                   <a:srgbClr val="087F78"/>
@@ -5683,7 +8848,7 @@
                   <a:srgbClr val="087F78"/>
                 </a:solidFill>
               </a:rPr>
-              <a:t>F1  0.836</a:t>
+              <a:t/>
             </a:r>
           </a:p>
         </p:txBody>
@@ -5726,9 +8891,82 @@
                 </a:solidFill>
               </a:defRPr>
             </a:defPPr>
+            <a:lvl1pPr>
+              <a:buNone/>
+              <a:defRPr sz="2925" b="1">
+                <a:solidFill>
+                  <a:srgbClr val="087F78"/>
+                </a:solidFill>
+              </a:defRPr>
+            </a:lvl1pPr>
+            <a:lvl2pPr>
+              <a:buNone/>
+              <a:defRPr sz="2925" b="1">
+                <a:solidFill>
+                  <a:srgbClr val="087F78"/>
+                </a:solidFill>
+              </a:defRPr>
+            </a:lvl2pPr>
+            <a:lvl3pPr>
+              <a:buNone/>
+              <a:defRPr sz="2925" b="1">
+                <a:solidFill>
+                  <a:srgbClr val="087F78"/>
+                </a:solidFill>
+              </a:defRPr>
+            </a:lvl3pPr>
+            <a:lvl4pPr>
+              <a:buNone/>
+              <a:defRPr sz="2925" b="1">
+                <a:solidFill>
+                  <a:srgbClr val="087F78"/>
+                </a:solidFill>
+              </a:defRPr>
+            </a:lvl4pPr>
+            <a:lvl5pPr>
+              <a:buNone/>
+              <a:defRPr sz="2925" b="1">
+                <a:solidFill>
+                  <a:srgbClr val="087F78"/>
+                </a:solidFill>
+              </a:defRPr>
+            </a:lvl5pPr>
+            <a:lvl6pPr>
+              <a:buNone/>
+              <a:defRPr sz="2925" b="1">
+                <a:solidFill>
+                  <a:srgbClr val="087F78"/>
+                </a:solidFill>
+              </a:defRPr>
+            </a:lvl6pPr>
+            <a:lvl7pPr>
+              <a:buNone/>
+              <a:defRPr sz="2925" b="1">
+                <a:solidFill>
+                  <a:srgbClr val="087F78"/>
+                </a:solidFill>
+              </a:defRPr>
+            </a:lvl7pPr>
+            <a:lvl8pPr>
+              <a:buNone/>
+              <a:defRPr sz="2925" b="1">
+                <a:solidFill>
+                  <a:srgbClr val="087F78"/>
+                </a:solidFill>
+              </a:defRPr>
+            </a:lvl8pPr>
+            <a:lvl9pPr>
+              <a:buNone/>
+              <a:defRPr sz="2925" b="1">
+                <a:solidFill>
+                  <a:srgbClr val="087F78"/>
+                </a:solidFill>
+              </a:defRPr>
+            </a:lvl9pPr>
           </a:lstStyle>
           <a:p xmlns:a="http://schemas.openxmlformats.org/drawingml/2006/main">
             <a:pPr>
+              <a:buNone/>
               <a:defRPr sz="2925" b="1">
                 <a:solidFill>
                   <a:srgbClr val="087F78"/>
@@ -5741,7 +8979,7 @@
                   <a:srgbClr val="087F78"/>
                 </a:solidFill>
               </a:rPr>
-              <a:t>Recall  0.873</a:t>
+              <a:t/>
             </a:r>
           </a:p>
         </p:txBody>
@@ -5784,9 +9022,82 @@
                 </a:solidFill>
               </a:defRPr>
             </a:defPPr>
+            <a:lvl1pPr>
+              <a:buNone/>
+              <a:defRPr sz="2925" b="1">
+                <a:solidFill>
+                  <a:srgbClr val="087F78"/>
+                </a:solidFill>
+              </a:defRPr>
+            </a:lvl1pPr>
+            <a:lvl2pPr>
+              <a:buNone/>
+              <a:defRPr sz="2925" b="1">
+                <a:solidFill>
+                  <a:srgbClr val="087F78"/>
+                </a:solidFill>
+              </a:defRPr>
+            </a:lvl2pPr>
+            <a:lvl3pPr>
+              <a:buNone/>
+              <a:defRPr sz="2925" b="1">
+                <a:solidFill>
+                  <a:srgbClr val="087F78"/>
+                </a:solidFill>
+              </a:defRPr>
+            </a:lvl3pPr>
+            <a:lvl4pPr>
+              <a:buNone/>
+              <a:defRPr sz="2925" b="1">
+                <a:solidFill>
+                  <a:srgbClr val="087F78"/>
+                </a:solidFill>
+              </a:defRPr>
+            </a:lvl4pPr>
+            <a:lvl5pPr>
+              <a:buNone/>
+              <a:defRPr sz="2925" b="1">
+                <a:solidFill>
+                  <a:srgbClr val="087F78"/>
+                </a:solidFill>
+              </a:defRPr>
+            </a:lvl5pPr>
+            <a:lvl6pPr>
+              <a:buNone/>
+              <a:defRPr sz="2925" b="1">
+                <a:solidFill>
+                  <a:srgbClr val="087F78"/>
+                </a:solidFill>
+              </a:defRPr>
+            </a:lvl6pPr>
+            <a:lvl7pPr>
+              <a:buNone/>
+              <a:defRPr sz="2925" b="1">
+                <a:solidFill>
+                  <a:srgbClr val="087F78"/>
+                </a:solidFill>
+              </a:defRPr>
+            </a:lvl7pPr>
+            <a:lvl8pPr>
+              <a:buNone/>
+              <a:defRPr sz="2925" b="1">
+                <a:solidFill>
+                  <a:srgbClr val="087F78"/>
+                </a:solidFill>
+              </a:defRPr>
+            </a:lvl8pPr>
+            <a:lvl9pPr>
+              <a:buNone/>
+              <a:defRPr sz="2925" b="1">
+                <a:solidFill>
+                  <a:srgbClr val="087F78"/>
+                </a:solidFill>
+              </a:defRPr>
+            </a:lvl9pPr>
           </a:lstStyle>
           <a:p xmlns:a="http://schemas.openxmlformats.org/drawingml/2006/main">
             <a:pPr>
+              <a:buNone/>
               <a:defRPr sz="2925" b="1">
                 <a:solidFill>
                   <a:srgbClr val="087F78"/>
@@ -5799,7 +9110,7 @@
                   <a:srgbClr val="087F78"/>
                 </a:solidFill>
               </a:rPr>
-              <a:t>ROC-AUC  0.901</a:t>
+              <a:t/>
             </a:r>
           </a:p>
         </p:txBody>
@@ -5842,9 +9153,82 @@
                 </a:solidFill>
               </a:defRPr>
             </a:defPPr>
+            <a:lvl1pPr>
+              <a:buNone/>
+              <a:defRPr sz="2925" b="1">
+                <a:solidFill>
+                  <a:srgbClr val="087F78"/>
+                </a:solidFill>
+              </a:defRPr>
+            </a:lvl1pPr>
+            <a:lvl2pPr>
+              <a:buNone/>
+              <a:defRPr sz="2925" b="1">
+                <a:solidFill>
+                  <a:srgbClr val="087F78"/>
+                </a:solidFill>
+              </a:defRPr>
+            </a:lvl2pPr>
+            <a:lvl3pPr>
+              <a:buNone/>
+              <a:defRPr sz="2925" b="1">
+                <a:solidFill>
+                  <a:srgbClr val="087F78"/>
+                </a:solidFill>
+              </a:defRPr>
+            </a:lvl3pPr>
+            <a:lvl4pPr>
+              <a:buNone/>
+              <a:defRPr sz="2925" b="1">
+                <a:solidFill>
+                  <a:srgbClr val="087F78"/>
+                </a:solidFill>
+              </a:defRPr>
+            </a:lvl4pPr>
+            <a:lvl5pPr>
+              <a:buNone/>
+              <a:defRPr sz="2925" b="1">
+                <a:solidFill>
+                  <a:srgbClr val="087F78"/>
+                </a:solidFill>
+              </a:defRPr>
+            </a:lvl5pPr>
+            <a:lvl6pPr>
+              <a:buNone/>
+              <a:defRPr sz="2925" b="1">
+                <a:solidFill>
+                  <a:srgbClr val="087F78"/>
+                </a:solidFill>
+              </a:defRPr>
+            </a:lvl6pPr>
+            <a:lvl7pPr>
+              <a:buNone/>
+              <a:defRPr sz="2925" b="1">
+                <a:solidFill>
+                  <a:srgbClr val="087F78"/>
+                </a:solidFill>
+              </a:defRPr>
+            </a:lvl7pPr>
+            <a:lvl8pPr>
+              <a:buNone/>
+              <a:defRPr sz="2925" b="1">
+                <a:solidFill>
+                  <a:srgbClr val="087F78"/>
+                </a:solidFill>
+              </a:defRPr>
+            </a:lvl8pPr>
+            <a:lvl9pPr>
+              <a:buNone/>
+              <a:defRPr sz="2925" b="1">
+                <a:solidFill>
+                  <a:srgbClr val="087F78"/>
+                </a:solidFill>
+              </a:defRPr>
+            </a:lvl9pPr>
           </a:lstStyle>
           <a:p xmlns:a="http://schemas.openxmlformats.org/drawingml/2006/main">
             <a:pPr>
+              <a:buNone/>
               <a:defRPr sz="2925" b="1">
                 <a:solidFill>
                   <a:srgbClr val="087F78"/>
@@ -5857,7 +9241,7 @@
                   <a:srgbClr val="087F78"/>
                 </a:solidFill>
               </a:rPr>
-              <a:t>Cutoff  0.47</a:t>
+              <a:t/>
             </a:r>
           </a:p>
         </p:txBody>
@@ -5900,9 +9284,82 @@
                 </a:solidFill>
               </a:defRPr>
             </a:defPPr>
+            <a:lvl1pPr>
+              <a:buNone/>
+              <a:defRPr sz="2175" b="1">
+                <a:solidFill>
+                  <a:srgbClr val="102B3F"/>
+                </a:solidFill>
+              </a:defRPr>
+            </a:lvl1pPr>
+            <a:lvl2pPr>
+              <a:buNone/>
+              <a:defRPr sz="2175" b="1">
+                <a:solidFill>
+                  <a:srgbClr val="102B3F"/>
+                </a:solidFill>
+              </a:defRPr>
+            </a:lvl2pPr>
+            <a:lvl3pPr>
+              <a:buNone/>
+              <a:defRPr sz="2175" b="1">
+                <a:solidFill>
+                  <a:srgbClr val="102B3F"/>
+                </a:solidFill>
+              </a:defRPr>
+            </a:lvl3pPr>
+            <a:lvl4pPr>
+              <a:buNone/>
+              <a:defRPr sz="2175" b="1">
+                <a:solidFill>
+                  <a:srgbClr val="102B3F"/>
+                </a:solidFill>
+              </a:defRPr>
+            </a:lvl4pPr>
+            <a:lvl5pPr>
+              <a:buNone/>
+              <a:defRPr sz="2175" b="1">
+                <a:solidFill>
+                  <a:srgbClr val="102B3F"/>
+                </a:solidFill>
+              </a:defRPr>
+            </a:lvl5pPr>
+            <a:lvl6pPr>
+              <a:buNone/>
+              <a:defRPr sz="2175" b="1">
+                <a:solidFill>
+                  <a:srgbClr val="102B3F"/>
+                </a:solidFill>
+              </a:defRPr>
+            </a:lvl6pPr>
+            <a:lvl7pPr>
+              <a:buNone/>
+              <a:defRPr sz="2175" b="1">
+                <a:solidFill>
+                  <a:srgbClr val="102B3F"/>
+                </a:solidFill>
+              </a:defRPr>
+            </a:lvl7pPr>
+            <a:lvl8pPr>
+              <a:buNone/>
+              <a:defRPr sz="2175" b="1">
+                <a:solidFill>
+                  <a:srgbClr val="102B3F"/>
+                </a:solidFill>
+              </a:defRPr>
+            </a:lvl8pPr>
+            <a:lvl9pPr>
+              <a:buNone/>
+              <a:defRPr sz="2175" b="1">
+                <a:solidFill>
+                  <a:srgbClr val="102B3F"/>
+                </a:solidFill>
+              </a:defRPr>
+            </a:lvl9pPr>
           </a:lstStyle>
           <a:p xmlns:a="http://schemas.openxmlformats.org/drawingml/2006/main">
             <a:pPr>
+              <a:buNone/>
               <a:defRPr sz="2175" b="1">
                 <a:solidFill>
                   <a:srgbClr val="102B3F"/>
@@ -5915,7 +9372,7 @@
                   <a:srgbClr val="102B3F"/>
                 </a:solidFill>
               </a:rPr>
-              <a:t>TN 60  •  FP 22  •  FN 13  •  TP 89</a:t>
+              <a:t/>
             </a:r>
           </a:p>
         </p:txBody>
@@ -5936,8 +9393,8 @@
         </p:nvSpPr>
         <p:spPr>
           <a:xfrm xmlns:a="http://schemas.openxmlformats.org/drawingml/2006/main">
-            <a:off x="904875" y="5429250"/>
-            <a:ext cx="10287000" cy="476250"/>
+            <a:off x="781050" y="5286375"/>
+            <a:ext cx="10382250" cy="809625"/>
           </a:xfrm>
           <a:prstGeom xmlns:a="http://schemas.openxmlformats.org/drawingml/2006/main" prst="rect">
             <a:avLst/>
@@ -5952,32 +9409,1535 @@
           <a:bodyPr xmlns:a="http://schemas.openxmlformats.org/drawingml/2006/main" anchor="ctr"/>
           <a:lstStyle xmlns:a="http://schemas.openxmlformats.org/drawingml/2006/main">
             <a:defPPr>
-              <a:defRPr sz="1725" b="0">
+              <a:defRPr sz="1575" b="0">
                 <a:solidFill>
                   <a:srgbClr val="526674"/>
                 </a:solidFill>
               </a:defRPr>
             </a:defPPr>
+            <a:lvl1pPr>
+              <a:buNone/>
+              <a:defRPr sz="1650" b="0">
+                <a:solidFill>
+                  <a:srgbClr val="526674"/>
+                </a:solidFill>
+              </a:defRPr>
+            </a:lvl1pPr>
+            <a:lvl2pPr>
+              <a:buNone/>
+              <a:defRPr sz="1650" b="0">
+                <a:solidFill>
+                  <a:srgbClr val="526674"/>
+                </a:solidFill>
+              </a:defRPr>
+            </a:lvl2pPr>
+            <a:lvl3pPr>
+              <a:buNone/>
+              <a:defRPr sz="1650" b="0">
+                <a:solidFill>
+                  <a:srgbClr val="526674"/>
+                </a:solidFill>
+              </a:defRPr>
+            </a:lvl3pPr>
+            <a:lvl4pPr>
+              <a:buNone/>
+              <a:defRPr sz="1650" b="0">
+                <a:solidFill>
+                  <a:srgbClr val="526674"/>
+                </a:solidFill>
+              </a:defRPr>
+            </a:lvl4pPr>
+            <a:lvl5pPr>
+              <a:buNone/>
+              <a:defRPr sz="1650" b="0">
+                <a:solidFill>
+                  <a:srgbClr val="526674"/>
+                </a:solidFill>
+              </a:defRPr>
+            </a:lvl5pPr>
+            <a:lvl6pPr>
+              <a:buNone/>
+              <a:defRPr sz="1650" b="0">
+                <a:solidFill>
+                  <a:srgbClr val="526674"/>
+                </a:solidFill>
+              </a:defRPr>
+            </a:lvl6pPr>
+            <a:lvl7pPr>
+              <a:buNone/>
+              <a:defRPr sz="1650" b="0">
+                <a:solidFill>
+                  <a:srgbClr val="526674"/>
+                </a:solidFill>
+              </a:defRPr>
+            </a:lvl7pPr>
+            <a:lvl8pPr>
+              <a:buNone/>
+              <a:defRPr sz="1650" b="0">
+                <a:solidFill>
+                  <a:srgbClr val="526674"/>
+                </a:solidFill>
+              </a:defRPr>
+            </a:lvl8pPr>
+            <a:lvl9pPr>
+              <a:buNone/>
+              <a:defRPr sz="1650" b="0">
+                <a:solidFill>
+                  <a:srgbClr val="526674"/>
+                </a:solidFill>
+              </a:defRPr>
+            </a:lvl9pPr>
           </a:lstStyle>
           <a:p xmlns:a="http://schemas.openxmlformats.org/drawingml/2006/main">
             <a:pPr>
-              <a:defRPr sz="1725" b="0">
+              <a:buNone/>
+              <a:defRPr sz="1575" b="0">
                 <a:solidFill>
                   <a:srgbClr val="526674"/>
                 </a:solidFill>
               </a:defRPr>
             </a:pPr>
             <a:r>
-              <a:rPr sz="1725" b="0">
+              <a:rPr sz="1575" b="0">
                 <a:solidFill>
                   <a:srgbClr val="526674"/>
                 </a:solidFill>
               </a:rPr>
-              <a:t>False negatives remain; the score is not a diagnosis.</a:t>
+              <a:t>RF: 98/102 positives detected; 32/82 negatives falsely flagged (specificity 0.6098)</a:t>
+            </a:r>
+          </a:p>
+          <a:p xmlns:a="http://schemas.openxmlformats.org/drawingml/2006/main">
+            <a:pPr>
+              <a:buNone/>
+              <a:defRPr sz="1575" b="0">
+                <a:solidFill>
+                  <a:srgbClr val="526674"/>
+                </a:solidFill>
+              </a:defRPr>
+            </a:pPr>
+            <a:r>
+              <a:rPr sz="1575" b="0">
+                <a:solidFill>
+                  <a:srgbClr val="526674"/>
+                </a:solidFill>
+              </a:rPr>
+              <a:t>Cutoff 0.38 is statistical. RF stays selected by nested-CV F1; BN is provisional.</a:t>
             </a:r>
           </a:p>
         </p:txBody>
       </p:sp>
+      <p:graphicFrame>
+        <p:nvGraphicFramePr>
+          <p:cNvPr id="11" name="">
+            <a:extLst xmlns:a="http://schemas.openxmlformats.org/drawingml/2006/main">
+              <a:ext uri="{FF2B5EF4-FFF2-40B4-BE49-F238E27FC236}">
+                <a16:creationId xmlns:a16="http://schemas.microsoft.com/office/drawing/2014/main" id="{4B1D103D-B7F2-479B-9AFF-20AF22DEB7B8}"/>
+              </a:ext>
+            </a:extLst>
+          </p:cNvPr>
+          <p:cNvGraphicFramePr/>
+          <p:nvPr/>
+        </p:nvGraphicFramePr>
+        <p:xfrm>
+          <a:off xmlns:a="http://schemas.openxmlformats.org/drawingml/2006/main" x="781050" y="1619250"/>
+          <a:ext xmlns:a="http://schemas.openxmlformats.org/drawingml/2006/main" cx="10382250" cy="3333750"/>
+        </p:xfrm>
+        <a:graphic xmlns:a="http://schemas.openxmlformats.org/drawingml/2006/main">
+          <a:graphicData uri="http://schemas.openxmlformats.org/drawingml/2006/table">
+            <a:tbl>
+              <a:tblPr/>
+              <a:tblGrid>
+                <a:gridCol w="2857500"/>
+                <a:gridCol w="1238250"/>
+                <a:gridCol w="1571625"/>
+                <a:gridCol w="1571625"/>
+                <a:gridCol w="1571625"/>
+                <a:gridCol w="1571625"/>
+              </a:tblGrid>
+              <a:tr h="555625">
+                <a:tc>
+                  <a:txBody>
+                    <a:bodyPr/>
+                    <a:lstStyle/>
+                    <a:p>
+                      <a:r>
+                        <a:rPr sz="1800" b="1">
+                          <a:solidFill>
+                            <a:srgbClr val="FFFFFF"/>
+                          </a:solidFill>
+                          <a:latin typeface="Aptos"/>
+                          <a:ea typeface="Aptos"/>
+                          <a:cs typeface="Aptos"/>
+                        </a:rPr>
+                        <a:t>Model</a:t>
+                      </a:r>
+                    </a:p>
+                  </a:txBody>
+                  <a:tcPr marL="91440" marR="91440" marT="45720" marB="45720">
+                    <a:lnL w="9525">
+                      <a:solidFill>
+                        <a:srgbClr val="D7E1DE"/>
+                      </a:solidFill>
+                      <a:prstDash val="solid"/>
+                    </a:lnL>
+                    <a:lnR w="9525">
+                      <a:solidFill>
+                        <a:srgbClr val="D7E1DE"/>
+                      </a:solidFill>
+                      <a:prstDash val="solid"/>
+                    </a:lnR>
+                    <a:lnT w="9525">
+                      <a:solidFill>
+                        <a:srgbClr val="D7E1DE"/>
+                      </a:solidFill>
+                      <a:prstDash val="solid"/>
+                    </a:lnT>
+                    <a:lnB w="9525">
+                      <a:solidFill>
+                        <a:srgbClr val="D7E1DE"/>
+                      </a:solidFill>
+                      <a:prstDash val="solid"/>
+                    </a:lnB>
+                    <a:solidFill>
+                      <a:srgbClr val="102B3F"/>
+                    </a:solidFill>
+                  </a:tcPr>
+                </a:tc>
+                <a:tc>
+                  <a:txBody>
+                    <a:bodyPr/>
+                    <a:lstStyle/>
+                    <a:p>
+                      <a:r>
+                        <a:rPr sz="1800" b="1">
+                          <a:solidFill>
+                            <a:srgbClr val="FFFFFF"/>
+                          </a:solidFill>
+                          <a:latin typeface="Aptos"/>
+                          <a:ea typeface="Aptos"/>
+                          <a:cs typeface="Aptos"/>
+                        </a:rPr>
+                        <a:t>Cutoff</a:t>
+                      </a:r>
+                    </a:p>
+                  </a:txBody>
+                  <a:tcPr marL="91440" marR="91440" marT="45720" marB="45720">
+                    <a:lnR w="9525">
+                      <a:solidFill>
+                        <a:srgbClr val="D7E1DE"/>
+                      </a:solidFill>
+                      <a:prstDash val="solid"/>
+                    </a:lnR>
+                    <a:lnT w="9525">
+                      <a:solidFill>
+                        <a:srgbClr val="D7E1DE"/>
+                      </a:solidFill>
+                      <a:prstDash val="solid"/>
+                    </a:lnT>
+                    <a:lnB w="9525">
+                      <a:solidFill>
+                        <a:srgbClr val="D7E1DE"/>
+                      </a:solidFill>
+                      <a:prstDash val="solid"/>
+                    </a:lnB>
+                    <a:solidFill>
+                      <a:srgbClr val="102B3F"/>
+                    </a:solidFill>
+                  </a:tcPr>
+                </a:tc>
+                <a:tc>
+                  <a:txBody>
+                    <a:bodyPr/>
+                    <a:lstStyle/>
+                    <a:p>
+                      <a:r>
+                        <a:rPr sz="1800" b="1">
+                          <a:solidFill>
+                            <a:srgbClr val="FFFFFF"/>
+                          </a:solidFill>
+                          <a:latin typeface="Aptos"/>
+                          <a:ea typeface="Aptos"/>
+                          <a:cs typeface="Aptos"/>
+                        </a:rPr>
+                        <a:t>Accuracy</a:t>
+                      </a:r>
+                    </a:p>
+                  </a:txBody>
+                  <a:tcPr marL="91440" marR="91440" marT="45720" marB="45720">
+                    <a:lnR w="9525">
+                      <a:solidFill>
+                        <a:srgbClr val="D7E1DE"/>
+                      </a:solidFill>
+                      <a:prstDash val="solid"/>
+                    </a:lnR>
+                    <a:lnT w="9525">
+                      <a:solidFill>
+                        <a:srgbClr val="D7E1DE"/>
+                      </a:solidFill>
+                      <a:prstDash val="solid"/>
+                    </a:lnT>
+                    <a:lnB w="9525">
+                      <a:solidFill>
+                        <a:srgbClr val="D7E1DE"/>
+                      </a:solidFill>
+                      <a:prstDash val="solid"/>
+                    </a:lnB>
+                    <a:solidFill>
+                      <a:srgbClr val="102B3F"/>
+                    </a:solidFill>
+                  </a:tcPr>
+                </a:tc>
+                <a:tc>
+                  <a:txBody>
+                    <a:bodyPr/>
+                    <a:lstStyle/>
+                    <a:p>
+                      <a:r>
+                        <a:rPr sz="1800" b="1">
+                          <a:solidFill>
+                            <a:srgbClr val="FFFFFF"/>
+                          </a:solidFill>
+                          <a:latin typeface="Aptos"/>
+                          <a:ea typeface="Aptos"/>
+                          <a:cs typeface="Aptos"/>
+                        </a:rPr>
+                        <a:t>Recall</a:t>
+                      </a:r>
+                    </a:p>
+                  </a:txBody>
+                  <a:tcPr marL="91440" marR="91440" marT="45720" marB="45720">
+                    <a:lnR w="9525">
+                      <a:solidFill>
+                        <a:srgbClr val="D7E1DE"/>
+                      </a:solidFill>
+                      <a:prstDash val="solid"/>
+                    </a:lnR>
+                    <a:lnT w="9525">
+                      <a:solidFill>
+                        <a:srgbClr val="D7E1DE"/>
+                      </a:solidFill>
+                      <a:prstDash val="solid"/>
+                    </a:lnT>
+                    <a:lnB w="9525">
+                      <a:solidFill>
+                        <a:srgbClr val="D7E1DE"/>
+                      </a:solidFill>
+                      <a:prstDash val="solid"/>
+                    </a:lnB>
+                    <a:solidFill>
+                      <a:srgbClr val="102B3F"/>
+                    </a:solidFill>
+                  </a:tcPr>
+                </a:tc>
+                <a:tc>
+                  <a:txBody>
+                    <a:bodyPr/>
+                    <a:lstStyle/>
+                    <a:p>
+                      <a:r>
+                        <a:rPr sz="1800" b="1">
+                          <a:solidFill>
+                            <a:srgbClr val="FFFFFF"/>
+                          </a:solidFill>
+                          <a:latin typeface="Aptos"/>
+                          <a:ea typeface="Aptos"/>
+                          <a:cs typeface="Aptos"/>
+                        </a:rPr>
+                        <a:t>F1</a:t>
+                      </a:r>
+                    </a:p>
+                  </a:txBody>
+                  <a:tcPr marL="91440" marR="91440" marT="45720" marB="45720">
+                    <a:lnR w="9525">
+                      <a:solidFill>
+                        <a:srgbClr val="D7E1DE"/>
+                      </a:solidFill>
+                      <a:prstDash val="solid"/>
+                    </a:lnR>
+                    <a:lnT w="9525">
+                      <a:solidFill>
+                        <a:srgbClr val="D7E1DE"/>
+                      </a:solidFill>
+                      <a:prstDash val="solid"/>
+                    </a:lnT>
+                    <a:lnB w="9525">
+                      <a:solidFill>
+                        <a:srgbClr val="D7E1DE"/>
+                      </a:solidFill>
+                      <a:prstDash val="solid"/>
+                    </a:lnB>
+                    <a:solidFill>
+                      <a:srgbClr val="102B3F"/>
+                    </a:solidFill>
+                  </a:tcPr>
+                </a:tc>
+                <a:tc>
+                  <a:txBody>
+                    <a:bodyPr/>
+                    <a:lstStyle/>
+                    <a:p>
+                      <a:r>
+                        <a:rPr sz="1800" b="1">
+                          <a:solidFill>
+                            <a:srgbClr val="FFFFFF"/>
+                          </a:solidFill>
+                          <a:latin typeface="Aptos"/>
+                          <a:ea typeface="Aptos"/>
+                          <a:cs typeface="Aptos"/>
+                        </a:rPr>
+                        <a:t>ROC-AUC</a:t>
+                      </a:r>
+                    </a:p>
+                  </a:txBody>
+                  <a:tcPr marL="91440" marR="91440" marT="45720" marB="45720">
+                    <a:lnR w="9525">
+                      <a:solidFill>
+                        <a:srgbClr val="D7E1DE"/>
+                      </a:solidFill>
+                      <a:prstDash val="solid"/>
+                    </a:lnR>
+                    <a:lnT w="9525">
+                      <a:solidFill>
+                        <a:srgbClr val="D7E1DE"/>
+                      </a:solidFill>
+                      <a:prstDash val="solid"/>
+                    </a:lnT>
+                    <a:lnB w="9525">
+                      <a:solidFill>
+                        <a:srgbClr val="D7E1DE"/>
+                      </a:solidFill>
+                      <a:prstDash val="solid"/>
+                    </a:lnB>
+                    <a:solidFill>
+                      <a:srgbClr val="102B3F"/>
+                    </a:solidFill>
+                  </a:tcPr>
+                </a:tc>
+              </a:tr>
+              <a:tr h="555625">
+                <a:tc>
+                  <a:txBody>
+                    <a:bodyPr/>
+                    <a:lstStyle/>
+                    <a:p>
+                      <a:r>
+                        <a:rPr sz="1800" b="0">
+                          <a:solidFill>
+                            <a:srgbClr val="102B3F"/>
+                          </a:solidFill>
+                          <a:latin typeface="Aptos"/>
+                          <a:ea typeface="Aptos"/>
+                          <a:cs typeface="Aptos"/>
+                        </a:rPr>
+                        <a:t>Logistic regression</a:t>
+                      </a:r>
+                    </a:p>
+                  </a:txBody>
+                  <a:tcPr marL="91440" marR="91440" marT="45720" marB="45720">
+                    <a:lnL w="9525">
+                      <a:solidFill>
+                        <a:srgbClr val="D7E1DE"/>
+                      </a:solidFill>
+                      <a:prstDash val="solid"/>
+                    </a:lnL>
+                    <a:lnR w="9525">
+                      <a:solidFill>
+                        <a:srgbClr val="D7E1DE"/>
+                      </a:solidFill>
+                      <a:prstDash val="solid"/>
+                    </a:lnR>
+                    <a:lnB w="9525">
+                      <a:solidFill>
+                        <a:srgbClr val="D7E1DE"/>
+                      </a:solidFill>
+                      <a:prstDash val="solid"/>
+                    </a:lnB>
+                    <a:solidFill>
+                      <a:srgbClr val="F4F8F7"/>
+                    </a:solidFill>
+                  </a:tcPr>
+                </a:tc>
+                <a:tc>
+                  <a:txBody>
+                    <a:bodyPr/>
+                    <a:lstStyle/>
+                    <a:p>
+                      <a:r>
+                        <a:rPr sz="1800" b="0">
+                          <a:solidFill>
+                            <a:srgbClr val="102B3F"/>
+                          </a:solidFill>
+                          <a:latin typeface="Aptos"/>
+                          <a:ea typeface="Aptos"/>
+                          <a:cs typeface="Aptos"/>
+                        </a:rPr>
+                        <a:t>0.51</a:t>
+                      </a:r>
+                    </a:p>
+                  </a:txBody>
+                  <a:tcPr marL="91440" marR="91440" marT="45720" marB="45720">
+                    <a:lnR w="9525">
+                      <a:solidFill>
+                        <a:srgbClr val="D7E1DE"/>
+                      </a:solidFill>
+                      <a:prstDash val="solid"/>
+                    </a:lnR>
+                    <a:lnB w="9525">
+                      <a:solidFill>
+                        <a:srgbClr val="D7E1DE"/>
+                      </a:solidFill>
+                      <a:prstDash val="solid"/>
+                    </a:lnB>
+                    <a:solidFill>
+                      <a:srgbClr val="F4F8F7"/>
+                    </a:solidFill>
+                  </a:tcPr>
+                </a:tc>
+                <a:tc>
+                  <a:txBody>
+                    <a:bodyPr/>
+                    <a:lstStyle/>
+                    <a:p>
+                      <a:r>
+                        <a:rPr sz="1800" b="0">
+                          <a:solidFill>
+                            <a:srgbClr val="102B3F"/>
+                          </a:solidFill>
+                          <a:latin typeface="Aptos"/>
+                          <a:ea typeface="Aptos"/>
+                          <a:cs typeface="Aptos"/>
+                        </a:rPr>
+                        <a:t>0.8315</a:t>
+                      </a:r>
+                    </a:p>
+                  </a:txBody>
+                  <a:tcPr marL="91440" marR="91440" marT="45720" marB="45720">
+                    <a:lnR w="9525">
+                      <a:solidFill>
+                        <a:srgbClr val="D7E1DE"/>
+                      </a:solidFill>
+                      <a:prstDash val="solid"/>
+                    </a:lnR>
+                    <a:lnB w="9525">
+                      <a:solidFill>
+                        <a:srgbClr val="D7E1DE"/>
+                      </a:solidFill>
+                      <a:prstDash val="solid"/>
+                    </a:lnB>
+                    <a:solidFill>
+                      <a:srgbClr val="F4F8F7"/>
+                    </a:solidFill>
+                  </a:tcPr>
+                </a:tc>
+                <a:tc>
+                  <a:txBody>
+                    <a:bodyPr/>
+                    <a:lstStyle/>
+                    <a:p>
+                      <a:r>
+                        <a:rPr sz="1800" b="0">
+                          <a:solidFill>
+                            <a:srgbClr val="102B3F"/>
+                          </a:solidFill>
+                          <a:latin typeface="Aptos"/>
+                          <a:ea typeface="Aptos"/>
+                          <a:cs typeface="Aptos"/>
+                        </a:rPr>
+                        <a:t>0.8824</a:t>
+                      </a:r>
+                    </a:p>
+                  </a:txBody>
+                  <a:tcPr marL="91440" marR="91440" marT="45720" marB="45720">
+                    <a:lnR w="9525">
+                      <a:solidFill>
+                        <a:srgbClr val="D7E1DE"/>
+                      </a:solidFill>
+                      <a:prstDash val="solid"/>
+                    </a:lnR>
+                    <a:lnB w="9525">
+                      <a:solidFill>
+                        <a:srgbClr val="D7E1DE"/>
+                      </a:solidFill>
+                      <a:prstDash val="solid"/>
+                    </a:lnB>
+                    <a:solidFill>
+                      <a:srgbClr val="F4F8F7"/>
+                    </a:solidFill>
+                  </a:tcPr>
+                </a:tc>
+                <a:tc>
+                  <a:txBody>
+                    <a:bodyPr/>
+                    <a:lstStyle/>
+                    <a:p>
+                      <a:r>
+                        <a:rPr sz="1800" b="0">
+                          <a:solidFill>
+                            <a:srgbClr val="102B3F"/>
+                          </a:solidFill>
+                          <a:latin typeface="Aptos"/>
+                          <a:ea typeface="Aptos"/>
+                          <a:cs typeface="Aptos"/>
+                        </a:rPr>
+                        <a:t>0.8531</a:t>
+                      </a:r>
+                    </a:p>
+                  </a:txBody>
+                  <a:tcPr marL="91440" marR="91440" marT="45720" marB="45720">
+                    <a:lnR w="9525">
+                      <a:solidFill>
+                        <a:srgbClr val="D7E1DE"/>
+                      </a:solidFill>
+                      <a:prstDash val="solid"/>
+                    </a:lnR>
+                    <a:lnB w="9525">
+                      <a:solidFill>
+                        <a:srgbClr val="D7E1DE"/>
+                      </a:solidFill>
+                      <a:prstDash val="solid"/>
+                    </a:lnB>
+                    <a:solidFill>
+                      <a:srgbClr val="F4F8F7"/>
+                    </a:solidFill>
+                  </a:tcPr>
+                </a:tc>
+                <a:tc>
+                  <a:txBody>
+                    <a:bodyPr/>
+                    <a:lstStyle/>
+                    <a:p>
+                      <a:r>
+                        <a:rPr sz="1800" b="0">
+                          <a:solidFill>
+                            <a:srgbClr val="102B3F"/>
+                          </a:solidFill>
+                          <a:latin typeface="Aptos"/>
+                          <a:ea typeface="Aptos"/>
+                          <a:cs typeface="Aptos"/>
+                        </a:rPr>
+                        <a:t>0.9125</a:t>
+                      </a:r>
+                    </a:p>
+                  </a:txBody>
+                  <a:tcPr marL="91440" marR="91440" marT="45720" marB="45720">
+                    <a:lnR w="9525">
+                      <a:solidFill>
+                        <a:srgbClr val="D7E1DE"/>
+                      </a:solidFill>
+                      <a:prstDash val="solid"/>
+                    </a:lnR>
+                    <a:lnB w="9525">
+                      <a:solidFill>
+                        <a:srgbClr val="D7E1DE"/>
+                      </a:solidFill>
+                      <a:prstDash val="solid"/>
+                    </a:lnB>
+                    <a:solidFill>
+                      <a:srgbClr val="F4F8F7"/>
+                    </a:solidFill>
+                  </a:tcPr>
+                </a:tc>
+              </a:tr>
+              <a:tr h="555625">
+                <a:tc>
+                  <a:txBody>
+                    <a:bodyPr/>
+                    <a:lstStyle/>
+                    <a:p>
+                      <a:r>
+                        <a:rPr sz="1800" b="1">
+                          <a:solidFill>
+                            <a:srgbClr val="102B3F"/>
+                          </a:solidFill>
+                          <a:latin typeface="Aptos"/>
+                          <a:ea typeface="Aptos"/>
+                          <a:cs typeface="Aptos"/>
+                        </a:rPr>
+                        <a:t>Random forest</a:t>
+                      </a:r>
+                    </a:p>
+                  </a:txBody>
+                  <a:tcPr marL="91440" marR="91440" marT="45720" marB="45720">
+                    <a:lnL w="9525">
+                      <a:solidFill>
+                        <a:srgbClr val="D7E1DE"/>
+                      </a:solidFill>
+                      <a:prstDash val="solid"/>
+                    </a:lnL>
+                    <a:lnR w="9525">
+                      <a:solidFill>
+                        <a:srgbClr val="D7E1DE"/>
+                      </a:solidFill>
+                      <a:prstDash val="solid"/>
+                    </a:lnR>
+                    <a:lnB w="9525">
+                      <a:solidFill>
+                        <a:srgbClr val="D7E1DE"/>
+                      </a:solidFill>
+                      <a:prstDash val="solid"/>
+                    </a:lnB>
+                    <a:solidFill>
+                      <a:srgbClr val="DFEEEA"/>
+                    </a:solidFill>
+                  </a:tcPr>
+                </a:tc>
+                <a:tc>
+                  <a:txBody>
+                    <a:bodyPr/>
+                    <a:lstStyle/>
+                    <a:p>
+                      <a:r>
+                        <a:rPr sz="1800" b="1">
+                          <a:solidFill>
+                            <a:srgbClr val="102B3F"/>
+                          </a:solidFill>
+                          <a:latin typeface="Aptos"/>
+                          <a:ea typeface="Aptos"/>
+                          <a:cs typeface="Aptos"/>
+                        </a:rPr>
+                        <a:t>0.38</a:t>
+                      </a:r>
+                    </a:p>
+                  </a:txBody>
+                  <a:tcPr marL="91440" marR="91440" marT="45720" marB="45720">
+                    <a:lnR w="9525">
+                      <a:solidFill>
+                        <a:srgbClr val="D7E1DE"/>
+                      </a:solidFill>
+                      <a:prstDash val="solid"/>
+                    </a:lnR>
+                    <a:lnB w="9525">
+                      <a:solidFill>
+                        <a:srgbClr val="D7E1DE"/>
+                      </a:solidFill>
+                      <a:prstDash val="solid"/>
+                    </a:lnB>
+                    <a:solidFill>
+                      <a:srgbClr val="DFEEEA"/>
+                    </a:solidFill>
+                  </a:tcPr>
+                </a:tc>
+                <a:tc>
+                  <a:txBody>
+                    <a:bodyPr/>
+                    <a:lstStyle/>
+                    <a:p>
+                      <a:r>
+                        <a:rPr sz="1800" b="1">
+                          <a:solidFill>
+                            <a:srgbClr val="102B3F"/>
+                          </a:solidFill>
+                          <a:latin typeface="Aptos"/>
+                          <a:ea typeface="Aptos"/>
+                          <a:cs typeface="Aptos"/>
+                        </a:rPr>
+                        <a:t>0.8043</a:t>
+                      </a:r>
+                    </a:p>
+                  </a:txBody>
+                  <a:tcPr marL="91440" marR="91440" marT="45720" marB="45720">
+                    <a:lnR w="9525">
+                      <a:solidFill>
+                        <a:srgbClr val="D7E1DE"/>
+                      </a:solidFill>
+                      <a:prstDash val="solid"/>
+                    </a:lnR>
+                    <a:lnB w="9525">
+                      <a:solidFill>
+                        <a:srgbClr val="D7E1DE"/>
+                      </a:solidFill>
+                      <a:prstDash val="solid"/>
+                    </a:lnB>
+                    <a:solidFill>
+                      <a:srgbClr val="DFEEEA"/>
+                    </a:solidFill>
+                  </a:tcPr>
+                </a:tc>
+                <a:tc>
+                  <a:txBody>
+                    <a:bodyPr/>
+                    <a:lstStyle/>
+                    <a:p>
+                      <a:r>
+                        <a:rPr sz="1800" b="1">
+                          <a:solidFill>
+                            <a:srgbClr val="102B3F"/>
+                          </a:solidFill>
+                          <a:latin typeface="Aptos"/>
+                          <a:ea typeface="Aptos"/>
+                          <a:cs typeface="Aptos"/>
+                        </a:rPr>
+                        <a:t>0.9608</a:t>
+                      </a:r>
+                    </a:p>
+                  </a:txBody>
+                  <a:tcPr marL="91440" marR="91440" marT="45720" marB="45720">
+                    <a:lnR w="9525">
+                      <a:solidFill>
+                        <a:srgbClr val="D7E1DE"/>
+                      </a:solidFill>
+                      <a:prstDash val="solid"/>
+                    </a:lnR>
+                    <a:lnB w="9525">
+                      <a:solidFill>
+                        <a:srgbClr val="D7E1DE"/>
+                      </a:solidFill>
+                      <a:prstDash val="solid"/>
+                    </a:lnB>
+                    <a:solidFill>
+                      <a:srgbClr val="DFEEEA"/>
+                    </a:solidFill>
+                  </a:tcPr>
+                </a:tc>
+                <a:tc>
+                  <a:txBody>
+                    <a:bodyPr/>
+                    <a:lstStyle/>
+                    <a:p>
+                      <a:r>
+                        <a:rPr sz="1800" b="1">
+                          <a:solidFill>
+                            <a:srgbClr val="102B3F"/>
+                          </a:solidFill>
+                          <a:latin typeface="Aptos"/>
+                          <a:ea typeface="Aptos"/>
+                          <a:cs typeface="Aptos"/>
+                        </a:rPr>
+                        <a:t>0.8448</a:t>
+                      </a:r>
+                    </a:p>
+                  </a:txBody>
+                  <a:tcPr marL="91440" marR="91440" marT="45720" marB="45720">
+                    <a:lnR w="9525">
+                      <a:solidFill>
+                        <a:srgbClr val="D7E1DE"/>
+                      </a:solidFill>
+                      <a:prstDash val="solid"/>
+                    </a:lnR>
+                    <a:lnB w="9525">
+                      <a:solidFill>
+                        <a:srgbClr val="D7E1DE"/>
+                      </a:solidFill>
+                      <a:prstDash val="solid"/>
+                    </a:lnB>
+                    <a:solidFill>
+                      <a:srgbClr val="DFEEEA"/>
+                    </a:solidFill>
+                  </a:tcPr>
+                </a:tc>
+                <a:tc>
+                  <a:txBody>
+                    <a:bodyPr/>
+                    <a:lstStyle/>
+                    <a:p>
+                      <a:r>
+                        <a:rPr sz="1800" b="1">
+                          <a:solidFill>
+                            <a:srgbClr val="102B3F"/>
+                          </a:solidFill>
+                          <a:latin typeface="Aptos"/>
+                          <a:ea typeface="Aptos"/>
+                          <a:cs typeface="Aptos"/>
+                        </a:rPr>
+                        <a:t>0.9029</a:t>
+                      </a:r>
+                    </a:p>
+                  </a:txBody>
+                  <a:tcPr marL="91440" marR="91440" marT="45720" marB="45720">
+                    <a:lnR w="9525">
+                      <a:solidFill>
+                        <a:srgbClr val="D7E1DE"/>
+                      </a:solidFill>
+                      <a:prstDash val="solid"/>
+                    </a:lnR>
+                    <a:lnB w="9525">
+                      <a:solidFill>
+                        <a:srgbClr val="D7E1DE"/>
+                      </a:solidFill>
+                      <a:prstDash val="solid"/>
+                    </a:lnB>
+                    <a:solidFill>
+                      <a:srgbClr val="DFEEEA"/>
+                    </a:solidFill>
+                  </a:tcPr>
+                </a:tc>
+              </a:tr>
+              <a:tr h="555625">
+                <a:tc>
+                  <a:txBody>
+                    <a:bodyPr/>
+                    <a:lstStyle/>
+                    <a:p>
+                      <a:r>
+                        <a:rPr sz="1800" b="0">
+                          <a:solidFill>
+                            <a:srgbClr val="102B3F"/>
+                          </a:solidFill>
+                          <a:latin typeface="Aptos"/>
+                          <a:ea typeface="Aptos"/>
+                          <a:cs typeface="Aptos"/>
+                        </a:rPr>
+                        <a:t>HGB</a:t>
+                      </a:r>
+                    </a:p>
+                  </a:txBody>
+                  <a:tcPr marL="91440" marR="91440" marT="45720" marB="45720">
+                    <a:lnL w="9525">
+                      <a:solidFill>
+                        <a:srgbClr val="D7E1DE"/>
+                      </a:solidFill>
+                      <a:prstDash val="solid"/>
+                    </a:lnL>
+                    <a:lnR w="9525">
+                      <a:solidFill>
+                        <a:srgbClr val="D7E1DE"/>
+                      </a:solidFill>
+                      <a:prstDash val="solid"/>
+                    </a:lnR>
+                    <a:lnB w="9525">
+                      <a:solidFill>
+                        <a:srgbClr val="D7E1DE"/>
+                      </a:solidFill>
+                      <a:prstDash val="solid"/>
+                    </a:lnB>
+                    <a:solidFill>
+                      <a:srgbClr val="F4F8F7"/>
+                    </a:solidFill>
+                  </a:tcPr>
+                </a:tc>
+                <a:tc>
+                  <a:txBody>
+                    <a:bodyPr/>
+                    <a:lstStyle/>
+                    <a:p>
+                      <a:r>
+                        <a:rPr sz="1800" b="0">
+                          <a:solidFill>
+                            <a:srgbClr val="102B3F"/>
+                          </a:solidFill>
+                          <a:latin typeface="Aptos"/>
+                          <a:ea typeface="Aptos"/>
+                          <a:cs typeface="Aptos"/>
+                        </a:rPr>
+                        <a:t>0.37</a:t>
+                      </a:r>
+                    </a:p>
+                  </a:txBody>
+                  <a:tcPr marL="91440" marR="91440" marT="45720" marB="45720">
+                    <a:lnR w="9525">
+                      <a:solidFill>
+                        <a:srgbClr val="D7E1DE"/>
+                      </a:solidFill>
+                      <a:prstDash val="solid"/>
+                    </a:lnR>
+                    <a:lnB w="9525">
+                      <a:solidFill>
+                        <a:srgbClr val="D7E1DE"/>
+                      </a:solidFill>
+                      <a:prstDash val="solid"/>
+                    </a:lnB>
+                    <a:solidFill>
+                      <a:srgbClr val="F4F8F7"/>
+                    </a:solidFill>
+                  </a:tcPr>
+                </a:tc>
+                <a:tc>
+                  <a:txBody>
+                    <a:bodyPr/>
+                    <a:lstStyle/>
+                    <a:p>
+                      <a:r>
+                        <a:rPr sz="1800" b="0">
+                          <a:solidFill>
+                            <a:srgbClr val="102B3F"/>
+                          </a:solidFill>
+                          <a:latin typeface="Aptos"/>
+                          <a:ea typeface="Aptos"/>
+                          <a:cs typeface="Aptos"/>
+                        </a:rPr>
+                        <a:t>0.8152</a:t>
+                      </a:r>
+                    </a:p>
+                  </a:txBody>
+                  <a:tcPr marL="91440" marR="91440" marT="45720" marB="45720">
+                    <a:lnR w="9525">
+                      <a:solidFill>
+                        <a:srgbClr val="D7E1DE"/>
+                      </a:solidFill>
+                      <a:prstDash val="solid"/>
+                    </a:lnR>
+                    <a:lnB w="9525">
+                      <a:solidFill>
+                        <a:srgbClr val="D7E1DE"/>
+                      </a:solidFill>
+                      <a:prstDash val="solid"/>
+                    </a:lnB>
+                    <a:solidFill>
+                      <a:srgbClr val="F4F8F7"/>
+                    </a:solidFill>
+                  </a:tcPr>
+                </a:tc>
+                <a:tc>
+                  <a:txBody>
+                    <a:bodyPr/>
+                    <a:lstStyle/>
+                    <a:p>
+                      <a:r>
+                        <a:rPr sz="1800" b="0">
+                          <a:solidFill>
+                            <a:srgbClr val="102B3F"/>
+                          </a:solidFill>
+                          <a:latin typeface="Aptos"/>
+                          <a:ea typeface="Aptos"/>
+                          <a:cs typeface="Aptos"/>
+                        </a:rPr>
+                        <a:t>0.9510</a:t>
+                      </a:r>
+                    </a:p>
+                  </a:txBody>
+                  <a:tcPr marL="91440" marR="91440" marT="45720" marB="45720">
+                    <a:lnR w="9525">
+                      <a:solidFill>
+                        <a:srgbClr val="D7E1DE"/>
+                      </a:solidFill>
+                      <a:prstDash val="solid"/>
+                    </a:lnR>
+                    <a:lnB w="9525">
+                      <a:solidFill>
+                        <a:srgbClr val="D7E1DE"/>
+                      </a:solidFill>
+                      <a:prstDash val="solid"/>
+                    </a:lnB>
+                    <a:solidFill>
+                      <a:srgbClr val="F4F8F7"/>
+                    </a:solidFill>
+                  </a:tcPr>
+                </a:tc>
+                <a:tc>
+                  <a:txBody>
+                    <a:bodyPr/>
+                    <a:lstStyle/>
+                    <a:p>
+                      <a:r>
+                        <a:rPr sz="1800" b="0">
+                          <a:solidFill>
+                            <a:srgbClr val="102B3F"/>
+                          </a:solidFill>
+                          <a:latin typeface="Aptos"/>
+                          <a:ea typeface="Aptos"/>
+                          <a:cs typeface="Aptos"/>
+                        </a:rPr>
+                        <a:t>0.8509</a:t>
+                      </a:r>
+                    </a:p>
+                  </a:txBody>
+                  <a:tcPr marL="91440" marR="91440" marT="45720" marB="45720">
+                    <a:lnR w="9525">
+                      <a:solidFill>
+                        <a:srgbClr val="D7E1DE"/>
+                      </a:solidFill>
+                      <a:prstDash val="solid"/>
+                    </a:lnR>
+                    <a:lnB w="9525">
+                      <a:solidFill>
+                        <a:srgbClr val="D7E1DE"/>
+                      </a:solidFill>
+                      <a:prstDash val="solid"/>
+                    </a:lnB>
+                    <a:solidFill>
+                      <a:srgbClr val="F4F8F7"/>
+                    </a:solidFill>
+                  </a:tcPr>
+                </a:tc>
+                <a:tc>
+                  <a:txBody>
+                    <a:bodyPr/>
+                    <a:lstStyle/>
+                    <a:p>
+                      <a:r>
+                        <a:rPr sz="1800" b="0">
+                          <a:solidFill>
+                            <a:srgbClr val="102B3F"/>
+                          </a:solidFill>
+                          <a:latin typeface="Aptos"/>
+                          <a:ea typeface="Aptos"/>
+                          <a:cs typeface="Aptos"/>
+                        </a:rPr>
+                        <a:t>0.8945</a:t>
+                      </a:r>
+                    </a:p>
+                  </a:txBody>
+                  <a:tcPr marL="91440" marR="91440" marT="45720" marB="45720">
+                    <a:lnR w="9525">
+                      <a:solidFill>
+                        <a:srgbClr val="D7E1DE"/>
+                      </a:solidFill>
+                      <a:prstDash val="solid"/>
+                    </a:lnR>
+                    <a:lnB w="9525">
+                      <a:solidFill>
+                        <a:srgbClr val="D7E1DE"/>
+                      </a:solidFill>
+                      <a:prstDash val="solid"/>
+                    </a:lnB>
+                    <a:solidFill>
+                      <a:srgbClr val="F4F8F7"/>
+                    </a:solidFill>
+                  </a:tcPr>
+                </a:tc>
+              </a:tr>
+              <a:tr h="555625">
+                <a:tc>
+                  <a:txBody>
+                    <a:bodyPr/>
+                    <a:lstStyle/>
+                    <a:p>
+                      <a:r>
+                        <a:rPr sz="1800" b="0">
+                          <a:solidFill>
+                            <a:srgbClr val="102B3F"/>
+                          </a:solidFill>
+                          <a:latin typeface="Aptos"/>
+                          <a:ea typeface="Aptos"/>
+                          <a:cs typeface="Aptos"/>
+                        </a:rPr>
+                        <a:t>XGBoost</a:t>
+                      </a:r>
+                    </a:p>
+                  </a:txBody>
+                  <a:tcPr marL="91440" marR="91440" marT="45720" marB="45720">
+                    <a:lnL w="9525">
+                      <a:solidFill>
+                        <a:srgbClr val="D7E1DE"/>
+                      </a:solidFill>
+                      <a:prstDash val="solid"/>
+                    </a:lnL>
+                    <a:lnR w="9525">
+                      <a:solidFill>
+                        <a:srgbClr val="D7E1DE"/>
+                      </a:solidFill>
+                      <a:prstDash val="solid"/>
+                    </a:lnR>
+                    <a:lnB w="9525">
+                      <a:solidFill>
+                        <a:srgbClr val="D7E1DE"/>
+                      </a:solidFill>
+                      <a:prstDash val="solid"/>
+                    </a:lnB>
+                    <a:solidFill>
+                      <a:srgbClr val="F4F8F7"/>
+                    </a:solidFill>
+                  </a:tcPr>
+                </a:tc>
+                <a:tc>
+                  <a:txBody>
+                    <a:bodyPr/>
+                    <a:lstStyle/>
+                    <a:p>
+                      <a:r>
+                        <a:rPr sz="1800" b="0">
+                          <a:solidFill>
+                            <a:srgbClr val="102B3F"/>
+                          </a:solidFill>
+                          <a:latin typeface="Aptos"/>
+                          <a:ea typeface="Aptos"/>
+                          <a:cs typeface="Aptos"/>
+                        </a:rPr>
+                        <a:t>0.34</a:t>
+                      </a:r>
+                    </a:p>
+                  </a:txBody>
+                  <a:tcPr marL="91440" marR="91440" marT="45720" marB="45720">
+                    <a:lnR w="9525">
+                      <a:solidFill>
+                        <a:srgbClr val="D7E1DE"/>
+                      </a:solidFill>
+                      <a:prstDash val="solid"/>
+                    </a:lnR>
+                    <a:lnB w="9525">
+                      <a:solidFill>
+                        <a:srgbClr val="D7E1DE"/>
+                      </a:solidFill>
+                      <a:prstDash val="solid"/>
+                    </a:lnB>
+                    <a:solidFill>
+                      <a:srgbClr val="F4F8F7"/>
+                    </a:solidFill>
+                  </a:tcPr>
+                </a:tc>
+                <a:tc>
+                  <a:txBody>
+                    <a:bodyPr/>
+                    <a:lstStyle/>
+                    <a:p>
+                      <a:r>
+                        <a:rPr sz="1800" b="0">
+                          <a:solidFill>
+                            <a:srgbClr val="102B3F"/>
+                          </a:solidFill>
+                          <a:latin typeface="Aptos"/>
+                          <a:ea typeface="Aptos"/>
+                          <a:cs typeface="Aptos"/>
+                        </a:rPr>
+                        <a:t>0.8043</a:t>
+                      </a:r>
+                    </a:p>
+                  </a:txBody>
+                  <a:tcPr marL="91440" marR="91440" marT="45720" marB="45720">
+                    <a:lnR w="9525">
+                      <a:solidFill>
+                        <a:srgbClr val="D7E1DE"/>
+                      </a:solidFill>
+                      <a:prstDash val="solid"/>
+                    </a:lnR>
+                    <a:lnB w="9525">
+                      <a:solidFill>
+                        <a:srgbClr val="D7E1DE"/>
+                      </a:solidFill>
+                      <a:prstDash val="solid"/>
+                    </a:lnB>
+                    <a:solidFill>
+                      <a:srgbClr val="F4F8F7"/>
+                    </a:solidFill>
+                  </a:tcPr>
+                </a:tc>
+                <a:tc>
+                  <a:txBody>
+                    <a:bodyPr/>
+                    <a:lstStyle/>
+                    <a:p>
+                      <a:r>
+                        <a:rPr sz="1800" b="0">
+                          <a:solidFill>
+                            <a:srgbClr val="102B3F"/>
+                          </a:solidFill>
+                          <a:latin typeface="Aptos"/>
+                          <a:ea typeface="Aptos"/>
+                          <a:cs typeface="Aptos"/>
+                        </a:rPr>
+                        <a:t>0.9804</a:t>
+                      </a:r>
+                    </a:p>
+                  </a:txBody>
+                  <a:tcPr marL="91440" marR="91440" marT="45720" marB="45720">
+                    <a:lnR w="9525">
+                      <a:solidFill>
+                        <a:srgbClr val="D7E1DE"/>
+                      </a:solidFill>
+                      <a:prstDash val="solid"/>
+                    </a:lnR>
+                    <a:lnB w="9525">
+                      <a:solidFill>
+                        <a:srgbClr val="D7E1DE"/>
+                      </a:solidFill>
+                      <a:prstDash val="solid"/>
+                    </a:lnB>
+                    <a:solidFill>
+                      <a:srgbClr val="F4F8F7"/>
+                    </a:solidFill>
+                  </a:tcPr>
+                </a:tc>
+                <a:tc>
+                  <a:txBody>
+                    <a:bodyPr/>
+                    <a:lstStyle/>
+                    <a:p>
+                      <a:r>
+                        <a:rPr sz="1800" b="0">
+                          <a:solidFill>
+                            <a:srgbClr val="102B3F"/>
+                          </a:solidFill>
+                          <a:latin typeface="Aptos"/>
+                          <a:ea typeface="Aptos"/>
+                          <a:cs typeface="Aptos"/>
+                        </a:rPr>
+                        <a:t>0.8475</a:t>
+                      </a:r>
+                    </a:p>
+                  </a:txBody>
+                  <a:tcPr marL="91440" marR="91440" marT="45720" marB="45720">
+                    <a:lnR w="9525">
+                      <a:solidFill>
+                        <a:srgbClr val="D7E1DE"/>
+                      </a:solidFill>
+                      <a:prstDash val="solid"/>
+                    </a:lnR>
+                    <a:lnB w="9525">
+                      <a:solidFill>
+                        <a:srgbClr val="D7E1DE"/>
+                      </a:solidFill>
+                      <a:prstDash val="solid"/>
+                    </a:lnB>
+                    <a:solidFill>
+                      <a:srgbClr val="F4F8F7"/>
+                    </a:solidFill>
+                  </a:tcPr>
+                </a:tc>
+                <a:tc>
+                  <a:txBody>
+                    <a:bodyPr/>
+                    <a:lstStyle/>
+                    <a:p>
+                      <a:r>
+                        <a:rPr sz="1800" b="0">
+                          <a:solidFill>
+                            <a:srgbClr val="102B3F"/>
+                          </a:solidFill>
+                          <a:latin typeface="Aptos"/>
+                          <a:ea typeface="Aptos"/>
+                          <a:cs typeface="Aptos"/>
+                        </a:rPr>
+                        <a:t>0.9039</a:t>
+                      </a:r>
+                    </a:p>
+                  </a:txBody>
+                  <a:tcPr marL="91440" marR="91440" marT="45720" marB="45720">
+                    <a:lnR w="9525">
+                      <a:solidFill>
+                        <a:srgbClr val="D7E1DE"/>
+                      </a:solidFill>
+                      <a:prstDash val="solid"/>
+                    </a:lnR>
+                    <a:lnB w="9525">
+                      <a:solidFill>
+                        <a:srgbClr val="D7E1DE"/>
+                      </a:solidFill>
+                      <a:prstDash val="solid"/>
+                    </a:lnB>
+                    <a:solidFill>
+                      <a:srgbClr val="F4F8F7"/>
+                    </a:solidFill>
+                  </a:tcPr>
+                </a:tc>
+              </a:tr>
+              <a:tr h="555625">
+                <a:tc>
+                  <a:txBody>
+                    <a:bodyPr/>
+                    <a:lstStyle/>
+                    <a:p>
+                      <a:r>
+                        <a:rPr sz="1800" b="0">
+                          <a:solidFill>
+                            <a:srgbClr val="102B3F"/>
+                          </a:solidFill>
+                          <a:latin typeface="Aptos"/>
+                          <a:ea typeface="Aptos"/>
+                          <a:cs typeface="Aptos"/>
+                        </a:rPr>
+                        <a:t>BN (provisional)</a:t>
+                      </a:r>
+                    </a:p>
+                  </a:txBody>
+                  <a:tcPr marL="91440" marR="91440" marT="45720" marB="45720">
+                    <a:lnL w="9525">
+                      <a:solidFill>
+                        <a:srgbClr val="D7E1DE"/>
+                      </a:solidFill>
+                      <a:prstDash val="solid"/>
+                    </a:lnL>
+                    <a:lnR w="9525">
+                      <a:solidFill>
+                        <a:srgbClr val="D7E1DE"/>
+                      </a:solidFill>
+                      <a:prstDash val="solid"/>
+                    </a:lnR>
+                    <a:lnB w="9525">
+                      <a:solidFill>
+                        <a:srgbClr val="D7E1DE"/>
+                      </a:solidFill>
+                      <a:prstDash val="solid"/>
+                    </a:lnB>
+                    <a:solidFill>
+                      <a:srgbClr val="F4F8F7"/>
+                    </a:solidFill>
+                  </a:tcPr>
+                </a:tc>
+                <a:tc>
+                  <a:txBody>
+                    <a:bodyPr/>
+                    <a:lstStyle/>
+                    <a:p>
+                      <a:r>
+                        <a:rPr sz="1800" b="0">
+                          <a:solidFill>
+                            <a:srgbClr val="102B3F"/>
+                          </a:solidFill>
+                          <a:latin typeface="Aptos"/>
+                          <a:ea typeface="Aptos"/>
+                          <a:cs typeface="Aptos"/>
+                        </a:rPr>
+                        <a:t>0.54</a:t>
+                      </a:r>
+                    </a:p>
+                  </a:txBody>
+                  <a:tcPr marL="91440" marR="91440" marT="45720" marB="45720">
+                    <a:lnR w="9525">
+                      <a:solidFill>
+                        <a:srgbClr val="D7E1DE"/>
+                      </a:solidFill>
+                      <a:prstDash val="solid"/>
+                    </a:lnR>
+                    <a:lnB w="9525">
+                      <a:solidFill>
+                        <a:srgbClr val="D7E1DE"/>
+                      </a:solidFill>
+                      <a:prstDash val="solid"/>
+                    </a:lnB>
+                    <a:solidFill>
+                      <a:srgbClr val="F4F8F7"/>
+                    </a:solidFill>
+                  </a:tcPr>
+                </a:tc>
+                <a:tc>
+                  <a:txBody>
+                    <a:bodyPr/>
+                    <a:lstStyle/>
+                    <a:p>
+                      <a:r>
+                        <a:rPr sz="1800" b="0">
+                          <a:solidFill>
+                            <a:srgbClr val="102B3F"/>
+                          </a:solidFill>
+                          <a:latin typeface="Aptos"/>
+                          <a:ea typeface="Aptos"/>
+                          <a:cs typeface="Aptos"/>
+                        </a:rPr>
+                        <a:t>0.7880</a:t>
+                      </a:r>
+                    </a:p>
+                  </a:txBody>
+                  <a:tcPr marL="91440" marR="91440" marT="45720" marB="45720">
+                    <a:lnR w="9525">
+                      <a:solidFill>
+                        <a:srgbClr val="D7E1DE"/>
+                      </a:solidFill>
+                      <a:prstDash val="solid"/>
+                    </a:lnR>
+                    <a:lnB w="9525">
+                      <a:solidFill>
+                        <a:srgbClr val="D7E1DE"/>
+                      </a:solidFill>
+                      <a:prstDash val="solid"/>
+                    </a:lnB>
+                    <a:solidFill>
+                      <a:srgbClr val="F4F8F7"/>
+                    </a:solidFill>
+                  </a:tcPr>
+                </a:tc>
+                <a:tc>
+                  <a:txBody>
+                    <a:bodyPr/>
+                    <a:lstStyle/>
+                    <a:p>
+                      <a:r>
+                        <a:rPr sz="1800" b="0">
+                          <a:solidFill>
+                            <a:srgbClr val="102B3F"/>
+                          </a:solidFill>
+                          <a:latin typeface="Aptos"/>
+                          <a:ea typeface="Aptos"/>
+                          <a:cs typeface="Aptos"/>
+                        </a:rPr>
+                        <a:t>0.8137</a:t>
+                      </a:r>
+                    </a:p>
+                  </a:txBody>
+                  <a:tcPr marL="91440" marR="91440" marT="45720" marB="45720">
+                    <a:lnR w="9525">
+                      <a:solidFill>
+                        <a:srgbClr val="D7E1DE"/>
+                      </a:solidFill>
+                      <a:prstDash val="solid"/>
+                    </a:lnR>
+                    <a:lnB w="9525">
+                      <a:solidFill>
+                        <a:srgbClr val="D7E1DE"/>
+                      </a:solidFill>
+                      <a:prstDash val="solid"/>
+                    </a:lnB>
+                    <a:solidFill>
+                      <a:srgbClr val="F4F8F7"/>
+                    </a:solidFill>
+                  </a:tcPr>
+                </a:tc>
+                <a:tc>
+                  <a:txBody>
+                    <a:bodyPr/>
+                    <a:lstStyle/>
+                    <a:p>
+                      <a:r>
+                        <a:rPr sz="1800" b="0">
+                          <a:solidFill>
+                            <a:srgbClr val="102B3F"/>
+                          </a:solidFill>
+                          <a:latin typeface="Aptos"/>
+                          <a:ea typeface="Aptos"/>
+                          <a:cs typeface="Aptos"/>
+                        </a:rPr>
+                        <a:t>0.8098</a:t>
+                      </a:r>
+                    </a:p>
+                  </a:txBody>
+                  <a:tcPr marL="91440" marR="91440" marT="45720" marB="45720">
+                    <a:lnR w="9525">
+                      <a:solidFill>
+                        <a:srgbClr val="D7E1DE"/>
+                      </a:solidFill>
+                      <a:prstDash val="solid"/>
+                    </a:lnR>
+                    <a:lnB w="9525">
+                      <a:solidFill>
+                        <a:srgbClr val="D7E1DE"/>
+                      </a:solidFill>
+                      <a:prstDash val="solid"/>
+                    </a:lnB>
+                    <a:solidFill>
+                      <a:srgbClr val="F4F8F7"/>
+                    </a:solidFill>
+                  </a:tcPr>
+                </a:tc>
+                <a:tc>
+                  <a:txBody>
+                    <a:bodyPr/>
+                    <a:lstStyle/>
+                    <a:p>
+                      <a:r>
+                        <a:rPr sz="1800" b="0">
+                          <a:solidFill>
+                            <a:srgbClr val="102B3F"/>
+                          </a:solidFill>
+                          <a:latin typeface="Aptos"/>
+                          <a:ea typeface="Aptos"/>
+                          <a:cs typeface="Aptos"/>
+                        </a:rPr>
+                        <a:t>0.8765</a:t>
+                      </a:r>
+                    </a:p>
+                  </a:txBody>
+                  <a:tcPr marL="91440" marR="91440" marT="45720" marB="45720">
+                    <a:lnR w="9525">
+                      <a:solidFill>
+                        <a:srgbClr val="D7E1DE"/>
+                      </a:solidFill>
+                      <a:prstDash val="solid"/>
+                    </a:lnR>
+                    <a:lnB w="9525">
+                      <a:solidFill>
+                        <a:srgbClr val="D7E1DE"/>
+                      </a:solidFill>
+                      <a:prstDash val="solid"/>
+                    </a:lnB>
+                    <a:solidFill>
+                      <a:srgbClr val="F4F8F7"/>
+                    </a:solidFill>
+                  </a:tcPr>
+                </a:tc>
+              </a:tr>
+            </a:tbl>
+          </a:graphicData>
+        </a:graphic>
+      </p:graphicFrame>
     </p:spTree>
     <p:extLst>
       <p:ext uri="{BB962C8B-B14F-4D97-AF65-F5344CB8AC3E}">
@@ -6039,28 +10999,101 @@
           <a:bodyPr xmlns:a="http://schemas.openxmlformats.org/drawingml/2006/main" anchor="ctr"/>
           <a:lstStyle xmlns:a="http://schemas.openxmlformats.org/drawingml/2006/main">
             <a:defPPr>
+              <a:defRPr sz="2700" b="1">
+                <a:solidFill>
+                  <a:srgbClr val="102B3F"/>
+                </a:solidFill>
+              </a:defRPr>
+            </a:defPPr>
+            <a:lvl1pPr>
+              <a:buNone/>
               <a:defRPr sz="3150" b="1">
                 <a:solidFill>
                   <a:srgbClr val="102B3F"/>
                 </a:solidFill>
               </a:defRPr>
-            </a:defPPr>
+            </a:lvl1pPr>
+            <a:lvl2pPr>
+              <a:buNone/>
+              <a:defRPr sz="3150" b="1">
+                <a:solidFill>
+                  <a:srgbClr val="102B3F"/>
+                </a:solidFill>
+              </a:defRPr>
+            </a:lvl2pPr>
+            <a:lvl3pPr>
+              <a:buNone/>
+              <a:defRPr sz="3150" b="1">
+                <a:solidFill>
+                  <a:srgbClr val="102B3F"/>
+                </a:solidFill>
+              </a:defRPr>
+            </a:lvl3pPr>
+            <a:lvl4pPr>
+              <a:buNone/>
+              <a:defRPr sz="3150" b="1">
+                <a:solidFill>
+                  <a:srgbClr val="102B3F"/>
+                </a:solidFill>
+              </a:defRPr>
+            </a:lvl4pPr>
+            <a:lvl5pPr>
+              <a:buNone/>
+              <a:defRPr sz="3150" b="1">
+                <a:solidFill>
+                  <a:srgbClr val="102B3F"/>
+                </a:solidFill>
+              </a:defRPr>
+            </a:lvl5pPr>
+            <a:lvl6pPr>
+              <a:buNone/>
+              <a:defRPr sz="3150" b="1">
+                <a:solidFill>
+                  <a:srgbClr val="102B3F"/>
+                </a:solidFill>
+              </a:defRPr>
+            </a:lvl6pPr>
+            <a:lvl7pPr>
+              <a:buNone/>
+              <a:defRPr sz="3150" b="1">
+                <a:solidFill>
+                  <a:srgbClr val="102B3F"/>
+                </a:solidFill>
+              </a:defRPr>
+            </a:lvl7pPr>
+            <a:lvl8pPr>
+              <a:buNone/>
+              <a:defRPr sz="3150" b="1">
+                <a:solidFill>
+                  <a:srgbClr val="102B3F"/>
+                </a:solidFill>
+              </a:defRPr>
+            </a:lvl8pPr>
+            <a:lvl9pPr>
+              <a:buNone/>
+              <a:defRPr sz="3150" b="1">
+                <a:solidFill>
+                  <a:srgbClr val="102B3F"/>
+                </a:solidFill>
+              </a:defRPr>
+            </a:lvl9pPr>
           </a:lstStyle>
           <a:p xmlns:a="http://schemas.openxmlformats.org/drawingml/2006/main">
             <a:pPr>
-              <a:defRPr sz="3150" b="1">
+              <a:buNone/>
+              <a:defRPr sz="2700" b="1">
                 <a:solidFill>
                   <a:srgbClr val="102B3F"/>
                 </a:solidFill>
               </a:defRPr>
             </a:pPr>
             <a:r>
-              <a:rPr sz="3150" b="1">
+              <a:rPr sz="2700" b="1">
                 <a:solidFill>
                   <a:srgbClr val="102B3F"/>
                 </a:solidFill>
               </a:rPr>
-              <a:t>ROC-AUC by hospital (%)</a:t>
+              <a:t>Hospital F1 minus always-positive F1 (pp)</a:t>
             </a:r>
           </a:p>
         </p:txBody>
@@ -6103,9 +11136,82 @@
                 </a:solidFill>
               </a:defRPr>
             </a:defPPr>
+            <a:lvl1pPr>
+              <a:buNone/>
+              <a:defRPr sz="1125" b="0">
+                <a:solidFill>
+                  <a:srgbClr val="526674"/>
+                </a:solidFill>
+              </a:defRPr>
+            </a:lvl1pPr>
+            <a:lvl2pPr>
+              <a:buNone/>
+              <a:defRPr sz="1125" b="0">
+                <a:solidFill>
+                  <a:srgbClr val="526674"/>
+                </a:solidFill>
+              </a:defRPr>
+            </a:lvl2pPr>
+            <a:lvl3pPr>
+              <a:buNone/>
+              <a:defRPr sz="1125" b="0">
+                <a:solidFill>
+                  <a:srgbClr val="526674"/>
+                </a:solidFill>
+              </a:defRPr>
+            </a:lvl3pPr>
+            <a:lvl4pPr>
+              <a:buNone/>
+              <a:defRPr sz="1125" b="0">
+                <a:solidFill>
+                  <a:srgbClr val="526674"/>
+                </a:solidFill>
+              </a:defRPr>
+            </a:lvl4pPr>
+            <a:lvl5pPr>
+              <a:buNone/>
+              <a:defRPr sz="1125" b="0">
+                <a:solidFill>
+                  <a:srgbClr val="526674"/>
+                </a:solidFill>
+              </a:defRPr>
+            </a:lvl5pPr>
+            <a:lvl6pPr>
+              <a:buNone/>
+              <a:defRPr sz="1125" b="0">
+                <a:solidFill>
+                  <a:srgbClr val="526674"/>
+                </a:solidFill>
+              </a:defRPr>
+            </a:lvl6pPr>
+            <a:lvl7pPr>
+              <a:buNone/>
+              <a:defRPr sz="1125" b="0">
+                <a:solidFill>
+                  <a:srgbClr val="526674"/>
+                </a:solidFill>
+              </a:defRPr>
+            </a:lvl7pPr>
+            <a:lvl8pPr>
+              <a:buNone/>
+              <a:defRPr sz="1125" b="0">
+                <a:solidFill>
+                  <a:srgbClr val="526674"/>
+                </a:solidFill>
+              </a:defRPr>
+            </a:lvl8pPr>
+            <a:lvl9pPr>
+              <a:buNone/>
+              <a:defRPr sz="1125" b="0">
+                <a:solidFill>
+                  <a:srgbClr val="526674"/>
+                </a:solidFill>
+              </a:defRPr>
+            </a:lvl9pPr>
           </a:lstStyle>
           <a:p xmlns:a="http://schemas.openxmlformats.org/drawingml/2006/main">
             <a:pPr>
+              <a:buNone/>
               <a:defRPr sz="1125" b="0">
                 <a:solidFill>
                   <a:srgbClr val="526674"/>
@@ -6155,28 +11261,101 @@
           <a:bodyPr xmlns:a="http://schemas.openxmlformats.org/drawingml/2006/main" anchor="ctr"/>
           <a:lstStyle xmlns:a="http://schemas.openxmlformats.org/drawingml/2006/main">
             <a:defPPr>
-              <a:defRPr sz="1050" b="0">
+              <a:defRPr sz="1125" b="0">
                 <a:solidFill>
                   <a:srgbClr val="526674"/>
                 </a:solidFill>
               </a:defRPr>
             </a:defPPr>
+            <a:lvl1pPr>
+              <a:buNone/>
+              <a:defRPr sz="1125" b="0">
+                <a:solidFill>
+                  <a:srgbClr val="526674"/>
+                </a:solidFill>
+              </a:defRPr>
+            </a:lvl1pPr>
+            <a:lvl2pPr>
+              <a:buNone/>
+              <a:defRPr sz="1125" b="0">
+                <a:solidFill>
+                  <a:srgbClr val="526674"/>
+                </a:solidFill>
+              </a:defRPr>
+            </a:lvl2pPr>
+            <a:lvl3pPr>
+              <a:buNone/>
+              <a:defRPr sz="1125" b="0">
+                <a:solidFill>
+                  <a:srgbClr val="526674"/>
+                </a:solidFill>
+              </a:defRPr>
+            </a:lvl3pPr>
+            <a:lvl4pPr>
+              <a:buNone/>
+              <a:defRPr sz="1125" b="0">
+                <a:solidFill>
+                  <a:srgbClr val="526674"/>
+                </a:solidFill>
+              </a:defRPr>
+            </a:lvl4pPr>
+            <a:lvl5pPr>
+              <a:buNone/>
+              <a:defRPr sz="1125" b="0">
+                <a:solidFill>
+                  <a:srgbClr val="526674"/>
+                </a:solidFill>
+              </a:defRPr>
+            </a:lvl5pPr>
+            <a:lvl6pPr>
+              <a:buNone/>
+              <a:defRPr sz="1125" b="0">
+                <a:solidFill>
+                  <a:srgbClr val="526674"/>
+                </a:solidFill>
+              </a:defRPr>
+            </a:lvl6pPr>
+            <a:lvl7pPr>
+              <a:buNone/>
+              <a:defRPr sz="1125" b="0">
+                <a:solidFill>
+                  <a:srgbClr val="526674"/>
+                </a:solidFill>
+              </a:defRPr>
+            </a:lvl7pPr>
+            <a:lvl8pPr>
+              <a:buNone/>
+              <a:defRPr sz="1125" b="0">
+                <a:solidFill>
+                  <a:srgbClr val="526674"/>
+                </a:solidFill>
+              </a:defRPr>
+            </a:lvl8pPr>
+            <a:lvl9pPr>
+              <a:buNone/>
+              <a:defRPr sz="1125" b="0">
+                <a:solidFill>
+                  <a:srgbClr val="526674"/>
+                </a:solidFill>
+              </a:defRPr>
+            </a:lvl9pPr>
           </a:lstStyle>
           <a:p xmlns:a="http://schemas.openxmlformats.org/drawingml/2006/main">
             <a:pPr>
-              <a:defRPr sz="1050" b="0">
+              <a:buNone/>
+              <a:defRPr sz="1125" b="0">
                 <a:solidFill>
                   <a:srgbClr val="526674"/>
                 </a:solidFill>
               </a:defRPr>
             </a:pPr>
             <a:r>
-              <a:rPr sz="1050" b="0">
+              <a:rPr sz="1125" b="0">
                 <a:solidFill>
                   <a:srgbClr val="526674"/>
                 </a:solidFill>
               </a:rPr>
-              <a:t>Separate leave-one-hospital-out experiments; held-out threshold = 0.50</a:t>
+              <a:t>Local family and cutoff selected without the held-out hospital. Zero means equal positive-class F1.</a:t>
             </a:r>
           </a:p>
         </p:txBody>
@@ -6186,7 +11365,7 @@
           <p:cNvPr id="4" name="Chart">
             <a:extLst xmlns:a="http://schemas.openxmlformats.org/drawingml/2006/main">
               <a:ext uri="{FF2B5EF4-FFF2-40B4-BE49-F238E27FC236}">
-                <a16:creationId xmlns:a16="http://schemas.microsoft.com/office/drawing/2014/main" id="{3A93CFE4-1066-477E-998E-657B52E01A8C}"/>
+                <a16:creationId xmlns:a16="http://schemas.microsoft.com/office/drawing/2014/main" id="{61E8CE3C-17A7-4DC0-8889-934BD5B5A6A1}"/>
               </a:ext>
             </a:extLst>
           </p:cNvPr>
@@ -6199,7 +11378,7 @@
         </p:xfrm>
         <a:graphic xmlns:a="http://schemas.openxmlformats.org/drawingml/2006/main">
           <a:graphicData uri="http://schemas.openxmlformats.org/drawingml/2006/chart">
-            <c:chart xmlns:r="http://schemas.openxmlformats.org/officeDocument/2006/relationships" xmlns:c="http://schemas.openxmlformats.org/drawingml/2006/chart" r:id="R2119b2b6d25a49b8"/>
+            <c:chart xmlns:r="http://schemas.openxmlformats.org/officeDocument/2006/relationships" xmlns:c="http://schemas.openxmlformats.org/drawingml/2006/chart" r:id="Rfca4114b2ccd447b"/>
           </a:graphicData>
         </a:graphic>
       </p:graphicFrame>
@@ -6219,8 +11398,8 @@
         </p:nvSpPr>
         <p:spPr>
           <a:xfrm xmlns:a="http://schemas.openxmlformats.org/drawingml/2006/main">
-            <a:off x="857250" y="5524500"/>
-            <a:ext cx="10287000" cy="523875"/>
+            <a:off x="781050" y="5286375"/>
+            <a:ext cx="10382250" cy="857250"/>
           </a:xfrm>
           <a:prstGeom xmlns:a="http://schemas.openxmlformats.org/drawingml/2006/main" prst="rect">
             <a:avLst/>
@@ -6241,9 +11420,82 @@
                 </a:solidFill>
               </a:defRPr>
             </a:defPPr>
+            <a:lvl1pPr>
+              <a:buNone/>
+              <a:defRPr sz="1650" b="0">
+                <a:solidFill>
+                  <a:srgbClr val="526674"/>
+                </a:solidFill>
+              </a:defRPr>
+            </a:lvl1pPr>
+            <a:lvl2pPr>
+              <a:buNone/>
+              <a:defRPr sz="1650" b="0">
+                <a:solidFill>
+                  <a:srgbClr val="526674"/>
+                </a:solidFill>
+              </a:defRPr>
+            </a:lvl2pPr>
+            <a:lvl3pPr>
+              <a:buNone/>
+              <a:defRPr sz="1650" b="0">
+                <a:solidFill>
+                  <a:srgbClr val="526674"/>
+                </a:solidFill>
+              </a:defRPr>
+            </a:lvl3pPr>
+            <a:lvl4pPr>
+              <a:buNone/>
+              <a:defRPr sz="1650" b="0">
+                <a:solidFill>
+                  <a:srgbClr val="526674"/>
+                </a:solidFill>
+              </a:defRPr>
+            </a:lvl4pPr>
+            <a:lvl5pPr>
+              <a:buNone/>
+              <a:defRPr sz="1650" b="0">
+                <a:solidFill>
+                  <a:srgbClr val="526674"/>
+                </a:solidFill>
+              </a:defRPr>
+            </a:lvl5pPr>
+            <a:lvl6pPr>
+              <a:buNone/>
+              <a:defRPr sz="1650" b="0">
+                <a:solidFill>
+                  <a:srgbClr val="526674"/>
+                </a:solidFill>
+              </a:defRPr>
+            </a:lvl6pPr>
+            <a:lvl7pPr>
+              <a:buNone/>
+              <a:defRPr sz="1650" b="0">
+                <a:solidFill>
+                  <a:srgbClr val="526674"/>
+                </a:solidFill>
+              </a:defRPr>
+            </a:lvl7pPr>
+            <a:lvl8pPr>
+              <a:buNone/>
+              <a:defRPr sz="1650" b="0">
+                <a:solidFill>
+                  <a:srgbClr val="526674"/>
+                </a:solidFill>
+              </a:defRPr>
+            </a:lvl8pPr>
+            <a:lvl9pPr>
+              <a:buNone/>
+              <a:defRPr sz="1650" b="0">
+                <a:solidFill>
+                  <a:srgbClr val="526674"/>
+                </a:solidFill>
+              </a:defRPr>
+            </a:lvl9pPr>
           </a:lstStyle>
           <a:p xmlns:a="http://schemas.openxmlformats.org/drawingml/2006/main">
             <a:pPr>
+              <a:buNone/>
               <a:defRPr sz="1650" b="0">
                 <a:solidFill>
                   <a:srgbClr val="526674"/>
@@ -6256,7 +11508,25 @@
                   <a:srgbClr val="526674"/>
                 </a:solidFill>
               </a:rPr>
-              <a:t>The four sites have different disease prevalence and missing-data patterns.</a:t>
+              <a:t>Switzerland: RF F1 0.8712 &lt; reference 0.9565 (88/96 positive)</a:t>
+            </a:r>
+          </a:p>
+          <a:p xmlns:a="http://schemas.openxmlformats.org/drawingml/2006/main">
+            <a:pPr>
+              <a:buNone/>
+              <a:defRPr sz="1650" b="0">
+                <a:solidFill>
+                  <a:srgbClr val="526674"/>
+                </a:solidFill>
+              </a:defRPr>
+            </a:pPr>
+            <a:r>
+              <a:rPr sz="1650" b="0">
+                <a:solidFill>
+                  <a:srgbClr val="526674"/>
+                </a:solidFill>
+              </a:rPr>
+              <a:t>VA Long Beach: specificity 0.05; only 2/40 negatives correctly rejected</a:t>
             </a:r>
           </a:p>
         </p:txBody>
@@ -6328,9 +11598,82 @@
                 </a:solidFill>
               </a:defRPr>
             </a:defPPr>
+            <a:lvl1pPr>
+              <a:buNone/>
+              <a:defRPr sz="3150" b="1">
+                <a:solidFill>
+                  <a:srgbClr val="102B3F"/>
+                </a:solidFill>
+              </a:defRPr>
+            </a:lvl1pPr>
+            <a:lvl2pPr>
+              <a:buNone/>
+              <a:defRPr sz="3150" b="1">
+                <a:solidFill>
+                  <a:srgbClr val="102B3F"/>
+                </a:solidFill>
+              </a:defRPr>
+            </a:lvl2pPr>
+            <a:lvl3pPr>
+              <a:buNone/>
+              <a:defRPr sz="3150" b="1">
+                <a:solidFill>
+                  <a:srgbClr val="102B3F"/>
+                </a:solidFill>
+              </a:defRPr>
+            </a:lvl3pPr>
+            <a:lvl4pPr>
+              <a:buNone/>
+              <a:defRPr sz="3150" b="1">
+                <a:solidFill>
+                  <a:srgbClr val="102B3F"/>
+                </a:solidFill>
+              </a:defRPr>
+            </a:lvl4pPr>
+            <a:lvl5pPr>
+              <a:buNone/>
+              <a:defRPr sz="3150" b="1">
+                <a:solidFill>
+                  <a:srgbClr val="102B3F"/>
+                </a:solidFill>
+              </a:defRPr>
+            </a:lvl5pPr>
+            <a:lvl6pPr>
+              <a:buNone/>
+              <a:defRPr sz="3150" b="1">
+                <a:solidFill>
+                  <a:srgbClr val="102B3F"/>
+                </a:solidFill>
+              </a:defRPr>
+            </a:lvl6pPr>
+            <a:lvl7pPr>
+              <a:buNone/>
+              <a:defRPr sz="3150" b="1">
+                <a:solidFill>
+                  <a:srgbClr val="102B3F"/>
+                </a:solidFill>
+              </a:defRPr>
+            </a:lvl7pPr>
+            <a:lvl8pPr>
+              <a:buNone/>
+              <a:defRPr sz="3150" b="1">
+                <a:solidFill>
+                  <a:srgbClr val="102B3F"/>
+                </a:solidFill>
+              </a:defRPr>
+            </a:lvl8pPr>
+            <a:lvl9pPr>
+              <a:buNone/>
+              <a:defRPr sz="3150" b="1">
+                <a:solidFill>
+                  <a:srgbClr val="102B3F"/>
+                </a:solidFill>
+              </a:defRPr>
+            </a:lvl9pPr>
           </a:lstStyle>
           <a:p xmlns:a="http://schemas.openxmlformats.org/drawingml/2006/main">
             <a:pPr>
+              <a:buNone/>
               <a:defRPr sz="3150" b="1">
                 <a:solidFill>
                   <a:srgbClr val="102B3F"/>
@@ -6343,7 +11686,7 @@
                   <a:srgbClr val="102B3F"/>
                 </a:solidFill>
               </a:rPr>
-              <a:t>Interpretation and limitations</a:t>
+              <a:t>Provisional Bayesian Network</a:t>
             </a:r>
           </a:p>
         </p:txBody>
@@ -6386,9 +11729,82 @@
                 </a:solidFill>
               </a:defRPr>
             </a:defPPr>
+            <a:lvl1pPr>
+              <a:buNone/>
+              <a:defRPr sz="1125" b="0">
+                <a:solidFill>
+                  <a:srgbClr val="526674"/>
+                </a:solidFill>
+              </a:defRPr>
+            </a:lvl1pPr>
+            <a:lvl2pPr>
+              <a:buNone/>
+              <a:defRPr sz="1125" b="0">
+                <a:solidFill>
+                  <a:srgbClr val="526674"/>
+                </a:solidFill>
+              </a:defRPr>
+            </a:lvl2pPr>
+            <a:lvl3pPr>
+              <a:buNone/>
+              <a:defRPr sz="1125" b="0">
+                <a:solidFill>
+                  <a:srgbClr val="526674"/>
+                </a:solidFill>
+              </a:defRPr>
+            </a:lvl3pPr>
+            <a:lvl4pPr>
+              <a:buNone/>
+              <a:defRPr sz="1125" b="0">
+                <a:solidFill>
+                  <a:srgbClr val="526674"/>
+                </a:solidFill>
+              </a:defRPr>
+            </a:lvl4pPr>
+            <a:lvl5pPr>
+              <a:buNone/>
+              <a:defRPr sz="1125" b="0">
+                <a:solidFill>
+                  <a:srgbClr val="526674"/>
+                </a:solidFill>
+              </a:defRPr>
+            </a:lvl5pPr>
+            <a:lvl6pPr>
+              <a:buNone/>
+              <a:defRPr sz="1125" b="0">
+                <a:solidFill>
+                  <a:srgbClr val="526674"/>
+                </a:solidFill>
+              </a:defRPr>
+            </a:lvl6pPr>
+            <a:lvl7pPr>
+              <a:buNone/>
+              <a:defRPr sz="1125" b="0">
+                <a:solidFill>
+                  <a:srgbClr val="526674"/>
+                </a:solidFill>
+              </a:defRPr>
+            </a:lvl7pPr>
+            <a:lvl8pPr>
+              <a:buNone/>
+              <a:defRPr sz="1125" b="0">
+                <a:solidFill>
+                  <a:srgbClr val="526674"/>
+                </a:solidFill>
+              </a:defRPr>
+            </a:lvl8pPr>
+            <a:lvl9pPr>
+              <a:buNone/>
+              <a:defRPr sz="1125" b="0">
+                <a:solidFill>
+                  <a:srgbClr val="526674"/>
+                </a:solidFill>
+              </a:defRPr>
+            </a:lvl9pPr>
           </a:lstStyle>
           <a:p xmlns:a="http://schemas.openxmlformats.org/drawingml/2006/main">
             <a:pPr>
+              <a:buNone/>
               <a:defRPr sz="1125" b="0">
                 <a:solidFill>
                   <a:srgbClr val="526674"/>
@@ -6438,28 +11854,101 @@
           <a:bodyPr xmlns:a="http://schemas.openxmlformats.org/drawingml/2006/main" anchor="ctr"/>
           <a:lstStyle xmlns:a="http://schemas.openxmlformats.org/drawingml/2006/main">
             <a:defPPr>
-              <a:defRPr sz="1800" b="1">
+              <a:defRPr sz="1875" b="1">
                 <a:solidFill>
                   <a:srgbClr val="087F78"/>
                 </a:solidFill>
               </a:defRPr>
             </a:defPPr>
+            <a:lvl1pPr>
+              <a:buNone/>
+              <a:defRPr sz="1950" b="1">
+                <a:solidFill>
+                  <a:srgbClr val="087F78"/>
+                </a:solidFill>
+              </a:defRPr>
+            </a:lvl1pPr>
+            <a:lvl2pPr>
+              <a:buNone/>
+              <a:defRPr sz="1950" b="1">
+                <a:solidFill>
+                  <a:srgbClr val="087F78"/>
+                </a:solidFill>
+              </a:defRPr>
+            </a:lvl2pPr>
+            <a:lvl3pPr>
+              <a:buNone/>
+              <a:defRPr sz="1950" b="1">
+                <a:solidFill>
+                  <a:srgbClr val="087F78"/>
+                </a:solidFill>
+              </a:defRPr>
+            </a:lvl3pPr>
+            <a:lvl4pPr>
+              <a:buNone/>
+              <a:defRPr sz="1950" b="1">
+                <a:solidFill>
+                  <a:srgbClr val="087F78"/>
+                </a:solidFill>
+              </a:defRPr>
+            </a:lvl4pPr>
+            <a:lvl5pPr>
+              <a:buNone/>
+              <a:defRPr sz="1950" b="1">
+                <a:solidFill>
+                  <a:srgbClr val="087F78"/>
+                </a:solidFill>
+              </a:defRPr>
+            </a:lvl5pPr>
+            <a:lvl6pPr>
+              <a:buNone/>
+              <a:defRPr sz="1950" b="1">
+                <a:solidFill>
+                  <a:srgbClr val="087F78"/>
+                </a:solidFill>
+              </a:defRPr>
+            </a:lvl6pPr>
+            <a:lvl7pPr>
+              <a:buNone/>
+              <a:defRPr sz="1950" b="1">
+                <a:solidFill>
+                  <a:srgbClr val="087F78"/>
+                </a:solidFill>
+              </a:defRPr>
+            </a:lvl7pPr>
+            <a:lvl8pPr>
+              <a:buNone/>
+              <a:defRPr sz="1950" b="1">
+                <a:solidFill>
+                  <a:srgbClr val="087F78"/>
+                </a:solidFill>
+              </a:defRPr>
+            </a:lvl8pPr>
+            <a:lvl9pPr>
+              <a:buNone/>
+              <a:defRPr sz="1950" b="1">
+                <a:solidFill>
+                  <a:srgbClr val="087F78"/>
+                </a:solidFill>
+              </a:defRPr>
+            </a:lvl9pPr>
           </a:lstStyle>
           <a:p xmlns:a="http://schemas.openxmlformats.org/drawingml/2006/main">
             <a:pPr>
-              <a:defRPr sz="1800" b="1">
+              <a:buNone/>
+              <a:defRPr sz="1875" b="1">
                 <a:solidFill>
                   <a:srgbClr val="087F78"/>
                 </a:solidFill>
               </a:defRPr>
             </a:pPr>
             <a:r>
-              <a:rPr sz="1800" b="1">
+              <a:rPr sz="1875" b="1">
                 <a:solidFill>
                   <a:srgbClr val="087F78"/>
                 </a:solidFill>
               </a:rPr>
-              <a:t>Selected booster leads random forest by only 0.0004 F1</a:t>
+              <a:t>DAG: Y -&gt; all 11 features; oldpeak -&gt; slope (manual provisional graph)</a:t>
             </a:r>
           </a:p>
         </p:txBody>
@@ -6496,28 +11985,101 @@
           <a:bodyPr xmlns:a="http://schemas.openxmlformats.org/drawingml/2006/main" anchor="ctr"/>
           <a:lstStyle xmlns:a="http://schemas.openxmlformats.org/drawingml/2006/main">
             <a:defPPr>
-              <a:defRPr sz="1800" b="0">
+              <a:defRPr sz="1875" b="0">
                 <a:solidFill>
                   <a:srgbClr val="102B3F"/>
                 </a:solidFill>
               </a:defRPr>
             </a:defPPr>
+            <a:lvl1pPr>
+              <a:buNone/>
+              <a:defRPr sz="1950" b="0">
+                <a:solidFill>
+                  <a:srgbClr val="102B3F"/>
+                </a:solidFill>
+              </a:defRPr>
+            </a:lvl1pPr>
+            <a:lvl2pPr>
+              <a:buNone/>
+              <a:defRPr sz="1950" b="0">
+                <a:solidFill>
+                  <a:srgbClr val="102B3F"/>
+                </a:solidFill>
+              </a:defRPr>
+            </a:lvl2pPr>
+            <a:lvl3pPr>
+              <a:buNone/>
+              <a:defRPr sz="1950" b="0">
+                <a:solidFill>
+                  <a:srgbClr val="102B3F"/>
+                </a:solidFill>
+              </a:defRPr>
+            </a:lvl3pPr>
+            <a:lvl4pPr>
+              <a:buNone/>
+              <a:defRPr sz="1950" b="0">
+                <a:solidFill>
+                  <a:srgbClr val="102B3F"/>
+                </a:solidFill>
+              </a:defRPr>
+            </a:lvl4pPr>
+            <a:lvl5pPr>
+              <a:buNone/>
+              <a:defRPr sz="1950" b="0">
+                <a:solidFill>
+                  <a:srgbClr val="102B3F"/>
+                </a:solidFill>
+              </a:defRPr>
+            </a:lvl5pPr>
+            <a:lvl6pPr>
+              <a:buNone/>
+              <a:defRPr sz="1950" b="0">
+                <a:solidFill>
+                  <a:srgbClr val="102B3F"/>
+                </a:solidFill>
+              </a:defRPr>
+            </a:lvl6pPr>
+            <a:lvl7pPr>
+              <a:buNone/>
+              <a:defRPr sz="1950" b="0">
+                <a:solidFill>
+                  <a:srgbClr val="102B3F"/>
+                </a:solidFill>
+              </a:defRPr>
+            </a:lvl7pPr>
+            <a:lvl8pPr>
+              <a:buNone/>
+              <a:defRPr sz="1950" b="0">
+                <a:solidFill>
+                  <a:srgbClr val="102B3F"/>
+                </a:solidFill>
+              </a:defRPr>
+            </a:lvl8pPr>
+            <a:lvl9pPr>
+              <a:buNone/>
+              <a:defRPr sz="1950" b="0">
+                <a:solidFill>
+                  <a:srgbClr val="102B3F"/>
+                </a:solidFill>
+              </a:defRPr>
+            </a:lvl9pPr>
           </a:lstStyle>
           <a:p xmlns:a="http://schemas.openxmlformats.org/drawingml/2006/main">
             <a:pPr>
-              <a:defRPr sz="1800" b="0">
+              <a:buNone/>
+              <a:defRPr sz="1875" b="0">
                 <a:solidFill>
                   <a:srgbClr val="102B3F"/>
                 </a:solidFill>
               </a:defRPr>
             </a:pPr>
             <a:r>
-              <a:rPr sz="1800" b="0">
+              <a:rPr sz="1875" b="0">
                 <a:solidFill>
                   <a:srgbClr val="102B3F"/>
                 </a:solidFill>
               </a:rPr>
-              <a:t>Chest-pain category has the largest test permutation AUC drop</a:t>
+              <a:t>BN theory and UCI ST definitions do not validate these medical edges</a:t>
             </a:r>
           </a:p>
         </p:txBody>
@@ -6554,28 +12116,101 @@
           <a:bodyPr xmlns:a="http://schemas.openxmlformats.org/drawingml/2006/main" anchor="ctr"/>
           <a:lstStyle xmlns:a="http://schemas.openxmlformats.org/drawingml/2006/main">
             <a:defPPr>
-              <a:defRPr sz="1800" b="0">
+              <a:defRPr sz="1875" b="0">
                 <a:solidFill>
                   <a:srgbClr val="102B3F"/>
                 </a:solidFill>
               </a:defRPr>
             </a:defPPr>
+            <a:lvl1pPr>
+              <a:buNone/>
+              <a:defRPr sz="1950" b="0">
+                <a:solidFill>
+                  <a:srgbClr val="102B3F"/>
+                </a:solidFill>
+              </a:defRPr>
+            </a:lvl1pPr>
+            <a:lvl2pPr>
+              <a:buNone/>
+              <a:defRPr sz="1950" b="0">
+                <a:solidFill>
+                  <a:srgbClr val="102B3F"/>
+                </a:solidFill>
+              </a:defRPr>
+            </a:lvl2pPr>
+            <a:lvl3pPr>
+              <a:buNone/>
+              <a:defRPr sz="1950" b="0">
+                <a:solidFill>
+                  <a:srgbClr val="102B3F"/>
+                </a:solidFill>
+              </a:defRPr>
+            </a:lvl3pPr>
+            <a:lvl4pPr>
+              <a:buNone/>
+              <a:defRPr sz="1950" b="0">
+                <a:solidFill>
+                  <a:srgbClr val="102B3F"/>
+                </a:solidFill>
+              </a:defRPr>
+            </a:lvl4pPr>
+            <a:lvl5pPr>
+              <a:buNone/>
+              <a:defRPr sz="1950" b="0">
+                <a:solidFill>
+                  <a:srgbClr val="102B3F"/>
+                </a:solidFill>
+              </a:defRPr>
+            </a:lvl5pPr>
+            <a:lvl6pPr>
+              <a:buNone/>
+              <a:defRPr sz="1950" b="0">
+                <a:solidFill>
+                  <a:srgbClr val="102B3F"/>
+                </a:solidFill>
+              </a:defRPr>
+            </a:lvl6pPr>
+            <a:lvl7pPr>
+              <a:buNone/>
+              <a:defRPr sz="1950" b="0">
+                <a:solidFill>
+                  <a:srgbClr val="102B3F"/>
+                </a:solidFill>
+              </a:defRPr>
+            </a:lvl7pPr>
+            <a:lvl8pPr>
+              <a:buNone/>
+              <a:defRPr sz="1950" b="0">
+                <a:solidFill>
+                  <a:srgbClr val="102B3F"/>
+                </a:solidFill>
+              </a:defRPr>
+            </a:lvl8pPr>
+            <a:lvl9pPr>
+              <a:buNone/>
+              <a:defRPr sz="1950" b="0">
+                <a:solidFill>
+                  <a:srgbClr val="102B3F"/>
+                </a:solidFill>
+              </a:defRPr>
+            </a:lvl9pPr>
           </a:lstStyle>
           <a:p xmlns:a="http://schemas.openxmlformats.org/drawingml/2006/main">
             <a:pPr>
-              <a:defRPr sz="1800" b="0">
+              <a:buNone/>
+              <a:defRPr sz="1875" b="0">
                 <a:solidFill>
                   <a:srgbClr val="102B3F"/>
                 </a:solidFill>
               </a:defRPr>
             </a:pPr>
             <a:r>
-              <a:rPr sz="1800" b="0">
+              <a:rPr sz="1875" b="0">
                 <a:solidFill>
                   <a:srgbClr val="102B3F"/>
                 </a:solidFill>
               </a:rPr>
-              <a:t>Permutation importance is exploratory and affected by correlation</a:t>
+              <a:t>CPTs: (count + alpha)/(parent count + K alpha), with alpha = 1</a:t>
             </a:r>
           </a:p>
         </p:txBody>
@@ -6612,28 +12247,101 @@
           <a:bodyPr xmlns:a="http://schemas.openxmlformats.org/drawingml/2006/main" anchor="ctr"/>
           <a:lstStyle xmlns:a="http://schemas.openxmlformats.org/drawingml/2006/main">
             <a:defPPr>
-              <a:defRPr sz="1800" b="0">
+              <a:defRPr sz="1875" b="0">
                 <a:solidFill>
                   <a:srgbClr val="102B3F"/>
                 </a:solidFill>
               </a:defRPr>
             </a:defPPr>
+            <a:lvl1pPr>
+              <a:buNone/>
+              <a:defRPr sz="1950" b="0">
+                <a:solidFill>
+                  <a:srgbClr val="102B3F"/>
+                </a:solidFill>
+              </a:defRPr>
+            </a:lvl1pPr>
+            <a:lvl2pPr>
+              <a:buNone/>
+              <a:defRPr sz="1950" b="0">
+                <a:solidFill>
+                  <a:srgbClr val="102B3F"/>
+                </a:solidFill>
+              </a:defRPr>
+            </a:lvl2pPr>
+            <a:lvl3pPr>
+              <a:buNone/>
+              <a:defRPr sz="1950" b="0">
+                <a:solidFill>
+                  <a:srgbClr val="102B3F"/>
+                </a:solidFill>
+              </a:defRPr>
+            </a:lvl3pPr>
+            <a:lvl4pPr>
+              <a:buNone/>
+              <a:defRPr sz="1950" b="0">
+                <a:solidFill>
+                  <a:srgbClr val="102B3F"/>
+                </a:solidFill>
+              </a:defRPr>
+            </a:lvl4pPr>
+            <a:lvl5pPr>
+              <a:buNone/>
+              <a:defRPr sz="1950" b="0">
+                <a:solidFill>
+                  <a:srgbClr val="102B3F"/>
+                </a:solidFill>
+              </a:defRPr>
+            </a:lvl5pPr>
+            <a:lvl6pPr>
+              <a:buNone/>
+              <a:defRPr sz="1950" b="0">
+                <a:solidFill>
+                  <a:srgbClr val="102B3F"/>
+                </a:solidFill>
+              </a:defRPr>
+            </a:lvl6pPr>
+            <a:lvl7pPr>
+              <a:buNone/>
+              <a:defRPr sz="1950" b="0">
+                <a:solidFill>
+                  <a:srgbClr val="102B3F"/>
+                </a:solidFill>
+              </a:defRPr>
+            </a:lvl7pPr>
+            <a:lvl8pPr>
+              <a:buNone/>
+              <a:defRPr sz="1950" b="0">
+                <a:solidFill>
+                  <a:srgbClr val="102B3F"/>
+                </a:solidFill>
+              </a:defRPr>
+            </a:lvl8pPr>
+            <a:lvl9pPr>
+              <a:buNone/>
+              <a:defRPr sz="1950" b="0">
+                <a:solidFill>
+                  <a:srgbClr val="102B3F"/>
+                </a:solidFill>
+              </a:defRPr>
+            </a:lvl9pPr>
           </a:lstStyle>
           <a:p xmlns:a="http://schemas.openxmlformats.org/drawingml/2006/main">
             <a:pPr>
-              <a:defRPr sz="1800" b="0">
+              <a:buNone/>
+              <a:defRPr sz="1875" b="0">
                 <a:solidFill>
                   <a:srgbClr val="102B3F"/>
                 </a:solidFill>
               </a:defRPr>
             </a:pPr>
             <a:r>
-              <a:rPr sz="1800" b="0">
+              <a:rPr sz="1875" b="0">
                 <a:solidFill>
                   <a:srgbClr val="102B3F"/>
                 </a:solidFill>
               </a:rPr>
-              <a:t>Small historical cohort; site shift limits transport</a:t>
+              <a:t>Training-only bins/imputation; exact marginalization of missing evidence</a:t>
             </a:r>
           </a:p>
         </p:txBody>
@@ -6670,28 +12378,101 @@
           <a:bodyPr xmlns:a="http://schemas.openxmlformats.org/drawingml/2006/main" anchor="ctr"/>
           <a:lstStyle xmlns:a="http://schemas.openxmlformats.org/drawingml/2006/main">
             <a:defPPr>
-              <a:defRPr sz="1800" b="0">
+              <a:defRPr sz="1875" b="0">
                 <a:solidFill>
                   <a:srgbClr val="102B3F"/>
                 </a:solidFill>
               </a:defRPr>
             </a:defPPr>
+            <a:lvl1pPr>
+              <a:buNone/>
+              <a:defRPr sz="1950" b="0">
+                <a:solidFill>
+                  <a:srgbClr val="102B3F"/>
+                </a:solidFill>
+              </a:defRPr>
+            </a:lvl1pPr>
+            <a:lvl2pPr>
+              <a:buNone/>
+              <a:defRPr sz="1950" b="0">
+                <a:solidFill>
+                  <a:srgbClr val="102B3F"/>
+                </a:solidFill>
+              </a:defRPr>
+            </a:lvl2pPr>
+            <a:lvl3pPr>
+              <a:buNone/>
+              <a:defRPr sz="1950" b="0">
+                <a:solidFill>
+                  <a:srgbClr val="102B3F"/>
+                </a:solidFill>
+              </a:defRPr>
+            </a:lvl3pPr>
+            <a:lvl4pPr>
+              <a:buNone/>
+              <a:defRPr sz="1950" b="0">
+                <a:solidFill>
+                  <a:srgbClr val="102B3F"/>
+                </a:solidFill>
+              </a:defRPr>
+            </a:lvl4pPr>
+            <a:lvl5pPr>
+              <a:buNone/>
+              <a:defRPr sz="1950" b="0">
+                <a:solidFill>
+                  <a:srgbClr val="102B3F"/>
+                </a:solidFill>
+              </a:defRPr>
+            </a:lvl5pPr>
+            <a:lvl6pPr>
+              <a:buNone/>
+              <a:defRPr sz="1950" b="0">
+                <a:solidFill>
+                  <a:srgbClr val="102B3F"/>
+                </a:solidFill>
+              </a:defRPr>
+            </a:lvl6pPr>
+            <a:lvl7pPr>
+              <a:buNone/>
+              <a:defRPr sz="1950" b="0">
+                <a:solidFill>
+                  <a:srgbClr val="102B3F"/>
+                </a:solidFill>
+              </a:defRPr>
+            </a:lvl7pPr>
+            <a:lvl8pPr>
+              <a:buNone/>
+              <a:defRPr sz="1950" b="0">
+                <a:solidFill>
+                  <a:srgbClr val="102B3F"/>
+                </a:solidFill>
+              </a:defRPr>
+            </a:lvl8pPr>
+            <a:lvl9pPr>
+              <a:buNone/>
+              <a:defRPr sz="1950" b="0">
+                <a:solidFill>
+                  <a:srgbClr val="102B3F"/>
+                </a:solidFill>
+              </a:defRPr>
+            </a:lvl9pPr>
           </a:lstStyle>
           <a:p xmlns:a="http://schemas.openxmlformats.org/drawingml/2006/main">
             <a:pPr>
-              <a:defRPr sz="1800" b="0">
+              <a:buNone/>
+              <a:defRPr sz="1875" b="0">
                 <a:solidFill>
                   <a:srgbClr val="102B3F"/>
                 </a:solidFill>
               </a:defRPr>
             </a:pPr>
             <a:r>
-              <a:rPr sz="1800" b="0">
+              <a:rPr sz="1875" b="0">
                 <a:solidFill>
                   <a:srgbClr val="102B3F"/>
                 </a:solidFill>
               </a:rPr>
-              <a:t>No prospective clinical or independent external validation</a:t>
+              <a:t>12 edges / 54 omitted pairs reviewed; domain justification remains partial</a:t>
             </a:r>
           </a:p>
         </p:txBody>
@@ -6763,9 +12544,82 @@
                 </a:solidFill>
               </a:defRPr>
             </a:defPPr>
+            <a:lvl1pPr>
+              <a:buNone/>
+              <a:defRPr sz="3150" b="1">
+                <a:solidFill>
+                  <a:srgbClr val="102B3F"/>
+                </a:solidFill>
+              </a:defRPr>
+            </a:lvl1pPr>
+            <a:lvl2pPr>
+              <a:buNone/>
+              <a:defRPr sz="3150" b="1">
+                <a:solidFill>
+                  <a:srgbClr val="102B3F"/>
+                </a:solidFill>
+              </a:defRPr>
+            </a:lvl2pPr>
+            <a:lvl3pPr>
+              <a:buNone/>
+              <a:defRPr sz="3150" b="1">
+                <a:solidFill>
+                  <a:srgbClr val="102B3F"/>
+                </a:solidFill>
+              </a:defRPr>
+            </a:lvl3pPr>
+            <a:lvl4pPr>
+              <a:buNone/>
+              <a:defRPr sz="3150" b="1">
+                <a:solidFill>
+                  <a:srgbClr val="102B3F"/>
+                </a:solidFill>
+              </a:defRPr>
+            </a:lvl4pPr>
+            <a:lvl5pPr>
+              <a:buNone/>
+              <a:defRPr sz="3150" b="1">
+                <a:solidFill>
+                  <a:srgbClr val="102B3F"/>
+                </a:solidFill>
+              </a:defRPr>
+            </a:lvl5pPr>
+            <a:lvl6pPr>
+              <a:buNone/>
+              <a:defRPr sz="3150" b="1">
+                <a:solidFill>
+                  <a:srgbClr val="102B3F"/>
+                </a:solidFill>
+              </a:defRPr>
+            </a:lvl6pPr>
+            <a:lvl7pPr>
+              <a:buNone/>
+              <a:defRPr sz="3150" b="1">
+                <a:solidFill>
+                  <a:srgbClr val="102B3F"/>
+                </a:solidFill>
+              </a:defRPr>
+            </a:lvl7pPr>
+            <a:lvl8pPr>
+              <a:buNone/>
+              <a:defRPr sz="3150" b="1">
+                <a:solidFill>
+                  <a:srgbClr val="102B3F"/>
+                </a:solidFill>
+              </a:defRPr>
+            </a:lvl8pPr>
+            <a:lvl9pPr>
+              <a:buNone/>
+              <a:defRPr sz="3150" b="1">
+                <a:solidFill>
+                  <a:srgbClr val="102B3F"/>
+                </a:solidFill>
+              </a:defRPr>
+            </a:lvl9pPr>
           </a:lstStyle>
           <a:p xmlns:a="http://schemas.openxmlformats.org/drawingml/2006/main">
             <a:pPr>
+              <a:buNone/>
               <a:defRPr sz="3150" b="1">
                 <a:solidFill>
                   <a:srgbClr val="102B3F"/>
@@ -6778,7 +12632,7 @@
                   <a:srgbClr val="102B3F"/>
                 </a:solidFill>
               </a:rPr>
-              <a:t>Reproduction and viva</a:t>
+              <a:t>Reproducibility, limitations and viva</a:t>
             </a:r>
           </a:p>
         </p:txBody>
@@ -6821,9 +12675,82 @@
                 </a:solidFill>
               </a:defRPr>
             </a:defPPr>
+            <a:lvl1pPr>
+              <a:buNone/>
+              <a:defRPr sz="1125" b="0">
+                <a:solidFill>
+                  <a:srgbClr val="526674"/>
+                </a:solidFill>
+              </a:defRPr>
+            </a:lvl1pPr>
+            <a:lvl2pPr>
+              <a:buNone/>
+              <a:defRPr sz="1125" b="0">
+                <a:solidFill>
+                  <a:srgbClr val="526674"/>
+                </a:solidFill>
+              </a:defRPr>
+            </a:lvl2pPr>
+            <a:lvl3pPr>
+              <a:buNone/>
+              <a:defRPr sz="1125" b="0">
+                <a:solidFill>
+                  <a:srgbClr val="526674"/>
+                </a:solidFill>
+              </a:defRPr>
+            </a:lvl3pPr>
+            <a:lvl4pPr>
+              <a:buNone/>
+              <a:defRPr sz="1125" b="0">
+                <a:solidFill>
+                  <a:srgbClr val="526674"/>
+                </a:solidFill>
+              </a:defRPr>
+            </a:lvl4pPr>
+            <a:lvl5pPr>
+              <a:buNone/>
+              <a:defRPr sz="1125" b="0">
+                <a:solidFill>
+                  <a:srgbClr val="526674"/>
+                </a:solidFill>
+              </a:defRPr>
+            </a:lvl5pPr>
+            <a:lvl6pPr>
+              <a:buNone/>
+              <a:defRPr sz="1125" b="0">
+                <a:solidFill>
+                  <a:srgbClr val="526674"/>
+                </a:solidFill>
+              </a:defRPr>
+            </a:lvl6pPr>
+            <a:lvl7pPr>
+              <a:buNone/>
+              <a:defRPr sz="1125" b="0">
+                <a:solidFill>
+                  <a:srgbClr val="526674"/>
+                </a:solidFill>
+              </a:defRPr>
+            </a:lvl7pPr>
+            <a:lvl8pPr>
+              <a:buNone/>
+              <a:defRPr sz="1125" b="0">
+                <a:solidFill>
+                  <a:srgbClr val="526674"/>
+                </a:solidFill>
+              </a:defRPr>
+            </a:lvl8pPr>
+            <a:lvl9pPr>
+              <a:buNone/>
+              <a:defRPr sz="1125" b="0">
+                <a:solidFill>
+                  <a:srgbClr val="526674"/>
+                </a:solidFill>
+              </a:defRPr>
+            </a:lvl9pPr>
           </a:lstStyle>
           <a:p xmlns:a="http://schemas.openxmlformats.org/drawingml/2006/main">
             <a:pPr>
+              <a:buNone/>
               <a:defRPr sz="1125" b="0">
                 <a:solidFill>
                   <a:srgbClr val="526674"/>
@@ -6873,28 +12800,101 @@
           <a:bodyPr xmlns:a="http://schemas.openxmlformats.org/drawingml/2006/main" anchor="ctr"/>
           <a:lstStyle xmlns:a="http://schemas.openxmlformats.org/drawingml/2006/main">
             <a:defPPr>
+              <a:defRPr sz="1875" b="1">
+                <a:solidFill>
+                  <a:srgbClr val="087F78"/>
+                </a:solidFill>
+              </a:defRPr>
+            </a:defPPr>
+            <a:lvl1pPr>
+              <a:buNone/>
               <a:defRPr sz="1950" b="1">
                 <a:solidFill>
                   <a:srgbClr val="087F78"/>
                 </a:solidFill>
               </a:defRPr>
-            </a:defPPr>
+            </a:lvl1pPr>
+            <a:lvl2pPr>
+              <a:buNone/>
+              <a:defRPr sz="1950" b="1">
+                <a:solidFill>
+                  <a:srgbClr val="087F78"/>
+                </a:solidFill>
+              </a:defRPr>
+            </a:lvl2pPr>
+            <a:lvl3pPr>
+              <a:buNone/>
+              <a:defRPr sz="1950" b="1">
+                <a:solidFill>
+                  <a:srgbClr val="087F78"/>
+                </a:solidFill>
+              </a:defRPr>
+            </a:lvl3pPr>
+            <a:lvl4pPr>
+              <a:buNone/>
+              <a:defRPr sz="1950" b="1">
+                <a:solidFill>
+                  <a:srgbClr val="087F78"/>
+                </a:solidFill>
+              </a:defRPr>
+            </a:lvl4pPr>
+            <a:lvl5pPr>
+              <a:buNone/>
+              <a:defRPr sz="1950" b="1">
+                <a:solidFill>
+                  <a:srgbClr val="087F78"/>
+                </a:solidFill>
+              </a:defRPr>
+            </a:lvl5pPr>
+            <a:lvl6pPr>
+              <a:buNone/>
+              <a:defRPr sz="1950" b="1">
+                <a:solidFill>
+                  <a:srgbClr val="087F78"/>
+                </a:solidFill>
+              </a:defRPr>
+            </a:lvl6pPr>
+            <a:lvl7pPr>
+              <a:buNone/>
+              <a:defRPr sz="1950" b="1">
+                <a:solidFill>
+                  <a:srgbClr val="087F78"/>
+                </a:solidFill>
+              </a:defRPr>
+            </a:lvl7pPr>
+            <a:lvl8pPr>
+              <a:buNone/>
+              <a:defRPr sz="1950" b="1">
+                <a:solidFill>
+                  <a:srgbClr val="087F78"/>
+                </a:solidFill>
+              </a:defRPr>
+            </a:lvl8pPr>
+            <a:lvl9pPr>
+              <a:buNone/>
+              <a:defRPr sz="1950" b="1">
+                <a:solidFill>
+                  <a:srgbClr val="087F78"/>
+                </a:solidFill>
+              </a:defRPr>
+            </a:lvl9pPr>
           </a:lstStyle>
           <a:p xmlns:a="http://schemas.openxmlformats.org/drawingml/2006/main">
             <a:pPr>
-              <a:defRPr sz="1950" b="1">
+              <a:buNone/>
+              <a:defRPr sz="1875" b="1">
                 <a:solidFill>
                   <a:srgbClr val="087F78"/>
                 </a:solidFill>
               </a:defRPr>
             </a:pPr>
             <a:r>
-              <a:rPr sz="1950" b="1">
+              <a:rPr sz="1875" b="1">
                 <a:solidFill>
                   <a:srgbClr val="087F78"/>
                 </a:solidFill>
               </a:rPr>
-              <a:t>python eda.py → dataset audit</a:t>
+              <a:t>38 tests pass now; all 25 frozen models reproduce saved predictions</a:t>
             </a:r>
           </a:p>
         </p:txBody>
@@ -6931,28 +12931,101 @@
           <a:bodyPr xmlns:a="http://schemas.openxmlformats.org/drawingml/2006/main" anchor="ctr"/>
           <a:lstStyle xmlns:a="http://schemas.openxmlformats.org/drawingml/2006/main">
             <a:defPPr>
+              <a:defRPr sz="1875" b="0">
+                <a:solidFill>
+                  <a:srgbClr val="102B3F"/>
+                </a:solidFill>
+              </a:defRPr>
+            </a:defPPr>
+            <a:lvl1pPr>
+              <a:buNone/>
               <a:defRPr sz="1950" b="0">
                 <a:solidFill>
                   <a:srgbClr val="102B3F"/>
                 </a:solidFill>
               </a:defRPr>
-            </a:defPPr>
+            </a:lvl1pPr>
+            <a:lvl2pPr>
+              <a:buNone/>
+              <a:defRPr sz="1950" b="0">
+                <a:solidFill>
+                  <a:srgbClr val="102B3F"/>
+                </a:solidFill>
+              </a:defRPr>
+            </a:lvl2pPr>
+            <a:lvl3pPr>
+              <a:buNone/>
+              <a:defRPr sz="1950" b="0">
+                <a:solidFill>
+                  <a:srgbClr val="102B3F"/>
+                </a:solidFill>
+              </a:defRPr>
+            </a:lvl3pPr>
+            <a:lvl4pPr>
+              <a:buNone/>
+              <a:defRPr sz="1950" b="0">
+                <a:solidFill>
+                  <a:srgbClr val="102B3F"/>
+                </a:solidFill>
+              </a:defRPr>
+            </a:lvl4pPr>
+            <a:lvl5pPr>
+              <a:buNone/>
+              <a:defRPr sz="1950" b="0">
+                <a:solidFill>
+                  <a:srgbClr val="102B3F"/>
+                </a:solidFill>
+              </a:defRPr>
+            </a:lvl5pPr>
+            <a:lvl6pPr>
+              <a:buNone/>
+              <a:defRPr sz="1950" b="0">
+                <a:solidFill>
+                  <a:srgbClr val="102B3F"/>
+                </a:solidFill>
+              </a:defRPr>
+            </a:lvl6pPr>
+            <a:lvl7pPr>
+              <a:buNone/>
+              <a:defRPr sz="1950" b="0">
+                <a:solidFill>
+                  <a:srgbClr val="102B3F"/>
+                </a:solidFill>
+              </a:defRPr>
+            </a:lvl7pPr>
+            <a:lvl8pPr>
+              <a:buNone/>
+              <a:defRPr sz="1950" b="0">
+                <a:solidFill>
+                  <a:srgbClr val="102B3F"/>
+                </a:solidFill>
+              </a:defRPr>
+            </a:lvl8pPr>
+            <a:lvl9pPr>
+              <a:buNone/>
+              <a:defRPr sz="1950" b="0">
+                <a:solidFill>
+                  <a:srgbClr val="102B3F"/>
+                </a:solidFill>
+              </a:defRPr>
+            </a:lvl9pPr>
           </a:lstStyle>
           <a:p xmlns:a="http://schemas.openxmlformats.org/drawingml/2006/main">
             <a:pPr>
-              <a:defRPr sz="1950" b="0">
+              <a:buNone/>
+              <a:defRPr sz="1875" b="0">
                 <a:solidFill>
                   <a:srgbClr val="102B3F"/>
                 </a:solidFill>
               </a:defRPr>
             </a:pPr>
             <a:r>
-              <a:rPr sz="1950" b="0">
+              <a:rPr sz="1875" b="0">
                 <a:solidFill>
                   <a:srgbClr val="102B3F"/>
                 </a:solidFill>
               </a:rPr>
-              <a:t>python train.py → saved model and metrics</a:t>
+              <a:t>Original run: 2940 fits in 340.927 seconds; no new training</a:t>
             </a:r>
           </a:p>
         </p:txBody>
@@ -6989,28 +13062,101 @@
           <a:bodyPr xmlns:a="http://schemas.openxmlformats.org/drawingml/2006/main" anchor="ctr"/>
           <a:lstStyle xmlns:a="http://schemas.openxmlformats.org/drawingml/2006/main">
             <a:defPPr>
+              <a:defRPr sz="1875" b="0">
+                <a:solidFill>
+                  <a:srgbClr val="102B3F"/>
+                </a:solidFill>
+              </a:defRPr>
+            </a:defPPr>
+            <a:lvl1pPr>
+              <a:buNone/>
               <a:defRPr sz="1950" b="0">
                 <a:solidFill>
                   <a:srgbClr val="102B3F"/>
                 </a:solidFill>
               </a:defRPr>
-            </a:defPPr>
+            </a:lvl1pPr>
+            <a:lvl2pPr>
+              <a:buNone/>
+              <a:defRPr sz="1950" b="0">
+                <a:solidFill>
+                  <a:srgbClr val="102B3F"/>
+                </a:solidFill>
+              </a:defRPr>
+            </a:lvl2pPr>
+            <a:lvl3pPr>
+              <a:buNone/>
+              <a:defRPr sz="1950" b="0">
+                <a:solidFill>
+                  <a:srgbClr val="102B3F"/>
+                </a:solidFill>
+              </a:defRPr>
+            </a:lvl3pPr>
+            <a:lvl4pPr>
+              <a:buNone/>
+              <a:defRPr sz="1950" b="0">
+                <a:solidFill>
+                  <a:srgbClr val="102B3F"/>
+                </a:solidFill>
+              </a:defRPr>
+            </a:lvl4pPr>
+            <a:lvl5pPr>
+              <a:buNone/>
+              <a:defRPr sz="1950" b="0">
+                <a:solidFill>
+                  <a:srgbClr val="102B3F"/>
+                </a:solidFill>
+              </a:defRPr>
+            </a:lvl5pPr>
+            <a:lvl6pPr>
+              <a:buNone/>
+              <a:defRPr sz="1950" b="0">
+                <a:solidFill>
+                  <a:srgbClr val="102B3F"/>
+                </a:solidFill>
+              </a:defRPr>
+            </a:lvl6pPr>
+            <a:lvl7pPr>
+              <a:buNone/>
+              <a:defRPr sz="1950" b="0">
+                <a:solidFill>
+                  <a:srgbClr val="102B3F"/>
+                </a:solidFill>
+              </a:defRPr>
+            </a:lvl7pPr>
+            <a:lvl8pPr>
+              <a:buNone/>
+              <a:defRPr sz="1950" b="0">
+                <a:solidFill>
+                  <a:srgbClr val="102B3F"/>
+                </a:solidFill>
+              </a:defRPr>
+            </a:lvl8pPr>
+            <a:lvl9pPr>
+              <a:buNone/>
+              <a:defRPr sz="1950" b="0">
+                <a:solidFill>
+                  <a:srgbClr val="102B3F"/>
+                </a:solidFill>
+              </a:defRPr>
+            </a:lvl9pPr>
           </a:lstStyle>
           <a:p xmlns:a="http://schemas.openxmlformats.org/drawingml/2006/main">
             <a:pPr>
-              <a:defRPr sz="1950" b="0">
+              <a:buNone/>
+              <a:defRPr sz="1875" b="0">
                 <a:solidFill>
                   <a:srgbClr val="102B3F"/>
                 </a:solidFill>
               </a:defRPr>
             </a:pPr>
             <a:r>
-              <a:rPr sz="1950" b="0">
+              <a:rPr sz="1875" b="0">
                 <a:solidFill>
                   <a:srgbClr val="102B3F"/>
                 </a:solidFill>
               </a:rPr>
-              <a:t>streamlit run app.py → prediction and evidence pages</a:t>
+              <a:t>App loads saved RF (0.38) and provisional BN comparison (0.54)</a:t>
             </a:r>
           </a:p>
         </p:txBody>
@@ -7047,28 +13193,101 @@
           <a:bodyPr xmlns:a="http://schemas.openxmlformats.org/drawingml/2006/main" anchor="ctr"/>
           <a:lstStyle xmlns:a="http://schemas.openxmlformats.org/drawingml/2006/main">
             <a:defPPr>
+              <a:defRPr sz="1875" b="0">
+                <a:solidFill>
+                  <a:srgbClr val="102B3F"/>
+                </a:solidFill>
+              </a:defRPr>
+            </a:defPPr>
+            <a:lvl1pPr>
+              <a:buNone/>
               <a:defRPr sz="1950" b="0">
                 <a:solidFill>
                   <a:srgbClr val="102B3F"/>
                 </a:solidFill>
               </a:defRPr>
-            </a:defPPr>
+            </a:lvl1pPr>
+            <a:lvl2pPr>
+              <a:buNone/>
+              <a:defRPr sz="1950" b="0">
+                <a:solidFill>
+                  <a:srgbClr val="102B3F"/>
+                </a:solidFill>
+              </a:defRPr>
+            </a:lvl2pPr>
+            <a:lvl3pPr>
+              <a:buNone/>
+              <a:defRPr sz="1950" b="0">
+                <a:solidFill>
+                  <a:srgbClr val="102B3F"/>
+                </a:solidFill>
+              </a:defRPr>
+            </a:lvl3pPr>
+            <a:lvl4pPr>
+              <a:buNone/>
+              <a:defRPr sz="1950" b="0">
+                <a:solidFill>
+                  <a:srgbClr val="102B3F"/>
+                </a:solidFill>
+              </a:defRPr>
+            </a:lvl4pPr>
+            <a:lvl5pPr>
+              <a:buNone/>
+              <a:defRPr sz="1950" b="0">
+                <a:solidFill>
+                  <a:srgbClr val="102B3F"/>
+                </a:solidFill>
+              </a:defRPr>
+            </a:lvl5pPr>
+            <a:lvl6pPr>
+              <a:buNone/>
+              <a:defRPr sz="1950" b="0">
+                <a:solidFill>
+                  <a:srgbClr val="102B3F"/>
+                </a:solidFill>
+              </a:defRPr>
+            </a:lvl6pPr>
+            <a:lvl7pPr>
+              <a:buNone/>
+              <a:defRPr sz="1950" b="0">
+                <a:solidFill>
+                  <a:srgbClr val="102B3F"/>
+                </a:solidFill>
+              </a:defRPr>
+            </a:lvl7pPr>
+            <a:lvl8pPr>
+              <a:buNone/>
+              <a:defRPr sz="1950" b="0">
+                <a:solidFill>
+                  <a:srgbClr val="102B3F"/>
+                </a:solidFill>
+              </a:defRPr>
+            </a:lvl8pPr>
+            <a:lvl9pPr>
+              <a:buNone/>
+              <a:defRPr sz="1950" b="0">
+                <a:solidFill>
+                  <a:srgbClr val="102B3F"/>
+                </a:solidFill>
+              </a:defRPr>
+            </a:lvl9pPr>
           </a:lstStyle>
           <a:p xmlns:a="http://schemas.openxmlformats.org/drawingml/2006/main">
             <a:pPr>
-              <a:defRPr sz="1950" b="0">
+              <a:buNone/>
+              <a:defRPr sz="1875" b="0">
                 <a:solidFill>
                   <a:srgbClr val="102B3F"/>
                 </a:solidFill>
               </a:defRPr>
             </a:pPr>
             <a:r>
-              <a:rPr sz="1950" b="0">
+              <a:rPr sz="1875" b="0">
                 <a:solidFill>
                   <a:srgbClr val="102B3F"/>
                 </a:solidFill>
               </a:rPr>
-              <a:t>Explain target, split, leakage control, metrics and hospital shift</a:t>
+              <a:t>Prior test exposure, weak site specificity and ID 304 limit conclusions</a:t>
             </a:r>
           </a:p>
         </p:txBody>
@@ -7105,28 +13324,101 @@
           <a:bodyPr xmlns:a="http://schemas.openxmlformats.org/drawingml/2006/main" anchor="ctr"/>
           <a:lstStyle xmlns:a="http://schemas.openxmlformats.org/drawingml/2006/main">
             <a:defPPr>
+              <a:defRPr sz="1875" b="0">
+                <a:solidFill>
+                  <a:srgbClr val="102B3F"/>
+                </a:solidFill>
+              </a:defRPr>
+            </a:defPPr>
+            <a:lvl1pPr>
+              <a:buNone/>
               <a:defRPr sz="1950" b="0">
                 <a:solidFill>
                   <a:srgbClr val="102B3F"/>
                 </a:solidFill>
               </a:defRPr>
-            </a:defPPr>
+            </a:lvl1pPr>
+            <a:lvl2pPr>
+              <a:buNone/>
+              <a:defRPr sz="1950" b="0">
+                <a:solidFill>
+                  <a:srgbClr val="102B3F"/>
+                </a:solidFill>
+              </a:defRPr>
+            </a:lvl2pPr>
+            <a:lvl3pPr>
+              <a:buNone/>
+              <a:defRPr sz="1950" b="0">
+                <a:solidFill>
+                  <a:srgbClr val="102B3F"/>
+                </a:solidFill>
+              </a:defRPr>
+            </a:lvl3pPr>
+            <a:lvl4pPr>
+              <a:buNone/>
+              <a:defRPr sz="1950" b="0">
+                <a:solidFill>
+                  <a:srgbClr val="102B3F"/>
+                </a:solidFill>
+              </a:defRPr>
+            </a:lvl4pPr>
+            <a:lvl5pPr>
+              <a:buNone/>
+              <a:defRPr sz="1950" b="0">
+                <a:solidFill>
+                  <a:srgbClr val="102B3F"/>
+                </a:solidFill>
+              </a:defRPr>
+            </a:lvl5pPr>
+            <a:lvl6pPr>
+              <a:buNone/>
+              <a:defRPr sz="1950" b="0">
+                <a:solidFill>
+                  <a:srgbClr val="102B3F"/>
+                </a:solidFill>
+              </a:defRPr>
+            </a:lvl6pPr>
+            <a:lvl7pPr>
+              <a:buNone/>
+              <a:defRPr sz="1950" b="0">
+                <a:solidFill>
+                  <a:srgbClr val="102B3F"/>
+                </a:solidFill>
+              </a:defRPr>
+            </a:lvl7pPr>
+            <a:lvl8pPr>
+              <a:buNone/>
+              <a:defRPr sz="1950" b="0">
+                <a:solidFill>
+                  <a:srgbClr val="102B3F"/>
+                </a:solidFill>
+              </a:defRPr>
+            </a:lvl8pPr>
+            <a:lvl9pPr>
+              <a:buNone/>
+              <a:defRPr sz="1950" b="0">
+                <a:solidFill>
+                  <a:srgbClr val="102B3F"/>
+                </a:solidFill>
+              </a:defRPr>
+            </a:lvl9pPr>
           </a:lstStyle>
           <a:p xmlns:a="http://schemas.openxmlformats.org/drawingml/2006/main">
             <a:pPr>
-              <a:defRPr sz="1950" b="0">
+              <a:buNone/>
+              <a:defRPr sz="1875" b="0">
                 <a:solidFill>
                   <a:srgbClr val="102B3F"/>
                 </a:solidFill>
               </a:defRPr>
             </a:pPr>
             <a:r>
-              <a:rPr sz="1950" b="0">
+              <a:rPr sz="1875" b="0">
                 <a:solidFill>
                   <a:srgbClr val="102B3F"/>
                 </a:solidFill>
               </a:rPr>
-              <a:t>Phase 1 contains classical ML only</a:t>
+              <a:t>Contributions and graph review pending. Neural networks belong to Phase 2</a:t>
             </a:r>
           </a:p>
         </p:txBody>
